--- a/Презентация1.pptx
+++ b/Презентация1.pptx
@@ -5,7 +5,7 @@
     <p:sldMasterId id="2147483648" r:id="rId1"/>
   </p:sldMasterIdLst>
   <p:notesMasterIdLst>
-    <p:notesMasterId r:id="rId17"/>
+    <p:notesMasterId r:id="rId13"/>
   </p:notesMasterIdLst>
   <p:sldIdLst>
     <p:sldId id="313" r:id="rId2"/>
@@ -19,10 +19,6 @@
     <p:sldId id="318" r:id="rId10"/>
     <p:sldId id="319" r:id="rId11"/>
     <p:sldId id="320" r:id="rId12"/>
-    <p:sldId id="265" r:id="rId13"/>
-    <p:sldId id="260" r:id="rId14"/>
-    <p:sldId id="267" r:id="rId15"/>
-    <p:sldId id="268" r:id="rId16"/>
   </p:sldIdLst>
   <p:sldSz cx="12192000" cy="6858000"/>
   <p:notesSz cx="6858000" cy="9144000"/>
@@ -267,7 +263,7 @@
           <a:p>
             <a:fld id="{ADBE0503-281F-4035-949A-0ABFD561AF35}" type="datetimeFigureOut">
               <a:rPr lang="ru-RU" smtClean="0"/>
-              <a:t>16.06.2026</a:t>
+              <a:t>20.06.2026</a:t>
             </a:fld>
             <a:endParaRPr lang="ru-RU"/>
           </a:p>
@@ -768,320 +764,6 @@
 </p:notes>
 </file>
 
-<file path=ppt/notesSlides/notesSlide11.xml><?xml version="1.0" encoding="utf-8"?>
-<p:notes xmlns:a="http://schemas.openxmlformats.org/drawingml/2006/main" xmlns:r="http://schemas.openxmlformats.org/officeDocument/2006/relationships" xmlns:p="http://schemas.openxmlformats.org/presentationml/2006/main">
-  <p:cSld>
-    <p:spTree>
-      <p:nvGrpSpPr>
-        <p:cNvPr id="1" name=""/>
-        <p:cNvGrpSpPr/>
-        <p:nvPr/>
-      </p:nvGrpSpPr>
-      <p:grpSpPr>
-        <a:xfrm>
-          <a:off x="0" y="0"/>
-          <a:ext cx="0" cy="0"/>
-          <a:chOff x="0" y="0"/>
-          <a:chExt cx="0" cy="0"/>
-        </a:xfrm>
-      </p:grpSpPr>
-      <p:sp>
-        <p:nvSpPr>
-          <p:cNvPr id="2" name="Образ слайда 1"/>
-          <p:cNvSpPr>
-            <a:spLocks noGrp="1" noRot="1" noChangeAspect="1"/>
-          </p:cNvSpPr>
-          <p:nvPr>
-            <p:ph type="sldImg"/>
-          </p:nvPr>
-        </p:nvSpPr>
-        <p:spPr/>
-        <p:txBody>
-          <a:bodyPr/>
-          <a:lstStyle/>
-          <a:p>
-            <a:endParaRPr lang="ru-RU"/>
-          </a:p>
-        </p:txBody>
-      </p:sp>
-      <p:sp>
-        <p:nvSpPr>
-          <p:cNvPr id="3" name="Заметки 2"/>
-          <p:cNvSpPr>
-            <a:spLocks noGrp="1"/>
-          </p:cNvSpPr>
-          <p:nvPr>
-            <p:ph type="body" idx="1"/>
-          </p:nvPr>
-        </p:nvSpPr>
-        <p:spPr/>
-        <p:txBody>
-          <a:bodyPr/>
-          <a:lstStyle/>
-          <a:p>
-            <a:r>
-              <a:rPr lang="ru-RU" dirty="0"/>
-              <a:t>В результате работы на основе сравнительного анализа была выбрана IOTA-подобная архитектура, разработана модель DAG-реестра с BFT-финализацией и ротацией </a:t>
-            </a:r>
-            <a:r>
-              <a:rPr lang="ru-RU" dirty="0" err="1"/>
-              <a:t>genesis</a:t>
-            </a:r>
-            <a:r>
-              <a:rPr lang="ru-RU" dirty="0"/>
-              <a:t>-состояния, а также реализован программный симулятор для ее экспериментальной оценки.</a:t>
-            </a:r>
-          </a:p>
-          <a:p>
-            <a:r>
-              <a:rPr lang="ru-RU" dirty="0"/>
-              <a:t>Экспериментальная оценка показала, что предложенный механизм позволяет сохранять до десяти раз больше честных транзакций по сравнению с исходным подходом. Сворачивание финализированной истории также ограничивает потребление памяти: вместо постоянного накопления DAG узел хранит текущее состояние и компактные </a:t>
-            </a:r>
-            <a:r>
-              <a:rPr lang="ru-RU" dirty="0" err="1"/>
-              <a:t>genesis</a:t>
-            </a:r>
-            <a:r>
-              <a:rPr lang="ru-RU" dirty="0"/>
-              <a:t>-блоки эпох.</a:t>
-            </a:r>
-            <a:br>
-              <a:rPr lang="ru-RU" dirty="0"/>
-            </a:br>
-            <a:r>
-              <a:rPr lang="ru-RU" dirty="0"/>
-              <a:t>Таким образом, цель работы достигнута: устойчивость DAG-реестра к конфликтной нагрузке повышена за счет BFT-финализации и выбора наиболее значимой ветви, а рост истории ограничен за счет периодического сворачивания состояния.</a:t>
-            </a:r>
-          </a:p>
-          <a:p>
-            <a:r>
-              <a:rPr lang="ru-RU" dirty="0"/>
-              <a:t>Доклад окончен.</a:t>
-            </a:r>
-          </a:p>
-          <a:p>
-            <a:endParaRPr lang="ru-RU" dirty="0"/>
-          </a:p>
-        </p:txBody>
-      </p:sp>
-      <p:sp>
-        <p:nvSpPr>
-          <p:cNvPr id="4" name="Номер слайда 3"/>
-          <p:cNvSpPr>
-            <a:spLocks noGrp="1"/>
-          </p:cNvSpPr>
-          <p:nvPr>
-            <p:ph type="sldNum" sz="quarter" idx="5"/>
-          </p:nvPr>
-        </p:nvSpPr>
-        <p:spPr/>
-        <p:txBody>
-          <a:bodyPr/>
-          <a:lstStyle/>
-          <a:p>
-            <a:fld id="{AB812574-09FD-4842-9431-C003EACE9657}" type="slidenum">
-              <a:rPr lang="ru-RU" smtClean="0"/>
-              <a:t>12</a:t>
-            </a:fld>
-            <a:endParaRPr lang="ru-RU"/>
-          </a:p>
-        </p:txBody>
-      </p:sp>
-    </p:spTree>
-    <p:extLst>
-      <p:ext uri="{BB962C8B-B14F-4D97-AF65-F5344CB8AC3E}">
-        <p14:creationId xmlns:p14="http://schemas.microsoft.com/office/powerpoint/2010/main" val="1596817921"/>
-      </p:ext>
-    </p:extLst>
-  </p:cSld>
-  <p:clrMapOvr>
-    <a:masterClrMapping/>
-  </p:clrMapOvr>
-</p:notes>
-</file>
-
-<file path=ppt/notesSlides/notesSlide12.xml><?xml version="1.0" encoding="utf-8"?>
-<p:notes xmlns:a="http://schemas.openxmlformats.org/drawingml/2006/main" xmlns:r="http://schemas.openxmlformats.org/officeDocument/2006/relationships" xmlns:p="http://schemas.openxmlformats.org/presentationml/2006/main">
-  <p:cSld>
-    <p:spTree>
-      <p:nvGrpSpPr>
-        <p:cNvPr id="1" name=""/>
-        <p:cNvGrpSpPr/>
-        <p:nvPr/>
-      </p:nvGrpSpPr>
-      <p:grpSpPr>
-        <a:xfrm>
-          <a:off x="0" y="0"/>
-          <a:ext cx="0" cy="0"/>
-          <a:chOff x="0" y="0"/>
-          <a:chExt cx="0" cy="0"/>
-        </a:xfrm>
-      </p:grpSpPr>
-      <p:sp>
-        <p:nvSpPr>
-          <p:cNvPr id="2" name="Образ слайда 1"/>
-          <p:cNvSpPr>
-            <a:spLocks noGrp="1" noRot="1" noChangeAspect="1"/>
-          </p:cNvSpPr>
-          <p:nvPr>
-            <p:ph type="sldImg"/>
-          </p:nvPr>
-        </p:nvSpPr>
-        <p:spPr/>
-        <p:txBody>
-          <a:bodyPr/>
-          <a:lstStyle/>
-          <a:p>
-            <a:endParaRPr lang="ru-RU"/>
-          </a:p>
-        </p:txBody>
-      </p:sp>
-      <p:sp>
-        <p:nvSpPr>
-          <p:cNvPr id="3" name="Заметки 2"/>
-          <p:cNvSpPr>
-            <a:spLocks noGrp="1"/>
-          </p:cNvSpPr>
-          <p:nvPr>
-            <p:ph type="body" idx="1"/>
-          </p:nvPr>
-        </p:nvSpPr>
-        <p:spPr/>
-        <p:txBody>
-          <a:bodyPr/>
-          <a:lstStyle/>
-          <a:p>
-            <a:endParaRPr lang="ru-RU" dirty="0"/>
-          </a:p>
-        </p:txBody>
-      </p:sp>
-      <p:sp>
-        <p:nvSpPr>
-          <p:cNvPr id="4" name="Номер слайда 3"/>
-          <p:cNvSpPr>
-            <a:spLocks noGrp="1"/>
-          </p:cNvSpPr>
-          <p:nvPr>
-            <p:ph type="sldNum" sz="quarter" idx="5"/>
-          </p:nvPr>
-        </p:nvSpPr>
-        <p:spPr/>
-        <p:txBody>
-          <a:bodyPr/>
-          <a:lstStyle/>
-          <a:p>
-            <a:fld id="{AB812574-09FD-4842-9431-C003EACE9657}" type="slidenum">
-              <a:rPr lang="ru-RU" smtClean="0"/>
-              <a:t>13</a:t>
-            </a:fld>
-            <a:endParaRPr lang="ru-RU"/>
-          </a:p>
-        </p:txBody>
-      </p:sp>
-    </p:spTree>
-    <p:extLst>
-      <p:ext uri="{BB962C8B-B14F-4D97-AF65-F5344CB8AC3E}">
-        <p14:creationId xmlns:p14="http://schemas.microsoft.com/office/powerpoint/2010/main" val="3894232015"/>
-      </p:ext>
-    </p:extLst>
-  </p:cSld>
-  <p:clrMapOvr>
-    <a:masterClrMapping/>
-  </p:clrMapOvr>
-</p:notes>
-</file>
-
-<file path=ppt/notesSlides/notesSlide13.xml><?xml version="1.0" encoding="utf-8"?>
-<p:notes xmlns:a="http://schemas.openxmlformats.org/drawingml/2006/main" xmlns:r="http://schemas.openxmlformats.org/officeDocument/2006/relationships" xmlns:p="http://schemas.openxmlformats.org/presentationml/2006/main">
-  <p:cSld>
-    <p:spTree>
-      <p:nvGrpSpPr>
-        <p:cNvPr id="1" name=""/>
-        <p:cNvGrpSpPr/>
-        <p:nvPr/>
-      </p:nvGrpSpPr>
-      <p:grpSpPr>
-        <a:xfrm>
-          <a:off x="0" y="0"/>
-          <a:ext cx="0" cy="0"/>
-          <a:chOff x="0" y="0"/>
-          <a:chExt cx="0" cy="0"/>
-        </a:xfrm>
-      </p:grpSpPr>
-      <p:sp>
-        <p:nvSpPr>
-          <p:cNvPr id="2" name="Образ слайда 1"/>
-          <p:cNvSpPr>
-            <a:spLocks noGrp="1" noRot="1" noChangeAspect="1"/>
-          </p:cNvSpPr>
-          <p:nvPr>
-            <p:ph type="sldImg"/>
-          </p:nvPr>
-        </p:nvSpPr>
-        <p:spPr/>
-        <p:txBody>
-          <a:bodyPr/>
-          <a:lstStyle/>
-          <a:p>
-            <a:endParaRPr lang="ru-RU"/>
-          </a:p>
-        </p:txBody>
-      </p:sp>
-      <p:sp>
-        <p:nvSpPr>
-          <p:cNvPr id="3" name="Заметки 2"/>
-          <p:cNvSpPr>
-            <a:spLocks noGrp="1"/>
-          </p:cNvSpPr>
-          <p:nvPr>
-            <p:ph type="body" idx="1"/>
-          </p:nvPr>
-        </p:nvSpPr>
-        <p:spPr/>
-        <p:txBody>
-          <a:bodyPr/>
-          <a:lstStyle/>
-          <a:p>
-            <a:endParaRPr lang="ru-RU" dirty="0"/>
-          </a:p>
-        </p:txBody>
-      </p:sp>
-      <p:sp>
-        <p:nvSpPr>
-          <p:cNvPr id="4" name="Номер слайда 3"/>
-          <p:cNvSpPr>
-            <a:spLocks noGrp="1"/>
-          </p:cNvSpPr>
-          <p:nvPr>
-            <p:ph type="sldNum" sz="quarter" idx="5"/>
-          </p:nvPr>
-        </p:nvSpPr>
-        <p:spPr/>
-        <p:txBody>
-          <a:bodyPr/>
-          <a:lstStyle/>
-          <a:p>
-            <a:fld id="{AB812574-09FD-4842-9431-C003EACE9657}" type="slidenum">
-              <a:rPr lang="ru-RU" smtClean="0"/>
-              <a:t>15</a:t>
-            </a:fld>
-            <a:endParaRPr lang="ru-RU"/>
-          </a:p>
-        </p:txBody>
-      </p:sp>
-    </p:spTree>
-    <p:extLst>
-      <p:ext uri="{BB962C8B-B14F-4D97-AF65-F5344CB8AC3E}">
-        <p14:creationId xmlns:p14="http://schemas.microsoft.com/office/powerpoint/2010/main" val="2923802463"/>
-      </p:ext>
-    </p:extLst>
-  </p:cSld>
-  <p:clrMapOvr>
-    <a:masterClrMapping/>
-  </p:clrMapOvr>
-</p:notes>
-</file>
-
 <file path=ppt/notesSlides/notesSlide2.xml><?xml version="1.0" encoding="utf-8"?>
 <p:notes xmlns:a="http://schemas.openxmlformats.org/drawingml/2006/main" xmlns:r="http://schemas.openxmlformats.org/officeDocument/2006/relationships" xmlns:p="http://schemas.openxmlformats.org/presentationml/2006/main" showMasterSp="0" showMasterPhAnim="0">
   <p:cSld>
@@ -2182,7 +1864,7 @@
           <a:p>
             <a:fld id="{7C55041D-AFA0-4167-A823-8015A2C8AEB3}" type="datetimeFigureOut">
               <a:rPr lang="ru-RU" smtClean="0"/>
-              <a:t>16.06.2026</a:t>
+              <a:t>20.06.2026</a:t>
             </a:fld>
             <a:endParaRPr lang="ru-RU"/>
           </a:p>
@@ -2380,7 +2062,7 @@
           <a:p>
             <a:fld id="{7C55041D-AFA0-4167-A823-8015A2C8AEB3}" type="datetimeFigureOut">
               <a:rPr lang="ru-RU" smtClean="0"/>
-              <a:t>16.06.2026</a:t>
+              <a:t>20.06.2026</a:t>
             </a:fld>
             <a:endParaRPr lang="ru-RU"/>
           </a:p>
@@ -2588,7 +2270,7 @@
           <a:p>
             <a:fld id="{7C55041D-AFA0-4167-A823-8015A2C8AEB3}" type="datetimeFigureOut">
               <a:rPr lang="ru-RU" smtClean="0"/>
-              <a:t>16.06.2026</a:t>
+              <a:t>20.06.2026</a:t>
             </a:fld>
             <a:endParaRPr lang="ru-RU"/>
           </a:p>
@@ -3145,7 +2827,7 @@
           <a:p>
             <a:fld id="{7C55041D-AFA0-4167-A823-8015A2C8AEB3}" type="datetimeFigureOut">
               <a:rPr lang="ru-RU" smtClean="0"/>
-              <a:t>16.06.2026</a:t>
+              <a:t>20.06.2026</a:t>
             </a:fld>
             <a:endParaRPr lang="ru-RU"/>
           </a:p>
@@ -3420,7 +3102,7 @@
           <a:p>
             <a:fld id="{7C55041D-AFA0-4167-A823-8015A2C8AEB3}" type="datetimeFigureOut">
               <a:rPr lang="ru-RU" smtClean="0"/>
-              <a:t>16.06.2026</a:t>
+              <a:t>20.06.2026</a:t>
             </a:fld>
             <a:endParaRPr lang="ru-RU"/>
           </a:p>
@@ -3685,7 +3367,7 @@
           <a:p>
             <a:fld id="{7C55041D-AFA0-4167-A823-8015A2C8AEB3}" type="datetimeFigureOut">
               <a:rPr lang="ru-RU" smtClean="0"/>
-              <a:t>16.06.2026</a:t>
+              <a:t>20.06.2026</a:t>
             </a:fld>
             <a:endParaRPr lang="ru-RU"/>
           </a:p>
@@ -4097,7 +3779,7 @@
           <a:p>
             <a:fld id="{7C55041D-AFA0-4167-A823-8015A2C8AEB3}" type="datetimeFigureOut">
               <a:rPr lang="ru-RU" smtClean="0"/>
-              <a:t>16.06.2026</a:t>
+              <a:t>20.06.2026</a:t>
             </a:fld>
             <a:endParaRPr lang="ru-RU"/>
           </a:p>
@@ -4238,7 +3920,7 @@
           <a:p>
             <a:fld id="{7C55041D-AFA0-4167-A823-8015A2C8AEB3}" type="datetimeFigureOut">
               <a:rPr lang="ru-RU" smtClean="0"/>
-              <a:t>16.06.2026</a:t>
+              <a:t>20.06.2026</a:t>
             </a:fld>
             <a:endParaRPr lang="ru-RU"/>
           </a:p>
@@ -4351,7 +4033,7 @@
           <a:p>
             <a:fld id="{7C55041D-AFA0-4167-A823-8015A2C8AEB3}" type="datetimeFigureOut">
               <a:rPr lang="ru-RU" smtClean="0"/>
-              <a:t>16.06.2026</a:t>
+              <a:t>20.06.2026</a:t>
             </a:fld>
             <a:endParaRPr lang="ru-RU"/>
           </a:p>
@@ -4662,7 +4344,7 @@
           <a:p>
             <a:fld id="{7C55041D-AFA0-4167-A823-8015A2C8AEB3}" type="datetimeFigureOut">
               <a:rPr lang="ru-RU" smtClean="0"/>
-              <a:t>16.06.2026</a:t>
+              <a:t>20.06.2026</a:t>
             </a:fld>
             <a:endParaRPr lang="ru-RU"/>
           </a:p>
@@ -4950,7 +4632,7 @@
           <a:p>
             <a:fld id="{7C55041D-AFA0-4167-A823-8015A2C8AEB3}" type="datetimeFigureOut">
               <a:rPr lang="ru-RU" smtClean="0"/>
-              <a:t>16.06.2026</a:t>
+              <a:t>20.06.2026</a:t>
             </a:fld>
             <a:endParaRPr lang="ru-RU"/>
           </a:p>
@@ -5191,7 +4873,7 @@
           <a:p>
             <a:fld id="{7C55041D-AFA0-4167-A823-8015A2C8AEB3}" type="datetimeFigureOut">
               <a:rPr lang="ru-RU" smtClean="0"/>
-              <a:t>16.06.2026</a:t>
+              <a:t>20.06.2026</a:t>
             </a:fld>
             <a:endParaRPr lang="ru-RU"/>
           </a:p>
@@ -9821,5260 +9503,6 @@
     <p:extLst>
       <p:ext uri="{BB962C8B-B14F-4D97-AF65-F5344CB8AC3E}">
         <p14:creationId xmlns:p14="http://schemas.microsoft.com/office/powerpoint/2010/main" val="3564280454"/>
-      </p:ext>
-    </p:extLst>
-  </p:cSld>
-  <p:clrMapOvr>
-    <a:masterClrMapping/>
-  </p:clrMapOvr>
-</p:sld>
-</file>
-
-<file path=ppt/slides/slide12.xml><?xml version="1.0" encoding="utf-8"?>
-<p:sld xmlns:a="http://schemas.openxmlformats.org/drawingml/2006/main" xmlns:r="http://schemas.openxmlformats.org/officeDocument/2006/relationships" xmlns:p="http://schemas.openxmlformats.org/presentationml/2006/main">
-  <p:cSld>
-    <p:spTree>
-      <p:nvGrpSpPr>
-        <p:cNvPr id="1" name=""/>
-        <p:cNvGrpSpPr/>
-        <p:nvPr/>
-      </p:nvGrpSpPr>
-      <p:grpSpPr>
-        <a:xfrm>
-          <a:off x="0" y="0"/>
-          <a:ext cx="0" cy="0"/>
-          <a:chOff x="0" y="0"/>
-          <a:chExt cx="0" cy="0"/>
-        </a:xfrm>
-      </p:grpSpPr>
-      <p:sp>
-        <p:nvSpPr>
-          <p:cNvPr id="4" name="Заголовок 1">
-            <a:extLst>
-              <a:ext uri="{FF2B5EF4-FFF2-40B4-BE49-F238E27FC236}">
-                <a16:creationId xmlns:a16="http://schemas.microsoft.com/office/drawing/2014/main" id="{AA0CD7F6-89F6-3C75-DE09-6C66EE63324E}"/>
-              </a:ext>
-            </a:extLst>
-          </p:cNvPr>
-          <p:cNvSpPr>
-            <a:spLocks noGrp="1"/>
-          </p:cNvSpPr>
-          <p:nvPr>
-            <p:ph type="title"/>
-          </p:nvPr>
-        </p:nvSpPr>
-        <p:spPr>
-          <a:xfrm>
-            <a:off x="2233565" y="378137"/>
-            <a:ext cx="7600000" cy="560000"/>
-          </a:xfrm>
-        </p:spPr>
-        <p:txBody>
-          <a:bodyPr wrap="square" lIns="91440" tIns="45720" rIns="91440" bIns="45720" anchor="ctr">
-            <a:normAutofit/>
-          </a:bodyPr>
-          <a:lstStyle/>
-          <a:p>
-            <a:pPr algn="ctr"/>
-            <a:r>
-              <a:rPr lang="ru-RU" sz="2700" b="1" dirty="0">
-                <a:latin typeface="Arial"/>
-              </a:rPr>
-              <a:t>Результаты работы</a:t>
-            </a:r>
-            <a:endParaRPr lang="ru-RU" sz="2700" dirty="0"/>
-          </a:p>
-        </p:txBody>
-      </p:sp>
-      <p:sp>
-        <p:nvSpPr>
-          <p:cNvPr id="5" name="TextBox 4">
-            <a:extLst>
-              <a:ext uri="{FF2B5EF4-FFF2-40B4-BE49-F238E27FC236}">
-                <a16:creationId xmlns:a16="http://schemas.microsoft.com/office/drawing/2014/main" id="{CD9AB79D-E079-2F27-FF3C-0C414E838A86}"/>
-              </a:ext>
-            </a:extLst>
-          </p:cNvPr>
-          <p:cNvSpPr txBox="1"/>
-          <p:nvPr/>
-        </p:nvSpPr>
-        <p:spPr>
-          <a:xfrm>
-            <a:off x="850760" y="1497248"/>
-            <a:ext cx="10885136" cy="3693319"/>
-          </a:xfrm>
-          <a:prstGeom prst="rect">
-            <a:avLst/>
-          </a:prstGeom>
-          <a:noFill/>
-        </p:spPr>
-        <p:txBody>
-          <a:bodyPr wrap="square" rtlCol="0">
-            <a:spAutoFit/>
-          </a:bodyPr>
-          <a:lstStyle/>
-          <a:p>
-            <a:pPr marL="342900" indent="-342900">
-              <a:buFont typeface="+mj-lt"/>
-              <a:buAutoNum type="arabicPeriod"/>
-            </a:pPr>
-            <a:r>
-              <a:rPr lang="ru-RU" dirty="0">
-                <a:latin typeface="Arial" panose="020B0604020202020204" pitchFamily="34" charset="0"/>
-                <a:cs typeface="Arial" panose="020B0604020202020204" pitchFamily="34" charset="0"/>
-              </a:rPr>
-              <a:t>Проведен сравнительный анализ существующих моделей DAG-реестров</a:t>
-            </a:r>
-            <a:r>
-              <a:rPr lang="en-US" dirty="0">
-                <a:latin typeface="Arial" panose="020B0604020202020204" pitchFamily="34" charset="0"/>
-                <a:cs typeface="Arial" panose="020B0604020202020204" pitchFamily="34" charset="0"/>
-              </a:rPr>
-              <a:t>:</a:t>
-            </a:r>
-            <a:r>
-              <a:rPr lang="ru-RU" dirty="0">
-                <a:latin typeface="Arial" panose="020B0604020202020204" pitchFamily="34" charset="0"/>
-                <a:cs typeface="Arial" panose="020B0604020202020204" pitchFamily="34" charset="0"/>
-              </a:rPr>
-              <a:t> в качестве прототипа была выбрана IOTA-подобная модель с BFT-финализацией.</a:t>
-            </a:r>
-            <a:br>
-              <a:rPr lang="ru-RU" dirty="0">
-                <a:latin typeface="Arial" panose="020B0604020202020204" pitchFamily="34" charset="0"/>
-                <a:cs typeface="Arial" panose="020B0604020202020204" pitchFamily="34" charset="0"/>
-              </a:rPr>
-            </a:br>
-            <a:endParaRPr lang="ru-RU" dirty="0">
-              <a:latin typeface="Arial" panose="020B0604020202020204" pitchFamily="34" charset="0"/>
-              <a:cs typeface="Arial" panose="020B0604020202020204" pitchFamily="34" charset="0"/>
-            </a:endParaRPr>
-          </a:p>
-          <a:p>
-            <a:pPr marL="342900" indent="-342900">
-              <a:buFont typeface="+mj-lt"/>
-              <a:buAutoNum type="arabicPeriod"/>
-            </a:pPr>
-            <a:r>
-              <a:rPr lang="ru-RU" dirty="0">
-                <a:latin typeface="Arial" panose="020B0604020202020204" pitchFamily="34" charset="0"/>
-                <a:cs typeface="Arial" panose="020B0604020202020204" pitchFamily="34" charset="0"/>
-              </a:rPr>
-              <a:t>Разработана модель DAG-реестра с разделением на слоты и эпохи, разрешением конфликтов</a:t>
-            </a:r>
-            <a:r>
-              <a:rPr lang="en-US" dirty="0">
-                <a:latin typeface="Arial" panose="020B0604020202020204" pitchFamily="34" charset="0"/>
-                <a:cs typeface="Arial" panose="020B0604020202020204" pitchFamily="34" charset="0"/>
-              </a:rPr>
-              <a:t> </a:t>
-            </a:r>
-            <a:r>
-              <a:rPr lang="ru-RU" dirty="0">
-                <a:latin typeface="Arial" panose="020B0604020202020204" pitchFamily="34" charset="0"/>
-                <a:cs typeface="Arial" panose="020B0604020202020204" pitchFamily="34" charset="0"/>
-              </a:rPr>
-              <a:t>без утраты части честных записей и сворачиванием генезис-состояния.</a:t>
-            </a:r>
-            <a:br>
-              <a:rPr lang="ru-RU" dirty="0">
-                <a:latin typeface="Arial" panose="020B0604020202020204" pitchFamily="34" charset="0"/>
-                <a:cs typeface="Arial" panose="020B0604020202020204" pitchFamily="34" charset="0"/>
-              </a:rPr>
-            </a:br>
-            <a:endParaRPr lang="ru-RU" dirty="0">
-              <a:latin typeface="Arial" panose="020B0604020202020204" pitchFamily="34" charset="0"/>
-              <a:cs typeface="Arial" panose="020B0604020202020204" pitchFamily="34" charset="0"/>
-            </a:endParaRPr>
-          </a:p>
-          <a:p>
-            <a:pPr marL="342900" indent="-342900">
-              <a:buFont typeface="+mj-lt"/>
-              <a:buAutoNum type="arabicPeriod"/>
-            </a:pPr>
-            <a:r>
-              <a:rPr lang="ru-RU" dirty="0">
-                <a:latin typeface="Arial" panose="020B0604020202020204" pitchFamily="34" charset="0"/>
-                <a:cs typeface="Arial" panose="020B0604020202020204" pitchFamily="34" charset="0"/>
-              </a:rPr>
-              <a:t>Реализован эмулятор DAG-реестра с эмуляцией 100 узлов, сетевых задержек, финализацией записей и с модулем конфликтных атак.</a:t>
-            </a:r>
-            <a:br>
-              <a:rPr lang="ru-RU" dirty="0">
-                <a:latin typeface="Arial" panose="020B0604020202020204" pitchFamily="34" charset="0"/>
-                <a:cs typeface="Arial" panose="020B0604020202020204" pitchFamily="34" charset="0"/>
-              </a:rPr>
-            </a:br>
-            <a:endParaRPr lang="ru-RU" dirty="0">
-              <a:latin typeface="Arial" panose="020B0604020202020204" pitchFamily="34" charset="0"/>
-              <a:cs typeface="Arial" panose="020B0604020202020204" pitchFamily="34" charset="0"/>
-            </a:endParaRPr>
-          </a:p>
-          <a:p>
-            <a:pPr marL="342900" indent="-342900">
-              <a:buFont typeface="+mj-lt"/>
-              <a:buAutoNum type="arabicPeriod"/>
-            </a:pPr>
-            <a:r>
-              <a:rPr lang="ru-RU" dirty="0">
-                <a:latin typeface="Arial" panose="020B0604020202020204" pitchFamily="34" charset="0"/>
-                <a:cs typeface="Arial" panose="020B0604020202020204" pitchFamily="34" charset="0"/>
-              </a:rPr>
-              <a:t>Проведена экспериментальная оценка: разработанная модель DAG-реестра сохраняет до 10 раз больше честных записей, чем прототип модели </a:t>
-            </a:r>
-            <a:r>
-              <a:rPr lang="en-US" dirty="0">
-                <a:latin typeface="Arial" panose="020B0604020202020204" pitchFamily="34" charset="0"/>
-                <a:cs typeface="Arial" panose="020B0604020202020204" pitchFamily="34" charset="0"/>
-              </a:rPr>
-              <a:t>IOTA</a:t>
-            </a:r>
-            <a:r>
-              <a:rPr lang="ru-RU" dirty="0">
-                <a:latin typeface="Arial" panose="020B0604020202020204" pitchFamily="34" charset="0"/>
-                <a:cs typeface="Arial" panose="020B0604020202020204" pitchFamily="34" charset="0"/>
-              </a:rPr>
-              <a:t>, а в диапазоне от 0 до 110 слотов использование механизма сворачивания истории позволяет сократить объём памяти, занимаемый реестром, примерно в 5 раз по сравнению с базовой IOTA-подобной реализацией.</a:t>
-            </a:r>
-          </a:p>
-        </p:txBody>
-      </p:sp>
-    </p:spTree>
-    <p:extLst>
-      <p:ext uri="{BB962C8B-B14F-4D97-AF65-F5344CB8AC3E}">
-        <p14:creationId xmlns:p14="http://schemas.microsoft.com/office/powerpoint/2010/main" val="3959228153"/>
-      </p:ext>
-    </p:extLst>
-  </p:cSld>
-  <p:clrMapOvr>
-    <a:masterClrMapping/>
-  </p:clrMapOvr>
-</p:sld>
-</file>
-
-<file path=ppt/slides/slide13.xml><?xml version="1.0" encoding="utf-8"?>
-<p:sld xmlns:a="http://schemas.openxmlformats.org/drawingml/2006/main" xmlns:r="http://schemas.openxmlformats.org/officeDocument/2006/relationships" xmlns:p="http://schemas.openxmlformats.org/presentationml/2006/main">
-  <p:cSld>
-    <p:spTree>
-      <p:nvGrpSpPr>
-        <p:cNvPr id="1" name=""/>
-        <p:cNvGrpSpPr/>
-        <p:nvPr/>
-      </p:nvGrpSpPr>
-      <p:grpSpPr>
-        <a:xfrm>
-          <a:off x="0" y="0"/>
-          <a:ext cx="0" cy="0"/>
-          <a:chOff x="0" y="0"/>
-          <a:chExt cx="0" cy="0"/>
-        </a:xfrm>
-      </p:grpSpPr>
-      <p:sp>
-        <p:nvSpPr>
-          <p:cNvPr id="7" name="TextBox 6">
-            <a:extLst>
-              <a:ext uri="{FF2B5EF4-FFF2-40B4-BE49-F238E27FC236}">
-                <a16:creationId xmlns:a16="http://schemas.microsoft.com/office/drawing/2014/main" id="{5053FA87-E8AF-422D-5402-A81DCA8014DC}"/>
-              </a:ext>
-            </a:extLst>
-          </p:cNvPr>
-          <p:cNvSpPr txBox="1"/>
-          <p:nvPr/>
-        </p:nvSpPr>
-        <p:spPr>
-          <a:xfrm>
-            <a:off x="1126154" y="237589"/>
-            <a:ext cx="6096000" cy="369332"/>
-          </a:xfrm>
-          <a:prstGeom prst="rect">
-            <a:avLst/>
-          </a:prstGeom>
-          <a:noFill/>
-        </p:spPr>
-        <p:txBody>
-          <a:bodyPr wrap="square">
-            <a:spAutoFit/>
-          </a:bodyPr>
-          <a:lstStyle/>
-          <a:p>
-            <a:r>
-              <a:rPr lang="ru-RU" b="1" dirty="0">
-                <a:solidFill>
-                  <a:srgbClr val="000000"/>
-                </a:solidFill>
-                <a:latin typeface="Arial"/>
-                <a:cs typeface="Arial"/>
-              </a:rPr>
-              <a:t>Разработанная модель </a:t>
-            </a:r>
-            <a:r>
-              <a:rPr lang="en-US" b="1" dirty="0">
-                <a:solidFill>
-                  <a:srgbClr val="000000"/>
-                </a:solidFill>
-                <a:latin typeface="Arial"/>
-                <a:cs typeface="Arial"/>
-              </a:rPr>
-              <a:t>DAG </a:t>
-            </a:r>
-            <a:r>
-              <a:rPr lang="ru-RU" b="1" dirty="0">
-                <a:solidFill>
-                  <a:srgbClr val="000000"/>
-                </a:solidFill>
-                <a:latin typeface="Arial"/>
-                <a:cs typeface="Arial"/>
-              </a:rPr>
-              <a:t>реестра</a:t>
-            </a:r>
-            <a:endParaRPr lang="ru-RU" sz="1800" dirty="0"/>
-          </a:p>
-        </p:txBody>
-      </p:sp>
-      <p:grpSp>
-        <p:nvGrpSpPr>
-          <p:cNvPr id="219" name="Группа 218">
-            <a:extLst>
-              <a:ext uri="{FF2B5EF4-FFF2-40B4-BE49-F238E27FC236}">
-                <a16:creationId xmlns:a16="http://schemas.microsoft.com/office/drawing/2014/main" id="{DADEBC68-0114-B282-5E32-B2E1C2E63EDA}"/>
-              </a:ext>
-            </a:extLst>
-          </p:cNvPr>
-          <p:cNvGrpSpPr/>
-          <p:nvPr/>
-        </p:nvGrpSpPr>
-        <p:grpSpPr>
-          <a:xfrm>
-            <a:off x="823272" y="1021080"/>
-            <a:ext cx="6305550" cy="3117850"/>
-            <a:chOff x="596900" y="1238250"/>
-            <a:chExt cx="6305550" cy="3117850"/>
-          </a:xfrm>
-        </p:grpSpPr>
-        <p:sp>
-          <p:nvSpPr>
-            <p:cNvPr id="217" name="Прямоугольник 216">
-              <a:extLst>
-                <a:ext uri="{FF2B5EF4-FFF2-40B4-BE49-F238E27FC236}">
-                  <a16:creationId xmlns:a16="http://schemas.microsoft.com/office/drawing/2014/main" id="{DFDE5CB5-0BE4-0B4D-39E5-B7DD71CE3269}"/>
-                </a:ext>
-              </a:extLst>
-            </p:cNvPr>
-            <p:cNvSpPr/>
-            <p:nvPr/>
-          </p:nvSpPr>
-          <p:spPr>
-            <a:xfrm>
-              <a:off x="596900" y="1238250"/>
-              <a:ext cx="6305550" cy="3117850"/>
-            </a:xfrm>
-            <a:prstGeom prst="rect">
-              <a:avLst/>
-            </a:prstGeom>
-            <a:solidFill>
-              <a:schemeClr val="bg1">
-                <a:lumMod val="95000"/>
-              </a:schemeClr>
-            </a:solidFill>
-            <a:ln>
-              <a:solidFill>
-                <a:schemeClr val="accent1">
-                  <a:lumMod val="50000"/>
-                </a:schemeClr>
-              </a:solidFill>
-            </a:ln>
-          </p:spPr>
-          <p:style>
-            <a:lnRef idx="2">
-              <a:schemeClr val="accent1">
-                <a:shade val="15000"/>
-              </a:schemeClr>
-            </a:lnRef>
-            <a:fillRef idx="1">
-              <a:schemeClr val="accent1"/>
-            </a:fillRef>
-            <a:effectRef idx="0">
-              <a:schemeClr val="accent1"/>
-            </a:effectRef>
-            <a:fontRef idx="minor">
-              <a:schemeClr val="lt1"/>
-            </a:fontRef>
-          </p:style>
-          <p:txBody>
-            <a:bodyPr rtlCol="0" anchor="ctr"/>
-            <a:lstStyle/>
-            <a:p>
-              <a:pPr algn="ctr"/>
-              <a:endParaRPr lang="ru-RU" dirty="0"/>
-            </a:p>
-          </p:txBody>
-        </p:sp>
-        <p:grpSp>
-          <p:nvGrpSpPr>
-            <p:cNvPr id="215" name="Группа 214">
-              <a:extLst>
-                <a:ext uri="{FF2B5EF4-FFF2-40B4-BE49-F238E27FC236}">
-                  <a16:creationId xmlns:a16="http://schemas.microsoft.com/office/drawing/2014/main" id="{E4431FB4-7A19-924F-4C43-E2D2F95699FC}"/>
-                </a:ext>
-              </a:extLst>
-            </p:cNvPr>
-            <p:cNvGrpSpPr/>
-            <p:nvPr/>
-          </p:nvGrpSpPr>
-          <p:grpSpPr>
-            <a:xfrm>
-              <a:off x="798201" y="1433004"/>
-              <a:ext cx="5478310" cy="2820583"/>
-              <a:chOff x="93351" y="1242504"/>
-              <a:chExt cx="5478310" cy="2820583"/>
-            </a:xfrm>
-          </p:grpSpPr>
-          <p:grpSp>
-            <p:nvGrpSpPr>
-              <p:cNvPr id="205" name="Группа 204">
-                <a:extLst>
-                  <a:ext uri="{FF2B5EF4-FFF2-40B4-BE49-F238E27FC236}">
-                    <a16:creationId xmlns:a16="http://schemas.microsoft.com/office/drawing/2014/main" id="{B6CA9C07-8F09-1D4F-40AA-DC8472BC0FB4}"/>
-                  </a:ext>
-                </a:extLst>
-              </p:cNvPr>
-              <p:cNvGrpSpPr/>
-              <p:nvPr/>
-            </p:nvGrpSpPr>
-            <p:grpSpPr>
-              <a:xfrm>
-                <a:off x="93351" y="1242504"/>
-                <a:ext cx="5478310" cy="2820583"/>
-                <a:chOff x="840321" y="1396335"/>
-                <a:chExt cx="6587561" cy="4371912"/>
-              </a:xfrm>
-            </p:grpSpPr>
-            <p:grpSp>
-              <p:nvGrpSpPr>
-                <p:cNvPr id="204" name="Группа 203">
-                  <a:extLst>
-                    <a:ext uri="{FF2B5EF4-FFF2-40B4-BE49-F238E27FC236}">
-                      <a16:creationId xmlns:a16="http://schemas.microsoft.com/office/drawing/2014/main" id="{FDE43C4B-0872-10AA-03D7-1F6B570E0083}"/>
-                    </a:ext>
-                  </a:extLst>
-                </p:cNvPr>
-                <p:cNvGrpSpPr/>
-                <p:nvPr/>
-              </p:nvGrpSpPr>
-              <p:grpSpPr>
-                <a:xfrm>
-                  <a:off x="840321" y="1481776"/>
-                  <a:ext cx="6587561" cy="4286471"/>
-                  <a:chOff x="1446746" y="2059626"/>
-                  <a:chExt cx="6587561" cy="4286471"/>
-                </a:xfrm>
-              </p:grpSpPr>
-              <p:sp>
-                <p:nvSpPr>
-                  <p:cNvPr id="8" name="Овал 7">
-                    <a:extLst>
-                      <a:ext uri="{FF2B5EF4-FFF2-40B4-BE49-F238E27FC236}">
-                        <a16:creationId xmlns:a16="http://schemas.microsoft.com/office/drawing/2014/main" id="{C1FCA80F-DFFF-433C-1AD6-6916B1724797}"/>
-                      </a:ext>
-                    </a:extLst>
-                  </p:cNvPr>
-                  <p:cNvSpPr>
-                    <a:spLocks noChangeAspect="1"/>
-                  </p:cNvSpPr>
-                  <p:nvPr/>
-                </p:nvSpPr>
-                <p:spPr>
-                  <a:xfrm>
-                    <a:off x="1830434" y="4288533"/>
-                    <a:ext cx="199342" cy="199342"/>
-                  </a:xfrm>
-                  <a:prstGeom prst="ellipse">
-                    <a:avLst/>
-                  </a:prstGeom>
-                </p:spPr>
-                <p:style>
-                  <a:lnRef idx="2">
-                    <a:schemeClr val="accent4">
-                      <a:shade val="15000"/>
-                    </a:schemeClr>
-                  </a:lnRef>
-                  <a:fillRef idx="1">
-                    <a:schemeClr val="accent4"/>
-                  </a:fillRef>
-                  <a:effectRef idx="0">
-                    <a:schemeClr val="accent4"/>
-                  </a:effectRef>
-                  <a:fontRef idx="minor">
-                    <a:schemeClr val="lt1"/>
-                  </a:fontRef>
-                </p:style>
-                <p:txBody>
-                  <a:bodyPr rtlCol="0" anchor="ctr"/>
-                  <a:lstStyle/>
-                  <a:p>
-                    <a:pPr algn="ctr"/>
-                    <a:endParaRPr lang="ru-RU"/>
-                  </a:p>
-                </p:txBody>
-              </p:sp>
-              <p:sp>
-                <p:nvSpPr>
-                  <p:cNvPr id="9" name="Овал 8">
-                    <a:extLst>
-                      <a:ext uri="{FF2B5EF4-FFF2-40B4-BE49-F238E27FC236}">
-                        <a16:creationId xmlns:a16="http://schemas.microsoft.com/office/drawing/2014/main" id="{EB8A66D1-A61A-0B0F-FC85-DEECB5583800}"/>
-                      </a:ext>
-                    </a:extLst>
-                  </p:cNvPr>
-                  <p:cNvSpPr>
-                    <a:spLocks noChangeAspect="1"/>
-                  </p:cNvSpPr>
-                  <p:nvPr/>
-                </p:nvSpPr>
-                <p:spPr>
-                  <a:xfrm>
-                    <a:off x="2725790" y="3642686"/>
-                    <a:ext cx="199342" cy="199342"/>
-                  </a:xfrm>
-                  <a:prstGeom prst="ellipse">
-                    <a:avLst/>
-                  </a:prstGeom>
-                  <a:ln>
-                    <a:solidFill>
-                      <a:schemeClr val="accent6"/>
-                    </a:solidFill>
-                  </a:ln>
-                </p:spPr>
-                <p:style>
-                  <a:lnRef idx="3">
-                    <a:schemeClr val="lt1"/>
-                  </a:lnRef>
-                  <a:fillRef idx="1">
-                    <a:schemeClr val="accent6"/>
-                  </a:fillRef>
-                  <a:effectRef idx="1">
-                    <a:schemeClr val="accent6"/>
-                  </a:effectRef>
-                  <a:fontRef idx="minor">
-                    <a:schemeClr val="lt1"/>
-                  </a:fontRef>
-                </p:style>
-                <p:txBody>
-                  <a:bodyPr rtlCol="0" anchor="ctr"/>
-                  <a:lstStyle/>
-                  <a:p>
-                    <a:pPr algn="ctr"/>
-                    <a:endParaRPr lang="ru-RU"/>
-                  </a:p>
-                </p:txBody>
-              </p:sp>
-              <p:sp>
-                <p:nvSpPr>
-                  <p:cNvPr id="13" name="Овал 12">
-                    <a:extLst>
-                      <a:ext uri="{FF2B5EF4-FFF2-40B4-BE49-F238E27FC236}">
-                        <a16:creationId xmlns:a16="http://schemas.microsoft.com/office/drawing/2014/main" id="{1838EA25-5FA4-9318-EB2B-5ECC45F086B3}"/>
-                      </a:ext>
-                    </a:extLst>
-                  </p:cNvPr>
-                  <p:cNvSpPr>
-                    <a:spLocks noChangeAspect="1"/>
-                  </p:cNvSpPr>
-                  <p:nvPr/>
-                </p:nvSpPr>
-                <p:spPr>
-                  <a:xfrm>
-                    <a:off x="2729183" y="4118384"/>
-                    <a:ext cx="199342" cy="199342"/>
-                  </a:xfrm>
-                  <a:prstGeom prst="ellipse">
-                    <a:avLst/>
-                  </a:prstGeom>
-                  <a:ln>
-                    <a:solidFill>
-                      <a:schemeClr val="accent6"/>
-                    </a:solidFill>
-                  </a:ln>
-                </p:spPr>
-                <p:style>
-                  <a:lnRef idx="3">
-                    <a:schemeClr val="lt1"/>
-                  </a:lnRef>
-                  <a:fillRef idx="1">
-                    <a:schemeClr val="accent6"/>
-                  </a:fillRef>
-                  <a:effectRef idx="1">
-                    <a:schemeClr val="accent6"/>
-                  </a:effectRef>
-                  <a:fontRef idx="minor">
-                    <a:schemeClr val="lt1"/>
-                  </a:fontRef>
-                </p:style>
-                <p:txBody>
-                  <a:bodyPr rtlCol="0" anchor="ctr"/>
-                  <a:lstStyle/>
-                  <a:p>
-                    <a:pPr algn="ctr"/>
-                    <a:endParaRPr lang="ru-RU"/>
-                  </a:p>
-                </p:txBody>
-              </p:sp>
-              <p:sp>
-                <p:nvSpPr>
-                  <p:cNvPr id="14" name="Овал 13">
-                    <a:extLst>
-                      <a:ext uri="{FF2B5EF4-FFF2-40B4-BE49-F238E27FC236}">
-                        <a16:creationId xmlns:a16="http://schemas.microsoft.com/office/drawing/2014/main" id="{003BAC40-D4D4-619F-1E19-9A09964058FE}"/>
-                      </a:ext>
-                    </a:extLst>
-                  </p:cNvPr>
-                  <p:cNvSpPr>
-                    <a:spLocks noChangeAspect="1"/>
-                  </p:cNvSpPr>
-                  <p:nvPr/>
-                </p:nvSpPr>
-                <p:spPr>
-                  <a:xfrm>
-                    <a:off x="2699989" y="4607416"/>
-                    <a:ext cx="199342" cy="199341"/>
-                  </a:xfrm>
-                  <a:prstGeom prst="ellipse">
-                    <a:avLst/>
-                  </a:prstGeom>
-                  <a:solidFill>
-                    <a:srgbClr val="FF0000"/>
-                  </a:solidFill>
-                  <a:ln>
-                    <a:solidFill>
-                      <a:srgbClr val="FF0000"/>
-                    </a:solidFill>
-                  </a:ln>
-                </p:spPr>
-                <p:style>
-                  <a:lnRef idx="3">
-                    <a:schemeClr val="lt1"/>
-                  </a:lnRef>
-                  <a:fillRef idx="1">
-                    <a:schemeClr val="accent6"/>
-                  </a:fillRef>
-                  <a:effectRef idx="1">
-                    <a:schemeClr val="accent6"/>
-                  </a:effectRef>
-                  <a:fontRef idx="minor">
-                    <a:schemeClr val="lt1"/>
-                  </a:fontRef>
-                </p:style>
-                <p:txBody>
-                  <a:bodyPr rtlCol="0" anchor="ctr"/>
-                  <a:lstStyle/>
-                  <a:p>
-                    <a:pPr algn="ctr"/>
-                    <a:endParaRPr lang="ru-RU"/>
-                  </a:p>
-                </p:txBody>
-              </p:sp>
-              <p:sp>
-                <p:nvSpPr>
-                  <p:cNvPr id="15" name="Овал 14">
-                    <a:extLst>
-                      <a:ext uri="{FF2B5EF4-FFF2-40B4-BE49-F238E27FC236}">
-                        <a16:creationId xmlns:a16="http://schemas.microsoft.com/office/drawing/2014/main" id="{09483323-7883-8134-5123-CF8A1BEB7697}"/>
-                      </a:ext>
-                    </a:extLst>
-                  </p:cNvPr>
-                  <p:cNvSpPr>
-                    <a:spLocks noChangeAspect="1"/>
-                  </p:cNvSpPr>
-                  <p:nvPr/>
-                </p:nvSpPr>
-                <p:spPr>
-                  <a:xfrm>
-                    <a:off x="3782290" y="3114226"/>
-                    <a:ext cx="199342" cy="199342"/>
-                  </a:xfrm>
-                  <a:prstGeom prst="ellipse">
-                    <a:avLst/>
-                  </a:prstGeom>
-                </p:spPr>
-                <p:style>
-                  <a:lnRef idx="3">
-                    <a:schemeClr val="lt1"/>
-                  </a:lnRef>
-                  <a:fillRef idx="1">
-                    <a:schemeClr val="accent6"/>
-                  </a:fillRef>
-                  <a:effectRef idx="1">
-                    <a:schemeClr val="accent6"/>
-                  </a:effectRef>
-                  <a:fontRef idx="minor">
-                    <a:schemeClr val="lt1"/>
-                  </a:fontRef>
-                </p:style>
-                <p:txBody>
-                  <a:bodyPr rtlCol="0" anchor="ctr"/>
-                  <a:lstStyle/>
-                  <a:p>
-                    <a:pPr algn="ctr"/>
-                    <a:endParaRPr lang="ru-RU"/>
-                  </a:p>
-                </p:txBody>
-              </p:sp>
-              <p:sp>
-                <p:nvSpPr>
-                  <p:cNvPr id="16" name="Овал 15">
-                    <a:extLst>
-                      <a:ext uri="{FF2B5EF4-FFF2-40B4-BE49-F238E27FC236}">
-                        <a16:creationId xmlns:a16="http://schemas.microsoft.com/office/drawing/2014/main" id="{5971389C-F34A-484B-EEA8-9C86BBD7651E}"/>
-                      </a:ext>
-                    </a:extLst>
-                  </p:cNvPr>
-                  <p:cNvSpPr>
-                    <a:spLocks noChangeAspect="1"/>
-                  </p:cNvSpPr>
-                  <p:nvPr/>
-                </p:nvSpPr>
-                <p:spPr>
-                  <a:xfrm>
-                    <a:off x="4892224" y="3155511"/>
-                    <a:ext cx="199342" cy="199342"/>
-                  </a:xfrm>
-                  <a:prstGeom prst="ellipse">
-                    <a:avLst/>
-                  </a:prstGeom>
-                  <a:ln>
-                    <a:solidFill>
-                      <a:schemeClr val="accent6"/>
-                    </a:solidFill>
-                  </a:ln>
-                </p:spPr>
-                <p:style>
-                  <a:lnRef idx="3">
-                    <a:schemeClr val="lt1"/>
-                  </a:lnRef>
-                  <a:fillRef idx="1">
-                    <a:schemeClr val="accent6"/>
-                  </a:fillRef>
-                  <a:effectRef idx="1">
-                    <a:schemeClr val="accent6"/>
-                  </a:effectRef>
-                  <a:fontRef idx="minor">
-                    <a:schemeClr val="lt1"/>
-                  </a:fontRef>
-                </p:style>
-                <p:txBody>
-                  <a:bodyPr rtlCol="0" anchor="ctr"/>
-                  <a:lstStyle/>
-                  <a:p>
-                    <a:pPr algn="ctr"/>
-                    <a:endParaRPr lang="ru-RU"/>
-                  </a:p>
-                </p:txBody>
-              </p:sp>
-              <p:sp>
-                <p:nvSpPr>
-                  <p:cNvPr id="17" name="Овал 16">
-                    <a:extLst>
-                      <a:ext uri="{FF2B5EF4-FFF2-40B4-BE49-F238E27FC236}">
-                        <a16:creationId xmlns:a16="http://schemas.microsoft.com/office/drawing/2014/main" id="{ACC0F18E-E6E3-EEB2-66A7-CD080225CE28}"/>
-                      </a:ext>
-                    </a:extLst>
-                  </p:cNvPr>
-                  <p:cNvSpPr>
-                    <a:spLocks noChangeAspect="1"/>
-                  </p:cNvSpPr>
-                  <p:nvPr/>
-                </p:nvSpPr>
-                <p:spPr>
-                  <a:xfrm>
-                    <a:off x="4965410" y="3830699"/>
-                    <a:ext cx="199342" cy="199342"/>
-                  </a:xfrm>
-                  <a:prstGeom prst="ellipse">
-                    <a:avLst/>
-                  </a:prstGeom>
-                  <a:ln>
-                    <a:solidFill>
-                      <a:schemeClr val="accent6"/>
-                    </a:solidFill>
-                  </a:ln>
-                </p:spPr>
-                <p:style>
-                  <a:lnRef idx="3">
-                    <a:schemeClr val="lt1"/>
-                  </a:lnRef>
-                  <a:fillRef idx="1">
-                    <a:schemeClr val="accent6"/>
-                  </a:fillRef>
-                  <a:effectRef idx="1">
-                    <a:schemeClr val="accent6"/>
-                  </a:effectRef>
-                  <a:fontRef idx="minor">
-                    <a:schemeClr val="lt1"/>
-                  </a:fontRef>
-                </p:style>
-                <p:txBody>
-                  <a:bodyPr rtlCol="0" anchor="ctr"/>
-                  <a:lstStyle/>
-                  <a:p>
-                    <a:pPr algn="ctr"/>
-                    <a:endParaRPr lang="ru-RU"/>
-                  </a:p>
-                </p:txBody>
-              </p:sp>
-              <p:sp>
-                <p:nvSpPr>
-                  <p:cNvPr id="18" name="Овал 17">
-                    <a:extLst>
-                      <a:ext uri="{FF2B5EF4-FFF2-40B4-BE49-F238E27FC236}">
-                        <a16:creationId xmlns:a16="http://schemas.microsoft.com/office/drawing/2014/main" id="{FC1573AE-464F-9133-3349-A521952B526F}"/>
-                      </a:ext>
-                    </a:extLst>
-                  </p:cNvPr>
-                  <p:cNvSpPr>
-                    <a:spLocks noChangeAspect="1"/>
-                  </p:cNvSpPr>
-                  <p:nvPr/>
-                </p:nvSpPr>
-                <p:spPr>
-                  <a:xfrm>
-                    <a:off x="4706639" y="5425183"/>
-                    <a:ext cx="199342" cy="199342"/>
-                  </a:xfrm>
-                  <a:prstGeom prst="ellipse">
-                    <a:avLst/>
-                  </a:prstGeom>
-                  <a:ln>
-                    <a:solidFill>
-                      <a:schemeClr val="accent6"/>
-                    </a:solidFill>
-                  </a:ln>
-                </p:spPr>
-                <p:style>
-                  <a:lnRef idx="3">
-                    <a:schemeClr val="lt1"/>
-                  </a:lnRef>
-                  <a:fillRef idx="1">
-                    <a:schemeClr val="accent6"/>
-                  </a:fillRef>
-                  <a:effectRef idx="1">
-                    <a:schemeClr val="accent6"/>
-                  </a:effectRef>
-                  <a:fontRef idx="minor">
-                    <a:schemeClr val="lt1"/>
-                  </a:fontRef>
-                </p:style>
-                <p:txBody>
-                  <a:bodyPr rtlCol="0" anchor="ctr"/>
-                  <a:lstStyle/>
-                  <a:p>
-                    <a:pPr algn="ctr"/>
-                    <a:endParaRPr lang="ru-RU"/>
-                  </a:p>
-                </p:txBody>
-              </p:sp>
-              <p:sp>
-                <p:nvSpPr>
-                  <p:cNvPr id="19" name="Овал 18">
-                    <a:extLst>
-                      <a:ext uri="{FF2B5EF4-FFF2-40B4-BE49-F238E27FC236}">
-                        <a16:creationId xmlns:a16="http://schemas.microsoft.com/office/drawing/2014/main" id="{5E5456EE-5525-54C2-75F6-025AEC80BF4F}"/>
-                      </a:ext>
-                    </a:extLst>
-                  </p:cNvPr>
-                  <p:cNvSpPr>
-                    <a:spLocks noChangeAspect="1"/>
-                  </p:cNvSpPr>
-                  <p:nvPr/>
-                </p:nvSpPr>
-                <p:spPr>
-                  <a:xfrm>
-                    <a:off x="5108090" y="4439124"/>
-                    <a:ext cx="199342" cy="199342"/>
-                  </a:xfrm>
-                  <a:prstGeom prst="ellipse">
-                    <a:avLst/>
-                  </a:prstGeom>
-                  <a:ln>
-                    <a:solidFill>
-                      <a:schemeClr val="accent6"/>
-                    </a:solidFill>
-                  </a:ln>
-                </p:spPr>
-                <p:style>
-                  <a:lnRef idx="3">
-                    <a:schemeClr val="lt1"/>
-                  </a:lnRef>
-                  <a:fillRef idx="1">
-                    <a:schemeClr val="accent6"/>
-                  </a:fillRef>
-                  <a:effectRef idx="1">
-                    <a:schemeClr val="accent6"/>
-                  </a:effectRef>
-                  <a:fontRef idx="minor">
-                    <a:schemeClr val="lt1"/>
-                  </a:fontRef>
-                </p:style>
-                <p:txBody>
-                  <a:bodyPr rtlCol="0" anchor="ctr"/>
-                  <a:lstStyle/>
-                  <a:p>
-                    <a:pPr algn="ctr"/>
-                    <a:endParaRPr lang="ru-RU"/>
-                  </a:p>
-                </p:txBody>
-              </p:sp>
-              <p:sp>
-                <p:nvSpPr>
-                  <p:cNvPr id="20" name="Овал 19">
-                    <a:extLst>
-                      <a:ext uri="{FF2B5EF4-FFF2-40B4-BE49-F238E27FC236}">
-                        <a16:creationId xmlns:a16="http://schemas.microsoft.com/office/drawing/2014/main" id="{68314E0D-B5AC-A50B-F18B-2F1E253E8F76}"/>
-                      </a:ext>
-                    </a:extLst>
-                  </p:cNvPr>
-                  <p:cNvSpPr>
-                    <a:spLocks noChangeAspect="1"/>
-                  </p:cNvSpPr>
-                  <p:nvPr/>
-                </p:nvSpPr>
-                <p:spPr>
-                  <a:xfrm>
-                    <a:off x="5818665" y="3364242"/>
-                    <a:ext cx="199342" cy="199342"/>
-                  </a:xfrm>
-                  <a:prstGeom prst="ellipse">
-                    <a:avLst/>
-                  </a:prstGeom>
-                  <a:ln>
-                    <a:solidFill>
-                      <a:schemeClr val="accent6"/>
-                    </a:solidFill>
-                  </a:ln>
-                </p:spPr>
-                <p:style>
-                  <a:lnRef idx="3">
-                    <a:schemeClr val="lt1"/>
-                  </a:lnRef>
-                  <a:fillRef idx="1">
-                    <a:schemeClr val="accent6"/>
-                  </a:fillRef>
-                  <a:effectRef idx="1">
-                    <a:schemeClr val="accent6"/>
-                  </a:effectRef>
-                  <a:fontRef idx="minor">
-                    <a:schemeClr val="lt1"/>
-                  </a:fontRef>
-                </p:style>
-                <p:txBody>
-                  <a:bodyPr rtlCol="0" anchor="ctr"/>
-                  <a:lstStyle/>
-                  <a:p>
-                    <a:pPr algn="ctr"/>
-                    <a:endParaRPr lang="ru-RU"/>
-                  </a:p>
-                </p:txBody>
-              </p:sp>
-              <p:cxnSp>
-                <p:nvCxnSpPr>
-                  <p:cNvPr id="24" name="Прямая со стрелкой 23">
-                    <a:extLst>
-                      <a:ext uri="{FF2B5EF4-FFF2-40B4-BE49-F238E27FC236}">
-                        <a16:creationId xmlns:a16="http://schemas.microsoft.com/office/drawing/2014/main" id="{4EC7387D-79C7-98DD-CCF8-585CB99B61DE}"/>
-                      </a:ext>
-                    </a:extLst>
-                  </p:cNvPr>
-                  <p:cNvCxnSpPr>
-                    <a:cxnSpLocks noChangeAspect="1"/>
-                    <a:stCxn id="13" idx="2"/>
-                    <a:endCxn id="8" idx="6"/>
-                  </p:cNvCxnSpPr>
-                  <p:nvPr/>
-                </p:nvCxnSpPr>
-                <p:spPr>
-                  <a:xfrm flipH="1">
-                    <a:off x="2029776" y="4218055"/>
-                    <a:ext cx="699407" cy="170149"/>
-                  </a:xfrm>
-                  <a:prstGeom prst="straightConnector1">
-                    <a:avLst/>
-                  </a:prstGeom>
-                  <a:ln>
-                    <a:tailEnd type="triangle"/>
-                  </a:ln>
-                </p:spPr>
-                <p:style>
-                  <a:lnRef idx="1">
-                    <a:schemeClr val="accent1"/>
-                  </a:lnRef>
-                  <a:fillRef idx="0">
-                    <a:schemeClr val="accent1"/>
-                  </a:fillRef>
-                  <a:effectRef idx="0">
-                    <a:schemeClr val="accent1"/>
-                  </a:effectRef>
-                  <a:fontRef idx="minor">
-                    <a:schemeClr val="tx1"/>
-                  </a:fontRef>
-                </p:style>
-              </p:cxnSp>
-              <p:cxnSp>
-                <p:nvCxnSpPr>
-                  <p:cNvPr id="26" name="Прямая со стрелкой 25">
-                    <a:extLst>
-                      <a:ext uri="{FF2B5EF4-FFF2-40B4-BE49-F238E27FC236}">
-                        <a16:creationId xmlns:a16="http://schemas.microsoft.com/office/drawing/2014/main" id="{393F31FF-2E79-E42A-9564-E29B6A55EBC3}"/>
-                      </a:ext>
-                    </a:extLst>
-                  </p:cNvPr>
-                  <p:cNvCxnSpPr>
-                    <a:cxnSpLocks noChangeAspect="1"/>
-                    <a:stCxn id="14" idx="2"/>
-                    <a:endCxn id="8" idx="5"/>
-                  </p:cNvCxnSpPr>
-                  <p:nvPr/>
-                </p:nvCxnSpPr>
-                <p:spPr>
-                  <a:xfrm flipH="1" flipV="1">
-                    <a:off x="2000583" y="4458682"/>
-                    <a:ext cx="699407" cy="248405"/>
-                  </a:xfrm>
-                  <a:prstGeom prst="straightConnector1">
-                    <a:avLst/>
-                  </a:prstGeom>
-                  <a:ln>
-                    <a:tailEnd type="triangle"/>
-                  </a:ln>
-                </p:spPr>
-                <p:style>
-                  <a:lnRef idx="1">
-                    <a:schemeClr val="accent1"/>
-                  </a:lnRef>
-                  <a:fillRef idx="0">
-                    <a:schemeClr val="accent1"/>
-                  </a:fillRef>
-                  <a:effectRef idx="0">
-                    <a:schemeClr val="accent1"/>
-                  </a:effectRef>
-                  <a:fontRef idx="minor">
-                    <a:schemeClr val="tx1"/>
-                  </a:fontRef>
-                </p:style>
-              </p:cxnSp>
-              <p:sp>
-                <p:nvSpPr>
-                  <p:cNvPr id="27" name="Овал 26">
-                    <a:extLst>
-                      <a:ext uri="{FF2B5EF4-FFF2-40B4-BE49-F238E27FC236}">
-                        <a16:creationId xmlns:a16="http://schemas.microsoft.com/office/drawing/2014/main" id="{F524D108-43F8-9A05-4A11-9119EE64096C}"/>
-                      </a:ext>
-                    </a:extLst>
-                  </p:cNvPr>
-                  <p:cNvSpPr>
-                    <a:spLocks noChangeAspect="1"/>
-                  </p:cNvSpPr>
-                  <p:nvPr/>
-                </p:nvSpPr>
-                <p:spPr>
-                  <a:xfrm>
-                    <a:off x="3748724" y="3669051"/>
-                    <a:ext cx="199342" cy="199342"/>
-                  </a:xfrm>
-                  <a:prstGeom prst="ellipse">
-                    <a:avLst/>
-                  </a:prstGeom>
-                  <a:solidFill>
-                    <a:schemeClr val="accent6"/>
-                  </a:solidFill>
-                  <a:ln>
-                    <a:solidFill>
-                      <a:schemeClr val="accent6"/>
-                    </a:solidFill>
-                  </a:ln>
-                </p:spPr>
-                <p:style>
-                  <a:lnRef idx="3">
-                    <a:schemeClr val="lt1"/>
-                  </a:lnRef>
-                  <a:fillRef idx="1">
-                    <a:schemeClr val="accent6"/>
-                  </a:fillRef>
-                  <a:effectRef idx="1">
-                    <a:schemeClr val="accent6"/>
-                  </a:effectRef>
-                  <a:fontRef idx="minor">
-                    <a:schemeClr val="lt1"/>
-                  </a:fontRef>
-                </p:style>
-                <p:txBody>
-                  <a:bodyPr rtlCol="0" anchor="ctr"/>
-                  <a:lstStyle/>
-                  <a:p>
-                    <a:pPr algn="ctr"/>
-                    <a:endParaRPr lang="ru-RU"/>
-                  </a:p>
-                </p:txBody>
-              </p:sp>
-              <p:sp>
-                <p:nvSpPr>
-                  <p:cNvPr id="28" name="Овал 27">
-                    <a:extLst>
-                      <a:ext uri="{FF2B5EF4-FFF2-40B4-BE49-F238E27FC236}">
-                        <a16:creationId xmlns:a16="http://schemas.microsoft.com/office/drawing/2014/main" id="{3FAACB83-2715-118C-ED1F-CA9853BCB2CC}"/>
-                      </a:ext>
-                    </a:extLst>
-                  </p:cNvPr>
-                  <p:cNvSpPr>
-                    <a:spLocks noChangeAspect="1"/>
-                  </p:cNvSpPr>
-                  <p:nvPr/>
-                </p:nvSpPr>
-                <p:spPr>
-                  <a:xfrm>
-                    <a:off x="3856497" y="4306294"/>
-                    <a:ext cx="199342" cy="199342"/>
-                  </a:xfrm>
-                  <a:prstGeom prst="ellipse">
-                    <a:avLst/>
-                  </a:prstGeom>
-                  <a:ln>
-                    <a:solidFill>
-                      <a:schemeClr val="accent6"/>
-                    </a:solidFill>
-                  </a:ln>
-                </p:spPr>
-                <p:style>
-                  <a:lnRef idx="3">
-                    <a:schemeClr val="lt1"/>
-                  </a:lnRef>
-                  <a:fillRef idx="1">
-                    <a:schemeClr val="accent6"/>
-                  </a:fillRef>
-                  <a:effectRef idx="1">
-                    <a:schemeClr val="accent6"/>
-                  </a:effectRef>
-                  <a:fontRef idx="minor">
-                    <a:schemeClr val="lt1"/>
-                  </a:fontRef>
-                </p:style>
-                <p:txBody>
-                  <a:bodyPr rtlCol="0" anchor="ctr"/>
-                  <a:lstStyle/>
-                  <a:p>
-                    <a:pPr algn="ctr"/>
-                    <a:endParaRPr lang="ru-RU" dirty="0"/>
-                  </a:p>
-                </p:txBody>
-              </p:sp>
-              <p:sp>
-                <p:nvSpPr>
-                  <p:cNvPr id="29" name="Овал 28">
-                    <a:extLst>
-                      <a:ext uri="{FF2B5EF4-FFF2-40B4-BE49-F238E27FC236}">
-                        <a16:creationId xmlns:a16="http://schemas.microsoft.com/office/drawing/2014/main" id="{CA8683C1-00A4-434B-A11A-08C1EDA1240C}"/>
-                      </a:ext>
-                    </a:extLst>
-                  </p:cNvPr>
-                  <p:cNvSpPr>
-                    <a:spLocks noChangeAspect="1"/>
-                  </p:cNvSpPr>
-                  <p:nvPr/>
-                </p:nvSpPr>
-                <p:spPr>
-                  <a:xfrm>
-                    <a:off x="3898842" y="5104574"/>
-                    <a:ext cx="199342" cy="199342"/>
-                  </a:xfrm>
-                  <a:prstGeom prst="ellipse">
-                    <a:avLst/>
-                  </a:prstGeom>
-                  <a:solidFill>
-                    <a:srgbClr val="FF0000"/>
-                  </a:solidFill>
-                </p:spPr>
-                <p:style>
-                  <a:lnRef idx="1">
-                    <a:schemeClr val="accent3"/>
-                  </a:lnRef>
-                  <a:fillRef idx="3">
-                    <a:schemeClr val="accent3"/>
-                  </a:fillRef>
-                  <a:effectRef idx="2">
-                    <a:schemeClr val="accent3"/>
-                  </a:effectRef>
-                  <a:fontRef idx="minor">
-                    <a:schemeClr val="lt1"/>
-                  </a:fontRef>
-                </p:style>
-                <p:txBody>
-                  <a:bodyPr rtlCol="0" anchor="ctr"/>
-                  <a:lstStyle/>
-                  <a:p>
-                    <a:pPr algn="ctr"/>
-                    <a:endParaRPr lang="ru-RU"/>
-                  </a:p>
-                </p:txBody>
-              </p:sp>
-              <p:cxnSp>
-                <p:nvCxnSpPr>
-                  <p:cNvPr id="31" name="Прямая со стрелкой 30">
-                    <a:extLst>
-                      <a:ext uri="{FF2B5EF4-FFF2-40B4-BE49-F238E27FC236}">
-                        <a16:creationId xmlns:a16="http://schemas.microsoft.com/office/drawing/2014/main" id="{B2367DCC-6AC6-5E55-4623-1DC60BEEC361}"/>
-                      </a:ext>
-                    </a:extLst>
-                  </p:cNvPr>
-                  <p:cNvCxnSpPr>
-                    <a:cxnSpLocks noChangeAspect="1"/>
-                    <a:stCxn id="15" idx="2"/>
-                    <a:endCxn id="9" idx="7"/>
-                  </p:cNvCxnSpPr>
-                  <p:nvPr/>
-                </p:nvCxnSpPr>
-                <p:spPr>
-                  <a:xfrm flipH="1">
-                    <a:off x="2895939" y="3213897"/>
-                    <a:ext cx="886351" cy="457982"/>
-                  </a:xfrm>
-                  <a:prstGeom prst="straightConnector1">
-                    <a:avLst/>
-                  </a:prstGeom>
-                  <a:ln>
-                    <a:tailEnd type="triangle"/>
-                  </a:ln>
-                </p:spPr>
-                <p:style>
-                  <a:lnRef idx="1">
-                    <a:schemeClr val="accent1"/>
-                  </a:lnRef>
-                  <a:fillRef idx="0">
-                    <a:schemeClr val="accent1"/>
-                  </a:fillRef>
-                  <a:effectRef idx="0">
-                    <a:schemeClr val="accent1"/>
-                  </a:effectRef>
-                  <a:fontRef idx="minor">
-                    <a:schemeClr val="tx1"/>
-                  </a:fontRef>
-                </p:style>
-              </p:cxnSp>
-              <p:cxnSp>
-                <p:nvCxnSpPr>
-                  <p:cNvPr id="35" name="Прямая со стрелкой 34">
-                    <a:extLst>
-                      <a:ext uri="{FF2B5EF4-FFF2-40B4-BE49-F238E27FC236}">
-                        <a16:creationId xmlns:a16="http://schemas.microsoft.com/office/drawing/2014/main" id="{15EB3BC5-FB5F-EBF9-FAB3-F17823163FC3}"/>
-                      </a:ext>
-                    </a:extLst>
-                  </p:cNvPr>
-                  <p:cNvCxnSpPr>
-                    <a:cxnSpLocks noChangeAspect="1"/>
-                    <a:stCxn id="28" idx="1"/>
-                    <a:endCxn id="9" idx="5"/>
-                  </p:cNvCxnSpPr>
-                  <p:nvPr/>
-                </p:nvCxnSpPr>
-                <p:spPr>
-                  <a:xfrm flipH="1" flipV="1">
-                    <a:off x="2895939" y="3812835"/>
-                    <a:ext cx="989751" cy="522652"/>
-                  </a:xfrm>
-                  <a:prstGeom prst="straightConnector1">
-                    <a:avLst/>
-                  </a:prstGeom>
-                  <a:ln>
-                    <a:tailEnd type="triangle"/>
-                  </a:ln>
-                </p:spPr>
-                <p:style>
-                  <a:lnRef idx="1">
-                    <a:schemeClr val="accent1"/>
-                  </a:lnRef>
-                  <a:fillRef idx="0">
-                    <a:schemeClr val="accent1"/>
-                  </a:fillRef>
-                  <a:effectRef idx="0">
-                    <a:schemeClr val="accent1"/>
-                  </a:effectRef>
-                  <a:fontRef idx="minor">
-                    <a:schemeClr val="tx1"/>
-                  </a:fontRef>
-                </p:style>
-              </p:cxnSp>
-              <p:cxnSp>
-                <p:nvCxnSpPr>
-                  <p:cNvPr id="37" name="Прямая со стрелкой 36">
-                    <a:extLst>
-                      <a:ext uri="{FF2B5EF4-FFF2-40B4-BE49-F238E27FC236}">
-                        <a16:creationId xmlns:a16="http://schemas.microsoft.com/office/drawing/2014/main" id="{2A70184E-F5A4-8BB9-1F66-24BE3AEE66E9}"/>
-                      </a:ext>
-                    </a:extLst>
-                  </p:cNvPr>
-                  <p:cNvCxnSpPr>
-                    <a:cxnSpLocks noChangeAspect="1"/>
-                    <a:stCxn id="28" idx="2"/>
-                    <a:endCxn id="13" idx="6"/>
-                  </p:cNvCxnSpPr>
-                  <p:nvPr/>
-                </p:nvCxnSpPr>
-                <p:spPr>
-                  <a:xfrm flipH="1" flipV="1">
-                    <a:off x="2928525" y="4218055"/>
-                    <a:ext cx="927972" cy="187910"/>
-                  </a:xfrm>
-                  <a:prstGeom prst="straightConnector1">
-                    <a:avLst/>
-                  </a:prstGeom>
-                  <a:ln>
-                    <a:tailEnd type="triangle"/>
-                  </a:ln>
-                </p:spPr>
-                <p:style>
-                  <a:lnRef idx="1">
-                    <a:schemeClr val="accent1"/>
-                  </a:lnRef>
-                  <a:fillRef idx="0">
-                    <a:schemeClr val="accent1"/>
-                  </a:fillRef>
-                  <a:effectRef idx="0">
-                    <a:schemeClr val="accent1"/>
-                  </a:effectRef>
-                  <a:fontRef idx="minor">
-                    <a:schemeClr val="tx1"/>
-                  </a:fontRef>
-                </p:style>
-              </p:cxnSp>
-              <p:cxnSp>
-                <p:nvCxnSpPr>
-                  <p:cNvPr id="39" name="Прямая со стрелкой 38">
-                    <a:extLst>
-                      <a:ext uri="{FF2B5EF4-FFF2-40B4-BE49-F238E27FC236}">
-                        <a16:creationId xmlns:a16="http://schemas.microsoft.com/office/drawing/2014/main" id="{A24769EA-09BB-6C77-F40C-55ACE522EB99}"/>
-                      </a:ext>
-                    </a:extLst>
-                  </p:cNvPr>
-                  <p:cNvCxnSpPr>
-                    <a:cxnSpLocks noChangeAspect="1"/>
-                    <a:stCxn id="29" idx="1"/>
-                    <a:endCxn id="13" idx="5"/>
-                  </p:cNvCxnSpPr>
-                  <p:nvPr/>
-                </p:nvCxnSpPr>
-                <p:spPr>
-                  <a:xfrm flipH="1" flipV="1">
-                    <a:off x="2899332" y="4288533"/>
-                    <a:ext cx="1028703" cy="845234"/>
-                  </a:xfrm>
-                  <a:prstGeom prst="straightConnector1">
-                    <a:avLst/>
-                  </a:prstGeom>
-                  <a:ln>
-                    <a:tailEnd type="triangle"/>
-                  </a:ln>
-                </p:spPr>
-                <p:style>
-                  <a:lnRef idx="1">
-                    <a:schemeClr val="accent1"/>
-                  </a:lnRef>
-                  <a:fillRef idx="0">
-                    <a:schemeClr val="accent1"/>
-                  </a:fillRef>
-                  <a:effectRef idx="0">
-                    <a:schemeClr val="accent1"/>
-                  </a:effectRef>
-                  <a:fontRef idx="minor">
-                    <a:schemeClr val="tx1"/>
-                  </a:fontRef>
-                </p:style>
-              </p:cxnSp>
-              <p:cxnSp>
-                <p:nvCxnSpPr>
-                  <p:cNvPr id="41" name="Прямая со стрелкой 40">
-                    <a:extLst>
-                      <a:ext uri="{FF2B5EF4-FFF2-40B4-BE49-F238E27FC236}">
-                        <a16:creationId xmlns:a16="http://schemas.microsoft.com/office/drawing/2014/main" id="{FF55E7C7-0703-F1C2-5C2E-7A3C3691D3BD}"/>
-                      </a:ext>
-                    </a:extLst>
-                  </p:cNvPr>
-                  <p:cNvCxnSpPr>
-                    <a:cxnSpLocks noChangeAspect="1"/>
-                    <a:stCxn id="29" idx="2"/>
-                    <a:endCxn id="14" idx="5"/>
-                  </p:cNvCxnSpPr>
-                  <p:nvPr/>
-                </p:nvCxnSpPr>
-                <p:spPr>
-                  <a:xfrm flipH="1" flipV="1">
-                    <a:off x="2870139" y="4777565"/>
-                    <a:ext cx="1028703" cy="426680"/>
-                  </a:xfrm>
-                  <a:prstGeom prst="straightConnector1">
-                    <a:avLst/>
-                  </a:prstGeom>
-                  <a:ln>
-                    <a:tailEnd type="triangle"/>
-                  </a:ln>
-                </p:spPr>
-                <p:style>
-                  <a:lnRef idx="1">
-                    <a:schemeClr val="accent1"/>
-                  </a:lnRef>
-                  <a:fillRef idx="0">
-                    <a:schemeClr val="accent1"/>
-                  </a:fillRef>
-                  <a:effectRef idx="0">
-                    <a:schemeClr val="accent1"/>
-                  </a:effectRef>
-                  <a:fontRef idx="minor">
-                    <a:schemeClr val="tx1"/>
-                  </a:fontRef>
-                </p:style>
-              </p:cxnSp>
-              <p:cxnSp>
-                <p:nvCxnSpPr>
-                  <p:cNvPr id="43" name="Прямая со стрелкой 42">
-                    <a:extLst>
-                      <a:ext uri="{FF2B5EF4-FFF2-40B4-BE49-F238E27FC236}">
-                        <a16:creationId xmlns:a16="http://schemas.microsoft.com/office/drawing/2014/main" id="{8A08A91E-E9CD-45EC-DE2F-428AE9853385}"/>
-                      </a:ext>
-                    </a:extLst>
-                  </p:cNvPr>
-                  <p:cNvCxnSpPr>
-                    <a:cxnSpLocks noChangeAspect="1"/>
-                    <a:stCxn id="9" idx="2"/>
-                    <a:endCxn id="8" idx="7"/>
-                  </p:cNvCxnSpPr>
-                  <p:nvPr/>
-                </p:nvCxnSpPr>
-                <p:spPr>
-                  <a:xfrm flipH="1">
-                    <a:off x="2000583" y="3742357"/>
-                    <a:ext cx="725207" cy="575369"/>
-                  </a:xfrm>
-                  <a:prstGeom prst="straightConnector1">
-                    <a:avLst/>
-                  </a:prstGeom>
-                  <a:ln>
-                    <a:tailEnd type="triangle"/>
-                  </a:ln>
-                </p:spPr>
-                <p:style>
-                  <a:lnRef idx="1">
-                    <a:schemeClr val="accent1"/>
-                  </a:lnRef>
-                  <a:fillRef idx="0">
-                    <a:schemeClr val="accent1"/>
-                  </a:fillRef>
-                  <a:effectRef idx="0">
-                    <a:schemeClr val="accent1"/>
-                  </a:effectRef>
-                  <a:fontRef idx="minor">
-                    <a:schemeClr val="tx1"/>
-                  </a:fontRef>
-                </p:style>
-              </p:cxnSp>
-              <p:sp>
-                <p:nvSpPr>
-                  <p:cNvPr id="44" name="TextBox 43">
-                    <a:extLst>
-                      <a:ext uri="{FF2B5EF4-FFF2-40B4-BE49-F238E27FC236}">
-                        <a16:creationId xmlns:a16="http://schemas.microsoft.com/office/drawing/2014/main" id="{1A44F852-C042-057C-8DCC-543725AA18C1}"/>
-                      </a:ext>
-                    </a:extLst>
-                  </p:cNvPr>
-                  <p:cNvSpPr txBox="1">
-                    <a:spLocks noChangeAspect="1"/>
-                  </p:cNvSpPr>
-                  <p:nvPr/>
-                </p:nvSpPr>
-                <p:spPr>
-                  <a:xfrm>
-                    <a:off x="1589191" y="2757340"/>
-                    <a:ext cx="873115" cy="333939"/>
-                  </a:xfrm>
-                  <a:prstGeom prst="rect">
-                    <a:avLst/>
-                  </a:prstGeom>
-                  <a:noFill/>
-                </p:spPr>
-                <p:txBody>
-                  <a:bodyPr wrap="square" rtlCol="0">
-                    <a:spAutoFit/>
-                  </a:bodyPr>
-                  <a:lstStyle/>
-                  <a:p>
-                    <a:pPr algn="ctr"/>
-                    <a:r>
-                      <a:rPr lang="ru-RU" sz="800" dirty="0">
-                        <a:latin typeface="Arial" panose="020B0604020202020204" pitchFamily="34" charset="0"/>
-                        <a:cs typeface="Arial" panose="020B0604020202020204" pitchFamily="34" charset="0"/>
-                      </a:rPr>
-                      <a:t>Эпоха </a:t>
-                    </a:r>
-                    <a:r>
-                      <a:rPr lang="en-US" sz="800" dirty="0">
-                        <a:latin typeface="Arial" panose="020B0604020202020204" pitchFamily="34" charset="0"/>
-                        <a:cs typeface="Arial" panose="020B0604020202020204" pitchFamily="34" charset="0"/>
-                      </a:rPr>
-                      <a:t>N</a:t>
-                    </a:r>
-                    <a:endParaRPr lang="ru-RU" sz="800" dirty="0">
-                      <a:latin typeface="Arial" panose="020B0604020202020204" pitchFamily="34" charset="0"/>
-                      <a:cs typeface="Arial" panose="020B0604020202020204" pitchFamily="34" charset="0"/>
-                    </a:endParaRPr>
-                  </a:p>
-                </p:txBody>
-              </p:sp>
-              <p:cxnSp>
-                <p:nvCxnSpPr>
-                  <p:cNvPr id="53" name="Прямая соединительная линия 52">
-                    <a:extLst>
-                      <a:ext uri="{FF2B5EF4-FFF2-40B4-BE49-F238E27FC236}">
-                        <a16:creationId xmlns:a16="http://schemas.microsoft.com/office/drawing/2014/main" id="{AF94AE1F-9478-C505-0CDB-6FC340C3C6E9}"/>
-                      </a:ext>
-                    </a:extLst>
-                  </p:cNvPr>
-                  <p:cNvCxnSpPr>
-                    <a:cxnSpLocks noChangeAspect="1"/>
-                  </p:cNvCxnSpPr>
-                  <p:nvPr/>
-                </p:nvCxnSpPr>
-                <p:spPr>
-                  <a:xfrm>
-                    <a:off x="2543235" y="3043931"/>
-                    <a:ext cx="0" cy="2762246"/>
-                  </a:xfrm>
-                  <a:prstGeom prst="line">
-                    <a:avLst/>
-                  </a:prstGeom>
-                  <a:ln w="28575"/>
-                </p:spPr>
-                <p:style>
-                  <a:lnRef idx="1">
-                    <a:schemeClr val="dk1"/>
-                  </a:lnRef>
-                  <a:fillRef idx="0">
-                    <a:schemeClr val="dk1"/>
-                  </a:fillRef>
-                  <a:effectRef idx="0">
-                    <a:schemeClr val="dk1"/>
-                  </a:effectRef>
-                  <a:fontRef idx="minor">
-                    <a:schemeClr val="tx1"/>
-                  </a:fontRef>
-                </p:style>
-              </p:cxnSp>
-              <p:cxnSp>
-                <p:nvCxnSpPr>
-                  <p:cNvPr id="56" name="Прямая соединительная линия 55">
-                    <a:extLst>
-                      <a:ext uri="{FF2B5EF4-FFF2-40B4-BE49-F238E27FC236}">
-                        <a16:creationId xmlns:a16="http://schemas.microsoft.com/office/drawing/2014/main" id="{6E2485E4-EF1E-F39A-809A-3A1DFC2A353A}"/>
-                      </a:ext>
-                    </a:extLst>
-                  </p:cNvPr>
-                  <p:cNvCxnSpPr>
-                    <a:cxnSpLocks noChangeAspect="1"/>
-                  </p:cNvCxnSpPr>
-                  <p:nvPr/>
-                </p:nvCxnSpPr>
-                <p:spPr>
-                  <a:xfrm>
-                    <a:off x="3425885" y="3069331"/>
-                    <a:ext cx="0" cy="2711446"/>
-                  </a:xfrm>
-                  <a:prstGeom prst="line">
-                    <a:avLst/>
-                  </a:prstGeom>
-                  <a:ln w="28575"/>
-                </p:spPr>
-                <p:style>
-                  <a:lnRef idx="1">
-                    <a:schemeClr val="dk1"/>
-                  </a:lnRef>
-                  <a:fillRef idx="0">
-                    <a:schemeClr val="dk1"/>
-                  </a:fillRef>
-                  <a:effectRef idx="0">
-                    <a:schemeClr val="dk1"/>
-                  </a:effectRef>
-                  <a:fontRef idx="minor">
-                    <a:schemeClr val="tx1"/>
-                  </a:fontRef>
-                </p:style>
-              </p:cxnSp>
-              <p:cxnSp>
-                <p:nvCxnSpPr>
-                  <p:cNvPr id="65" name="Прямая со стрелкой 64">
-                    <a:extLst>
-                      <a:ext uri="{FF2B5EF4-FFF2-40B4-BE49-F238E27FC236}">
-                        <a16:creationId xmlns:a16="http://schemas.microsoft.com/office/drawing/2014/main" id="{9CF0FEC6-6F70-78AD-A9F7-BC0819DEE292}"/>
-                      </a:ext>
-                    </a:extLst>
-                  </p:cNvPr>
-                  <p:cNvCxnSpPr>
-                    <a:cxnSpLocks noChangeAspect="1"/>
-                    <a:stCxn id="27" idx="2"/>
-                    <a:endCxn id="9" idx="6"/>
-                  </p:cNvCxnSpPr>
-                  <p:nvPr/>
-                </p:nvCxnSpPr>
-                <p:spPr>
-                  <a:xfrm flipH="1" flipV="1">
-                    <a:off x="2925132" y="3742357"/>
-                    <a:ext cx="823592" cy="26365"/>
-                  </a:xfrm>
-                  <a:prstGeom prst="straightConnector1">
-                    <a:avLst/>
-                  </a:prstGeom>
-                  <a:ln>
-                    <a:tailEnd type="triangle"/>
-                  </a:ln>
-                </p:spPr>
-                <p:style>
-                  <a:lnRef idx="1">
-                    <a:schemeClr val="accent1"/>
-                  </a:lnRef>
-                  <a:fillRef idx="0">
-                    <a:schemeClr val="accent1"/>
-                  </a:fillRef>
-                  <a:effectRef idx="0">
-                    <a:schemeClr val="accent1"/>
-                  </a:effectRef>
-                  <a:fontRef idx="minor">
-                    <a:schemeClr val="tx1"/>
-                  </a:fontRef>
-                </p:style>
-              </p:cxnSp>
-              <p:cxnSp>
-                <p:nvCxnSpPr>
-                  <p:cNvPr id="71" name="Прямая соединительная линия 70">
-                    <a:extLst>
-                      <a:ext uri="{FF2B5EF4-FFF2-40B4-BE49-F238E27FC236}">
-                        <a16:creationId xmlns:a16="http://schemas.microsoft.com/office/drawing/2014/main" id="{98FEB8AC-4CE5-F434-EB30-8D381D208384}"/>
-                      </a:ext>
-                    </a:extLst>
-                  </p:cNvPr>
-                  <p:cNvCxnSpPr>
-                    <a:cxnSpLocks noChangeAspect="1"/>
-                  </p:cNvCxnSpPr>
-                  <p:nvPr/>
-                </p:nvCxnSpPr>
-                <p:spPr>
-                  <a:xfrm>
-                    <a:off x="4448235" y="3054632"/>
-                    <a:ext cx="0" cy="2711446"/>
-                  </a:xfrm>
-                  <a:prstGeom prst="line">
-                    <a:avLst/>
-                  </a:prstGeom>
-                  <a:ln w="28575"/>
-                </p:spPr>
-                <p:style>
-                  <a:lnRef idx="1">
-                    <a:schemeClr val="dk1"/>
-                  </a:lnRef>
-                  <a:fillRef idx="0">
-                    <a:schemeClr val="dk1"/>
-                  </a:fillRef>
-                  <a:effectRef idx="0">
-                    <a:schemeClr val="dk1"/>
-                  </a:effectRef>
-                  <a:fontRef idx="minor">
-                    <a:schemeClr val="tx1"/>
-                  </a:fontRef>
-                </p:style>
-              </p:cxnSp>
-              <p:cxnSp>
-                <p:nvCxnSpPr>
-                  <p:cNvPr id="73" name="Прямая со стрелкой 72">
-                    <a:extLst>
-                      <a:ext uri="{FF2B5EF4-FFF2-40B4-BE49-F238E27FC236}">
-                        <a16:creationId xmlns:a16="http://schemas.microsoft.com/office/drawing/2014/main" id="{077E4DAD-4733-EDFC-3A7A-E16C3D8143E1}"/>
-                      </a:ext>
-                    </a:extLst>
-                  </p:cNvPr>
-                  <p:cNvCxnSpPr>
-                    <a:cxnSpLocks noChangeAspect="1"/>
-                    <a:stCxn id="16" idx="2"/>
-                    <a:endCxn id="15" idx="6"/>
-                  </p:cNvCxnSpPr>
-                  <p:nvPr/>
-                </p:nvCxnSpPr>
-                <p:spPr>
-                  <a:xfrm flipH="1" flipV="1">
-                    <a:off x="3981632" y="3213897"/>
-                    <a:ext cx="910592" cy="41285"/>
-                  </a:xfrm>
-                  <a:prstGeom prst="straightConnector1">
-                    <a:avLst/>
-                  </a:prstGeom>
-                  <a:ln>
-                    <a:tailEnd type="triangle"/>
-                  </a:ln>
-                </p:spPr>
-                <p:style>
-                  <a:lnRef idx="1">
-                    <a:schemeClr val="accent1"/>
-                  </a:lnRef>
-                  <a:fillRef idx="0">
-                    <a:schemeClr val="accent1"/>
-                  </a:fillRef>
-                  <a:effectRef idx="0">
-                    <a:schemeClr val="accent1"/>
-                  </a:effectRef>
-                  <a:fontRef idx="minor">
-                    <a:schemeClr val="tx1"/>
-                  </a:fontRef>
-                </p:style>
-              </p:cxnSp>
-              <p:cxnSp>
-                <p:nvCxnSpPr>
-                  <p:cNvPr id="75" name="Прямая со стрелкой 74">
-                    <a:extLst>
-                      <a:ext uri="{FF2B5EF4-FFF2-40B4-BE49-F238E27FC236}">
-                        <a16:creationId xmlns:a16="http://schemas.microsoft.com/office/drawing/2014/main" id="{81315996-EE89-2D32-DD1F-8DF3234337AA}"/>
-                      </a:ext>
-                    </a:extLst>
-                  </p:cNvPr>
-                  <p:cNvCxnSpPr>
-                    <a:cxnSpLocks noChangeAspect="1"/>
-                    <a:stCxn id="16" idx="3"/>
-                    <a:endCxn id="27" idx="7"/>
-                  </p:cNvCxnSpPr>
-                  <p:nvPr/>
-                </p:nvCxnSpPr>
-                <p:spPr>
-                  <a:xfrm flipH="1">
-                    <a:off x="3918873" y="3325660"/>
-                    <a:ext cx="1002544" cy="372584"/>
-                  </a:xfrm>
-                  <a:prstGeom prst="straightConnector1">
-                    <a:avLst/>
-                  </a:prstGeom>
-                  <a:ln>
-                    <a:tailEnd type="triangle"/>
-                  </a:ln>
-                </p:spPr>
-                <p:style>
-                  <a:lnRef idx="1">
-                    <a:schemeClr val="accent1"/>
-                  </a:lnRef>
-                  <a:fillRef idx="0">
-                    <a:schemeClr val="accent1"/>
-                  </a:fillRef>
-                  <a:effectRef idx="0">
-                    <a:schemeClr val="accent1"/>
-                  </a:effectRef>
-                  <a:fontRef idx="minor">
-                    <a:schemeClr val="tx1"/>
-                  </a:fontRef>
-                </p:style>
-              </p:cxnSp>
-              <p:cxnSp>
-                <p:nvCxnSpPr>
-                  <p:cNvPr id="77" name="Прямая со стрелкой 76">
-                    <a:extLst>
-                      <a:ext uri="{FF2B5EF4-FFF2-40B4-BE49-F238E27FC236}">
-                        <a16:creationId xmlns:a16="http://schemas.microsoft.com/office/drawing/2014/main" id="{25DB8CBF-BB1A-52F8-FD44-390E68D429CF}"/>
-                      </a:ext>
-                    </a:extLst>
-                  </p:cNvPr>
-                  <p:cNvCxnSpPr>
-                    <a:cxnSpLocks noChangeAspect="1"/>
-                    <a:stCxn id="17" idx="1"/>
-                    <a:endCxn id="15" idx="5"/>
-                  </p:cNvCxnSpPr>
-                  <p:nvPr/>
-                </p:nvCxnSpPr>
-                <p:spPr>
-                  <a:xfrm flipH="1" flipV="1">
-                    <a:off x="3952439" y="3284375"/>
-                    <a:ext cx="1042164" cy="575517"/>
-                  </a:xfrm>
-                  <a:prstGeom prst="straightConnector1">
-                    <a:avLst/>
-                  </a:prstGeom>
-                  <a:ln>
-                    <a:tailEnd type="triangle"/>
-                  </a:ln>
-                </p:spPr>
-                <p:style>
-                  <a:lnRef idx="1">
-                    <a:schemeClr val="accent1"/>
-                  </a:lnRef>
-                  <a:fillRef idx="0">
-                    <a:schemeClr val="accent1"/>
-                  </a:fillRef>
-                  <a:effectRef idx="0">
-                    <a:schemeClr val="accent1"/>
-                  </a:effectRef>
-                  <a:fontRef idx="minor">
-                    <a:schemeClr val="tx1"/>
-                  </a:fontRef>
-                </p:style>
-              </p:cxnSp>
-              <p:cxnSp>
-                <p:nvCxnSpPr>
-                  <p:cNvPr id="79" name="Прямая со стрелкой 78">
-                    <a:extLst>
-                      <a:ext uri="{FF2B5EF4-FFF2-40B4-BE49-F238E27FC236}">
-                        <a16:creationId xmlns:a16="http://schemas.microsoft.com/office/drawing/2014/main" id="{99906B7E-4C5E-AF9E-3473-BC5929012DED}"/>
-                      </a:ext>
-                    </a:extLst>
-                  </p:cNvPr>
-                  <p:cNvCxnSpPr>
-                    <a:cxnSpLocks noChangeAspect="1"/>
-                    <a:stCxn id="17" idx="2"/>
-                    <a:endCxn id="28" idx="7"/>
-                  </p:cNvCxnSpPr>
-                  <p:nvPr/>
-                </p:nvCxnSpPr>
-                <p:spPr>
-                  <a:xfrm flipH="1">
-                    <a:off x="4026646" y="3930370"/>
-                    <a:ext cx="938764" cy="405117"/>
-                  </a:xfrm>
-                  <a:prstGeom prst="straightConnector1">
-                    <a:avLst/>
-                  </a:prstGeom>
-                  <a:ln>
-                    <a:tailEnd type="triangle"/>
-                  </a:ln>
-                </p:spPr>
-                <p:style>
-                  <a:lnRef idx="1">
-                    <a:schemeClr val="accent1"/>
-                  </a:lnRef>
-                  <a:fillRef idx="0">
-                    <a:schemeClr val="accent1"/>
-                  </a:fillRef>
-                  <a:effectRef idx="0">
-                    <a:schemeClr val="accent1"/>
-                  </a:effectRef>
-                  <a:fontRef idx="minor">
-                    <a:schemeClr val="tx1"/>
-                  </a:fontRef>
-                </p:style>
-              </p:cxnSp>
-              <p:cxnSp>
-                <p:nvCxnSpPr>
-                  <p:cNvPr id="81" name="Прямая со стрелкой 80">
-                    <a:extLst>
-                      <a:ext uri="{FF2B5EF4-FFF2-40B4-BE49-F238E27FC236}">
-                        <a16:creationId xmlns:a16="http://schemas.microsoft.com/office/drawing/2014/main" id="{71FE8574-066C-BDC9-F82B-390BDD203B89}"/>
-                      </a:ext>
-                    </a:extLst>
-                  </p:cNvPr>
-                  <p:cNvCxnSpPr>
-                    <a:cxnSpLocks noChangeAspect="1"/>
-                    <a:stCxn id="19" idx="2"/>
-                    <a:endCxn id="27" idx="6"/>
-                  </p:cNvCxnSpPr>
-                  <p:nvPr/>
-                </p:nvCxnSpPr>
-                <p:spPr>
-                  <a:xfrm flipH="1" flipV="1">
-                    <a:off x="3948066" y="3768722"/>
-                    <a:ext cx="1160024" cy="770073"/>
-                  </a:xfrm>
-                  <a:prstGeom prst="straightConnector1">
-                    <a:avLst/>
-                  </a:prstGeom>
-                  <a:ln>
-                    <a:tailEnd type="triangle"/>
-                  </a:ln>
-                </p:spPr>
-                <p:style>
-                  <a:lnRef idx="1">
-                    <a:schemeClr val="accent1"/>
-                  </a:lnRef>
-                  <a:fillRef idx="0">
-                    <a:schemeClr val="accent1"/>
-                  </a:fillRef>
-                  <a:effectRef idx="0">
-                    <a:schemeClr val="accent1"/>
-                  </a:effectRef>
-                  <a:fontRef idx="minor">
-                    <a:schemeClr val="tx1"/>
-                  </a:fontRef>
-                </p:style>
-              </p:cxnSp>
-              <p:cxnSp>
-                <p:nvCxnSpPr>
-                  <p:cNvPr id="83" name="Прямая со стрелкой 82">
-                    <a:extLst>
-                      <a:ext uri="{FF2B5EF4-FFF2-40B4-BE49-F238E27FC236}">
-                        <a16:creationId xmlns:a16="http://schemas.microsoft.com/office/drawing/2014/main" id="{E17C35B1-BE77-4974-69F9-8F3BBAE207B6}"/>
-                      </a:ext>
-                    </a:extLst>
-                  </p:cNvPr>
-                  <p:cNvCxnSpPr>
-                    <a:cxnSpLocks noChangeAspect="1"/>
-                    <a:stCxn id="19" idx="3"/>
-                    <a:endCxn id="28" idx="6"/>
-                  </p:cNvCxnSpPr>
-                  <p:nvPr/>
-                </p:nvCxnSpPr>
-                <p:spPr>
-                  <a:xfrm flipH="1" flipV="1">
-                    <a:off x="4055839" y="4405965"/>
-                    <a:ext cx="1081444" cy="203308"/>
-                  </a:xfrm>
-                  <a:prstGeom prst="straightConnector1">
-                    <a:avLst/>
-                  </a:prstGeom>
-                  <a:ln>
-                    <a:tailEnd type="triangle"/>
-                  </a:ln>
-                </p:spPr>
-                <p:style>
-                  <a:lnRef idx="1">
-                    <a:schemeClr val="accent1"/>
-                  </a:lnRef>
-                  <a:fillRef idx="0">
-                    <a:schemeClr val="accent1"/>
-                  </a:fillRef>
-                  <a:effectRef idx="0">
-                    <a:schemeClr val="accent1"/>
-                  </a:effectRef>
-                  <a:fontRef idx="minor">
-                    <a:schemeClr val="tx1"/>
-                  </a:fontRef>
-                </p:style>
-              </p:cxnSp>
-              <p:cxnSp>
-                <p:nvCxnSpPr>
-                  <p:cNvPr id="85" name="Прямая со стрелкой 84">
-                    <a:extLst>
-                      <a:ext uri="{FF2B5EF4-FFF2-40B4-BE49-F238E27FC236}">
-                        <a16:creationId xmlns:a16="http://schemas.microsoft.com/office/drawing/2014/main" id="{FCA72804-861E-6DF9-DDF1-D763CD89E01D}"/>
-                      </a:ext>
-                    </a:extLst>
-                  </p:cNvPr>
-                  <p:cNvCxnSpPr>
-                    <a:cxnSpLocks noChangeAspect="1"/>
-                    <a:stCxn id="18" idx="1"/>
-                    <a:endCxn id="28" idx="5"/>
-                  </p:cNvCxnSpPr>
-                  <p:nvPr/>
-                </p:nvCxnSpPr>
-                <p:spPr>
-                  <a:xfrm flipH="1" flipV="1">
-                    <a:off x="4026646" y="4476443"/>
-                    <a:ext cx="709186" cy="977933"/>
-                  </a:xfrm>
-                  <a:prstGeom prst="straightConnector1">
-                    <a:avLst/>
-                  </a:prstGeom>
-                  <a:ln>
-                    <a:tailEnd type="triangle"/>
-                  </a:ln>
-                </p:spPr>
-                <p:style>
-                  <a:lnRef idx="1">
-                    <a:schemeClr val="accent1"/>
-                  </a:lnRef>
-                  <a:fillRef idx="0">
-                    <a:schemeClr val="accent1"/>
-                  </a:fillRef>
-                  <a:effectRef idx="0">
-                    <a:schemeClr val="accent1"/>
-                  </a:effectRef>
-                  <a:fontRef idx="minor">
-                    <a:schemeClr val="tx1"/>
-                  </a:fontRef>
-                </p:style>
-              </p:cxnSp>
-              <p:cxnSp>
-                <p:nvCxnSpPr>
-                  <p:cNvPr id="86" name="Прямая соединительная линия 85">
-                    <a:extLst>
-                      <a:ext uri="{FF2B5EF4-FFF2-40B4-BE49-F238E27FC236}">
-                        <a16:creationId xmlns:a16="http://schemas.microsoft.com/office/drawing/2014/main" id="{02DC59C0-2E40-22A7-D49F-60929F45650B}"/>
-                      </a:ext>
-                    </a:extLst>
-                  </p:cNvPr>
-                  <p:cNvCxnSpPr>
-                    <a:cxnSpLocks noChangeAspect="1"/>
-                  </p:cNvCxnSpPr>
-                  <p:nvPr/>
-                </p:nvCxnSpPr>
-                <p:spPr>
-                  <a:xfrm>
-                    <a:off x="5419785" y="2979809"/>
-                    <a:ext cx="0" cy="2711446"/>
-                  </a:xfrm>
-                  <a:prstGeom prst="line">
-                    <a:avLst/>
-                  </a:prstGeom>
-                  <a:ln w="28575"/>
-                </p:spPr>
-                <p:style>
-                  <a:lnRef idx="1">
-                    <a:schemeClr val="dk1"/>
-                  </a:lnRef>
-                  <a:fillRef idx="0">
-                    <a:schemeClr val="dk1"/>
-                  </a:fillRef>
-                  <a:effectRef idx="0">
-                    <a:schemeClr val="dk1"/>
-                  </a:effectRef>
-                  <a:fontRef idx="minor">
-                    <a:schemeClr val="tx1"/>
-                  </a:fontRef>
-                </p:style>
-              </p:cxnSp>
-              <p:cxnSp>
-                <p:nvCxnSpPr>
-                  <p:cNvPr id="136" name="Прямая со стрелкой 135">
-                    <a:extLst>
-                      <a:ext uri="{FF2B5EF4-FFF2-40B4-BE49-F238E27FC236}">
-                        <a16:creationId xmlns:a16="http://schemas.microsoft.com/office/drawing/2014/main" id="{CB655037-A6ED-FE10-3D03-C0AC2B4F6B83}"/>
-                      </a:ext>
-                    </a:extLst>
-                  </p:cNvPr>
-                  <p:cNvCxnSpPr>
-                    <a:cxnSpLocks noChangeAspect="1"/>
-                    <a:stCxn id="20" idx="2"/>
-                    <a:endCxn id="16" idx="6"/>
-                  </p:cNvCxnSpPr>
-                  <p:nvPr/>
-                </p:nvCxnSpPr>
-                <p:spPr>
-                  <a:xfrm flipH="1" flipV="1">
-                    <a:off x="5091566" y="3255182"/>
-                    <a:ext cx="727099" cy="208731"/>
-                  </a:xfrm>
-                  <a:prstGeom prst="straightConnector1">
-                    <a:avLst/>
-                  </a:prstGeom>
-                  <a:ln>
-                    <a:tailEnd type="triangle"/>
-                  </a:ln>
-                </p:spPr>
-                <p:style>
-                  <a:lnRef idx="1">
-                    <a:schemeClr val="accent1"/>
-                  </a:lnRef>
-                  <a:fillRef idx="0">
-                    <a:schemeClr val="accent1"/>
-                  </a:fillRef>
-                  <a:effectRef idx="0">
-                    <a:schemeClr val="accent1"/>
-                  </a:effectRef>
-                  <a:fontRef idx="minor">
-                    <a:schemeClr val="tx1"/>
-                  </a:fontRef>
-                </p:style>
-              </p:cxnSp>
-              <p:cxnSp>
-                <p:nvCxnSpPr>
-                  <p:cNvPr id="138" name="Прямая со стрелкой 137">
-                    <a:extLst>
-                      <a:ext uri="{FF2B5EF4-FFF2-40B4-BE49-F238E27FC236}">
-                        <a16:creationId xmlns:a16="http://schemas.microsoft.com/office/drawing/2014/main" id="{B16A5427-6B25-E028-C786-0A3BDAC9CB6F}"/>
-                      </a:ext>
-                    </a:extLst>
-                  </p:cNvPr>
-                  <p:cNvCxnSpPr>
-                    <a:cxnSpLocks noChangeAspect="1"/>
-                    <a:stCxn id="20" idx="3"/>
-                    <a:endCxn id="17" idx="6"/>
-                  </p:cNvCxnSpPr>
-                  <p:nvPr/>
-                </p:nvCxnSpPr>
-                <p:spPr>
-                  <a:xfrm flipH="1">
-                    <a:off x="5164752" y="3534391"/>
-                    <a:ext cx="683106" cy="395979"/>
-                  </a:xfrm>
-                  <a:prstGeom prst="straightConnector1">
-                    <a:avLst/>
-                  </a:prstGeom>
-                  <a:ln>
-                    <a:tailEnd type="triangle"/>
-                  </a:ln>
-                </p:spPr>
-                <p:style>
-                  <a:lnRef idx="1">
-                    <a:schemeClr val="accent1"/>
-                  </a:lnRef>
-                  <a:fillRef idx="0">
-                    <a:schemeClr val="accent1"/>
-                  </a:fillRef>
-                  <a:effectRef idx="0">
-                    <a:schemeClr val="accent1"/>
-                  </a:effectRef>
-                  <a:fontRef idx="minor">
-                    <a:schemeClr val="tx1"/>
-                  </a:fontRef>
-                </p:style>
-              </p:cxnSp>
-              <p:sp>
-                <p:nvSpPr>
-                  <p:cNvPr id="141" name="Овал 140">
-                    <a:extLst>
-                      <a:ext uri="{FF2B5EF4-FFF2-40B4-BE49-F238E27FC236}">
-                        <a16:creationId xmlns:a16="http://schemas.microsoft.com/office/drawing/2014/main" id="{84B9186E-169B-D602-9D62-9A0CB2C0A01A}"/>
-                      </a:ext>
-                    </a:extLst>
-                  </p:cNvPr>
-                  <p:cNvSpPr>
-                    <a:spLocks noChangeAspect="1"/>
-                  </p:cNvSpPr>
-                  <p:nvPr/>
-                </p:nvSpPr>
-                <p:spPr>
-                  <a:xfrm>
-                    <a:off x="5818665" y="4435285"/>
-                    <a:ext cx="199342" cy="199342"/>
-                  </a:xfrm>
-                  <a:prstGeom prst="ellipse">
-                    <a:avLst/>
-                  </a:prstGeom>
-                  <a:ln>
-                    <a:solidFill>
-                      <a:schemeClr val="accent6"/>
-                    </a:solidFill>
-                  </a:ln>
-                </p:spPr>
-                <p:style>
-                  <a:lnRef idx="3">
-                    <a:schemeClr val="lt1"/>
-                  </a:lnRef>
-                  <a:fillRef idx="1">
-                    <a:schemeClr val="accent6"/>
-                  </a:fillRef>
-                  <a:effectRef idx="1">
-                    <a:schemeClr val="accent6"/>
-                  </a:effectRef>
-                  <a:fontRef idx="minor">
-                    <a:schemeClr val="lt1"/>
-                  </a:fontRef>
-                </p:style>
-                <p:txBody>
-                  <a:bodyPr rtlCol="0" anchor="ctr"/>
-                  <a:lstStyle/>
-                  <a:p>
-                    <a:pPr algn="ctr"/>
-                    <a:endParaRPr lang="ru-RU"/>
-                  </a:p>
-                </p:txBody>
-              </p:sp>
-              <p:cxnSp>
-                <p:nvCxnSpPr>
-                  <p:cNvPr id="143" name="Прямая со стрелкой 142">
-                    <a:extLst>
-                      <a:ext uri="{FF2B5EF4-FFF2-40B4-BE49-F238E27FC236}">
-                        <a16:creationId xmlns:a16="http://schemas.microsoft.com/office/drawing/2014/main" id="{B86C0ABE-136C-7774-0C58-87C061DD0220}"/>
-                      </a:ext>
-                    </a:extLst>
-                  </p:cNvPr>
-                  <p:cNvCxnSpPr>
-                    <a:cxnSpLocks noChangeAspect="1"/>
-                    <a:stCxn id="141" idx="2"/>
-                    <a:endCxn id="19" idx="6"/>
-                  </p:cNvCxnSpPr>
-                  <p:nvPr/>
-                </p:nvCxnSpPr>
-                <p:spPr>
-                  <a:xfrm flipH="1">
-                    <a:off x="5307432" y="4534956"/>
-                    <a:ext cx="511233" cy="3839"/>
-                  </a:xfrm>
-                  <a:prstGeom prst="straightConnector1">
-                    <a:avLst/>
-                  </a:prstGeom>
-                  <a:ln>
-                    <a:tailEnd type="triangle"/>
-                  </a:ln>
-                </p:spPr>
-                <p:style>
-                  <a:lnRef idx="1">
-                    <a:schemeClr val="accent1"/>
-                  </a:lnRef>
-                  <a:fillRef idx="0">
-                    <a:schemeClr val="accent1"/>
-                  </a:fillRef>
-                  <a:effectRef idx="0">
-                    <a:schemeClr val="accent1"/>
-                  </a:effectRef>
-                  <a:fontRef idx="minor">
-                    <a:schemeClr val="tx1"/>
-                  </a:fontRef>
-                </p:style>
-              </p:cxnSp>
-              <p:cxnSp>
-                <p:nvCxnSpPr>
-                  <p:cNvPr id="145" name="Прямая со стрелкой 144">
-                    <a:extLst>
-                      <a:ext uri="{FF2B5EF4-FFF2-40B4-BE49-F238E27FC236}">
-                        <a16:creationId xmlns:a16="http://schemas.microsoft.com/office/drawing/2014/main" id="{5BC8DE36-4153-0CC2-836D-7DBDC844DD9B}"/>
-                      </a:ext>
-                    </a:extLst>
-                  </p:cNvPr>
-                  <p:cNvCxnSpPr>
-                    <a:cxnSpLocks noChangeAspect="1"/>
-                    <a:stCxn id="141" idx="3"/>
-                    <a:endCxn id="18" idx="6"/>
-                  </p:cNvCxnSpPr>
-                  <p:nvPr/>
-                </p:nvCxnSpPr>
-                <p:spPr>
-                  <a:xfrm flipH="1">
-                    <a:off x="4905981" y="4605434"/>
-                    <a:ext cx="941877" cy="919420"/>
-                  </a:xfrm>
-                  <a:prstGeom prst="straightConnector1">
-                    <a:avLst/>
-                  </a:prstGeom>
-                  <a:ln>
-                    <a:tailEnd type="triangle"/>
-                  </a:ln>
-                </p:spPr>
-                <p:style>
-                  <a:lnRef idx="1">
-                    <a:schemeClr val="accent1"/>
-                  </a:lnRef>
-                  <a:fillRef idx="0">
-                    <a:schemeClr val="accent1"/>
-                  </a:fillRef>
-                  <a:effectRef idx="0">
-                    <a:schemeClr val="accent1"/>
-                  </a:effectRef>
-                  <a:fontRef idx="minor">
-                    <a:schemeClr val="tx1"/>
-                  </a:fontRef>
-                </p:style>
-              </p:cxnSp>
-              <p:sp>
-                <p:nvSpPr>
-                  <p:cNvPr id="187" name="Прямоугольник 186">
-                    <a:extLst>
-                      <a:ext uri="{FF2B5EF4-FFF2-40B4-BE49-F238E27FC236}">
-                        <a16:creationId xmlns:a16="http://schemas.microsoft.com/office/drawing/2014/main" id="{C7F18F6C-013E-DCCD-4DB7-F5C089ECC1D3}"/>
-                      </a:ext>
-                    </a:extLst>
-                  </p:cNvPr>
-                  <p:cNvSpPr/>
-                  <p:nvPr/>
-                </p:nvSpPr>
-                <p:spPr>
-                  <a:xfrm>
-                    <a:off x="6353175" y="2059626"/>
-                    <a:ext cx="349250" cy="349250"/>
-                  </a:xfrm>
-                  <a:prstGeom prst="rect">
-                    <a:avLst/>
-                  </a:prstGeom>
-                </p:spPr>
-                <p:style>
-                  <a:lnRef idx="2">
-                    <a:schemeClr val="accent1">
-                      <a:shade val="15000"/>
-                    </a:schemeClr>
-                  </a:lnRef>
-                  <a:fillRef idx="1">
-                    <a:schemeClr val="accent1"/>
-                  </a:fillRef>
-                  <a:effectRef idx="0">
-                    <a:schemeClr val="accent1"/>
-                  </a:effectRef>
-                  <a:fontRef idx="minor">
-                    <a:schemeClr val="lt1"/>
-                  </a:fontRef>
-                </p:style>
-                <p:txBody>
-                  <a:bodyPr rtlCol="0" anchor="ctr"/>
-                  <a:lstStyle/>
-                  <a:p>
-                    <a:pPr algn="ctr"/>
-                    <a:endParaRPr lang="ru-RU"/>
-                  </a:p>
-                </p:txBody>
-              </p:sp>
-              <p:cxnSp>
-                <p:nvCxnSpPr>
-                  <p:cNvPr id="191" name="Соединитель: изогнутый 190">
-                    <a:extLst>
-                      <a:ext uri="{FF2B5EF4-FFF2-40B4-BE49-F238E27FC236}">
-                        <a16:creationId xmlns:a16="http://schemas.microsoft.com/office/drawing/2014/main" id="{939999F0-0716-9AAB-F27F-2FE9830DC2B1}"/>
-                      </a:ext>
-                    </a:extLst>
-                  </p:cNvPr>
-                  <p:cNvCxnSpPr>
-                    <a:cxnSpLocks/>
-                    <a:stCxn id="187" idx="2"/>
-                    <a:endCxn id="20" idx="6"/>
-                  </p:cNvCxnSpPr>
-                  <p:nvPr/>
-                </p:nvCxnSpPr>
-                <p:spPr>
-                  <a:xfrm rot="5400000">
-                    <a:off x="5745386" y="2681498"/>
-                    <a:ext cx="1055037" cy="509793"/>
-                  </a:xfrm>
-                  <a:prstGeom prst="curvedConnector2">
-                    <a:avLst/>
-                  </a:prstGeom>
-                  <a:ln>
-                    <a:tailEnd type="triangle"/>
-                  </a:ln>
-                </p:spPr>
-                <p:style>
-                  <a:lnRef idx="1">
-                    <a:schemeClr val="accent1"/>
-                  </a:lnRef>
-                  <a:fillRef idx="0">
-                    <a:schemeClr val="accent1"/>
-                  </a:fillRef>
-                  <a:effectRef idx="0">
-                    <a:schemeClr val="accent1"/>
-                  </a:effectRef>
-                  <a:fontRef idx="minor">
-                    <a:schemeClr val="tx1"/>
-                  </a:fontRef>
-                </p:style>
-              </p:cxnSp>
-              <p:cxnSp>
-                <p:nvCxnSpPr>
-                  <p:cNvPr id="193" name="Соединитель: изогнутый 192">
-                    <a:extLst>
-                      <a:ext uri="{FF2B5EF4-FFF2-40B4-BE49-F238E27FC236}">
-                        <a16:creationId xmlns:a16="http://schemas.microsoft.com/office/drawing/2014/main" id="{B1BA8CE8-98DA-D48C-4176-D86E9601ED85}"/>
-                      </a:ext>
-                    </a:extLst>
-                  </p:cNvPr>
-                  <p:cNvCxnSpPr>
-                    <a:cxnSpLocks/>
-                    <a:stCxn id="187" idx="2"/>
-                    <a:endCxn id="141" idx="6"/>
-                  </p:cNvCxnSpPr>
-                  <p:nvPr/>
-                </p:nvCxnSpPr>
-                <p:spPr>
-                  <a:xfrm rot="5400000">
-                    <a:off x="5209864" y="3217020"/>
-                    <a:ext cx="2126080" cy="509793"/>
-                  </a:xfrm>
-                  <a:prstGeom prst="curvedConnector2">
-                    <a:avLst/>
-                  </a:prstGeom>
-                  <a:ln>
-                    <a:tailEnd type="triangle"/>
-                  </a:ln>
-                </p:spPr>
-                <p:style>
-                  <a:lnRef idx="1">
-                    <a:schemeClr val="accent1"/>
-                  </a:lnRef>
-                  <a:fillRef idx="0">
-                    <a:schemeClr val="accent1"/>
-                  </a:fillRef>
-                  <a:effectRef idx="0">
-                    <a:schemeClr val="accent1"/>
-                  </a:effectRef>
-                  <a:fontRef idx="minor">
-                    <a:schemeClr val="tx1"/>
-                  </a:fontRef>
-                </p:style>
-              </p:cxnSp>
-              <p:sp>
-                <p:nvSpPr>
-                  <p:cNvPr id="198" name="TextBox 197">
-                    <a:extLst>
-                      <a:ext uri="{FF2B5EF4-FFF2-40B4-BE49-F238E27FC236}">
-                        <a16:creationId xmlns:a16="http://schemas.microsoft.com/office/drawing/2014/main" id="{616D30AD-0308-A1AC-4DEF-B9A5CB0BBC31}"/>
-                      </a:ext>
-                    </a:extLst>
-                  </p:cNvPr>
-                  <p:cNvSpPr txBox="1">
-                    <a:spLocks noChangeAspect="1"/>
-                  </p:cNvSpPr>
-                  <p:nvPr/>
-                </p:nvSpPr>
-                <p:spPr>
-                  <a:xfrm>
-                    <a:off x="1446746" y="4529160"/>
-                    <a:ext cx="883969" cy="572466"/>
-                  </a:xfrm>
-                  <a:prstGeom prst="rect">
-                    <a:avLst/>
-                  </a:prstGeom>
-                  <a:noFill/>
-                </p:spPr>
-                <p:txBody>
-                  <a:bodyPr wrap="square" rtlCol="0">
-                    <a:spAutoFit/>
-                  </a:bodyPr>
-                  <a:lstStyle/>
-                  <a:p>
-                    <a:pPr algn="ctr"/>
-                    <a:r>
-                      <a:rPr lang="ru-RU" sz="900" dirty="0">
-                        <a:latin typeface="Arial" panose="020B0604020202020204" pitchFamily="34" charset="0"/>
-                        <a:cs typeface="Arial" panose="020B0604020202020204" pitchFamily="34" charset="0"/>
-                      </a:rPr>
-                      <a:t>Генезис состояние</a:t>
-                    </a:r>
-                  </a:p>
-                </p:txBody>
-              </p:sp>
-              <p:sp>
-                <p:nvSpPr>
-                  <p:cNvPr id="199" name="TextBox 198">
-                    <a:extLst>
-                      <a:ext uri="{FF2B5EF4-FFF2-40B4-BE49-F238E27FC236}">
-                        <a16:creationId xmlns:a16="http://schemas.microsoft.com/office/drawing/2014/main" id="{B997DCD6-254B-89E4-480B-13A18D342ED3}"/>
-                      </a:ext>
-                    </a:extLst>
-                  </p:cNvPr>
-                  <p:cNvSpPr txBox="1">
-                    <a:spLocks noChangeAspect="1"/>
-                  </p:cNvSpPr>
-                  <p:nvPr/>
-                </p:nvSpPr>
-                <p:spPr>
-                  <a:xfrm>
-                    <a:off x="3554235" y="2763842"/>
-                    <a:ext cx="684891" cy="230833"/>
-                  </a:xfrm>
-                  <a:prstGeom prst="rect">
-                    <a:avLst/>
-                  </a:prstGeom>
-                  <a:noFill/>
-                </p:spPr>
-                <p:txBody>
-                  <a:bodyPr wrap="square" rtlCol="0">
-                    <a:spAutoFit/>
-                  </a:bodyPr>
-                  <a:lstStyle/>
-                  <a:p>
-                    <a:pPr algn="ctr"/>
-                    <a:r>
-                      <a:rPr lang="ru-RU" sz="900" dirty="0">
-                        <a:latin typeface="Arial" panose="020B0604020202020204" pitchFamily="34" charset="0"/>
-                        <a:cs typeface="Arial" panose="020B0604020202020204" pitchFamily="34" charset="0"/>
-                      </a:rPr>
-                      <a:t>Слот 1</a:t>
-                    </a:r>
-                  </a:p>
-                </p:txBody>
-              </p:sp>
-              <p:sp>
-                <p:nvSpPr>
-                  <p:cNvPr id="200" name="TextBox 199">
-                    <a:extLst>
-                      <a:ext uri="{FF2B5EF4-FFF2-40B4-BE49-F238E27FC236}">
-                        <a16:creationId xmlns:a16="http://schemas.microsoft.com/office/drawing/2014/main" id="{D555623E-7CC3-C621-160D-3138B0337D8C}"/>
-                      </a:ext>
-                    </a:extLst>
-                  </p:cNvPr>
-                  <p:cNvSpPr txBox="1">
-                    <a:spLocks noChangeAspect="1"/>
-                  </p:cNvSpPr>
-                  <p:nvPr/>
-                </p:nvSpPr>
-                <p:spPr>
-                  <a:xfrm>
-                    <a:off x="4649268" y="2751250"/>
-                    <a:ext cx="684891" cy="230833"/>
-                  </a:xfrm>
-                  <a:prstGeom prst="rect">
-                    <a:avLst/>
-                  </a:prstGeom>
-                  <a:noFill/>
-                </p:spPr>
-                <p:txBody>
-                  <a:bodyPr wrap="square" rtlCol="0">
-                    <a:spAutoFit/>
-                  </a:bodyPr>
-                  <a:lstStyle/>
-                  <a:p>
-                    <a:pPr algn="ctr"/>
-                    <a:r>
-                      <a:rPr lang="ru-RU" sz="900" dirty="0">
-                        <a:latin typeface="Arial" panose="020B0604020202020204" pitchFamily="34" charset="0"/>
-                        <a:cs typeface="Arial" panose="020B0604020202020204" pitchFamily="34" charset="0"/>
-                      </a:rPr>
-                      <a:t>Слот 2</a:t>
-                    </a:r>
-                  </a:p>
-                </p:txBody>
-              </p:sp>
-              <p:sp>
-                <p:nvSpPr>
-                  <p:cNvPr id="201" name="TextBox 200">
-                    <a:extLst>
-                      <a:ext uri="{FF2B5EF4-FFF2-40B4-BE49-F238E27FC236}">
-                        <a16:creationId xmlns:a16="http://schemas.microsoft.com/office/drawing/2014/main" id="{BED62B7C-BAF5-314A-9762-C1DCDD3924C5}"/>
-                      </a:ext>
-                    </a:extLst>
-                  </p:cNvPr>
-                  <p:cNvSpPr txBox="1">
-                    <a:spLocks noChangeAspect="1"/>
-                  </p:cNvSpPr>
-                  <p:nvPr/>
-                </p:nvSpPr>
-                <p:spPr>
-                  <a:xfrm>
-                    <a:off x="5563048" y="2751250"/>
-                    <a:ext cx="684891" cy="230833"/>
-                  </a:xfrm>
-                  <a:prstGeom prst="rect">
-                    <a:avLst/>
-                  </a:prstGeom>
-                  <a:noFill/>
-                </p:spPr>
-                <p:txBody>
-                  <a:bodyPr wrap="square" rtlCol="0">
-                    <a:spAutoFit/>
-                  </a:bodyPr>
-                  <a:lstStyle/>
-                  <a:p>
-                    <a:pPr algn="ctr"/>
-                    <a:r>
-                      <a:rPr lang="ru-RU" sz="900" dirty="0">
-                        <a:latin typeface="Arial" panose="020B0604020202020204" pitchFamily="34" charset="0"/>
-                        <a:cs typeface="Arial" panose="020B0604020202020204" pitchFamily="34" charset="0"/>
-                      </a:rPr>
-                      <a:t>Слот 3</a:t>
-                    </a:r>
-                  </a:p>
-                </p:txBody>
-              </p:sp>
-              <p:cxnSp>
-                <p:nvCxnSpPr>
-                  <p:cNvPr id="202" name="Прямая соединительная линия 201">
-                    <a:extLst>
-                      <a:ext uri="{FF2B5EF4-FFF2-40B4-BE49-F238E27FC236}">
-                        <a16:creationId xmlns:a16="http://schemas.microsoft.com/office/drawing/2014/main" id="{37C56F7C-1FA3-5EB7-6436-303A919A7335}"/>
-                      </a:ext>
-                    </a:extLst>
-                  </p:cNvPr>
-                  <p:cNvCxnSpPr>
-                    <a:cxnSpLocks noChangeAspect="1"/>
-                  </p:cNvCxnSpPr>
-                  <p:nvPr/>
-                </p:nvCxnSpPr>
-                <p:spPr>
-                  <a:xfrm>
-                    <a:off x="6247939" y="2979809"/>
-                    <a:ext cx="0" cy="2711446"/>
-                  </a:xfrm>
-                  <a:prstGeom prst="line">
-                    <a:avLst/>
-                  </a:prstGeom>
-                  <a:ln w="28575"/>
-                </p:spPr>
-                <p:style>
-                  <a:lnRef idx="1">
-                    <a:schemeClr val="dk1"/>
-                  </a:lnRef>
-                  <a:fillRef idx="0">
-                    <a:schemeClr val="dk1"/>
-                  </a:fillRef>
-                  <a:effectRef idx="0">
-                    <a:schemeClr val="dk1"/>
-                  </a:effectRef>
-                  <a:fontRef idx="minor">
-                    <a:schemeClr val="tx1"/>
-                  </a:fontRef>
-                </p:style>
-              </p:cxnSp>
-              <p:cxnSp>
-                <p:nvCxnSpPr>
-                  <p:cNvPr id="208" name="Прямая соединительная линия 207">
-                    <a:extLst>
-                      <a:ext uri="{FF2B5EF4-FFF2-40B4-BE49-F238E27FC236}">
-                        <a16:creationId xmlns:a16="http://schemas.microsoft.com/office/drawing/2014/main" id="{03B7E4DE-C366-B899-47B7-703C18A821D2}"/>
-                      </a:ext>
-                    </a:extLst>
-                  </p:cNvPr>
-                  <p:cNvCxnSpPr>
-                    <a:cxnSpLocks noChangeAspect="1"/>
-                  </p:cNvCxnSpPr>
-                  <p:nvPr/>
-                </p:nvCxnSpPr>
-                <p:spPr>
-                  <a:xfrm>
-                    <a:off x="7057329" y="2979809"/>
-                    <a:ext cx="0" cy="2711446"/>
-                  </a:xfrm>
-                  <a:prstGeom prst="line">
-                    <a:avLst/>
-                  </a:prstGeom>
-                  <a:ln w="28575"/>
-                </p:spPr>
-                <p:style>
-                  <a:lnRef idx="1">
-                    <a:schemeClr val="dk1"/>
-                  </a:lnRef>
-                  <a:fillRef idx="0">
-                    <a:schemeClr val="dk1"/>
-                  </a:fillRef>
-                  <a:effectRef idx="0">
-                    <a:schemeClr val="dk1"/>
-                  </a:effectRef>
-                  <a:fontRef idx="minor">
-                    <a:schemeClr val="tx1"/>
-                  </a:fontRef>
-                </p:style>
-              </p:cxnSp>
-              <p:cxnSp>
-                <p:nvCxnSpPr>
-                  <p:cNvPr id="209" name="Прямая соединительная линия 208">
-                    <a:extLst>
-                      <a:ext uri="{FF2B5EF4-FFF2-40B4-BE49-F238E27FC236}">
-                        <a16:creationId xmlns:a16="http://schemas.microsoft.com/office/drawing/2014/main" id="{6ABA8DDF-29B4-331E-5AB7-09775B79E3E4}"/>
-                      </a:ext>
-                    </a:extLst>
-                  </p:cNvPr>
-                  <p:cNvCxnSpPr>
-                    <a:cxnSpLocks noChangeAspect="1"/>
-                  </p:cNvCxnSpPr>
-                  <p:nvPr/>
-                </p:nvCxnSpPr>
-                <p:spPr>
-                  <a:xfrm>
-                    <a:off x="7874354" y="2979809"/>
-                    <a:ext cx="0" cy="2711446"/>
-                  </a:xfrm>
-                  <a:prstGeom prst="line">
-                    <a:avLst/>
-                  </a:prstGeom>
-                  <a:ln w="28575"/>
-                </p:spPr>
-                <p:style>
-                  <a:lnRef idx="1">
-                    <a:schemeClr val="dk1"/>
-                  </a:lnRef>
-                  <a:fillRef idx="0">
-                    <a:schemeClr val="dk1"/>
-                  </a:fillRef>
-                  <a:effectRef idx="0">
-                    <a:schemeClr val="dk1"/>
-                  </a:effectRef>
-                  <a:fontRef idx="minor">
-                    <a:schemeClr val="tx1"/>
-                  </a:fontRef>
-                </p:style>
-              </p:cxnSp>
-              <p:sp>
-                <p:nvSpPr>
-                  <p:cNvPr id="214" name="TextBox 213">
-                    <a:extLst>
-                      <a:ext uri="{FF2B5EF4-FFF2-40B4-BE49-F238E27FC236}">
-                        <a16:creationId xmlns:a16="http://schemas.microsoft.com/office/drawing/2014/main" id="{90AEDD93-115B-8645-F4F4-81D45F1846F1}"/>
-                      </a:ext>
-                    </a:extLst>
-                  </p:cNvPr>
-                  <p:cNvSpPr txBox="1">
-                    <a:spLocks noChangeAspect="1"/>
-                  </p:cNvSpPr>
-                  <p:nvPr/>
-                </p:nvSpPr>
-                <p:spPr>
-                  <a:xfrm>
-                    <a:off x="6938429" y="2667213"/>
-                    <a:ext cx="1095878" cy="572466"/>
-                  </a:xfrm>
-                  <a:prstGeom prst="rect">
-                    <a:avLst/>
-                  </a:prstGeom>
-                  <a:noFill/>
-                </p:spPr>
-                <p:txBody>
-                  <a:bodyPr wrap="square" rtlCol="0">
-                    <a:spAutoFit/>
-                  </a:bodyPr>
-                  <a:lstStyle/>
-                  <a:p>
-                    <a:pPr algn="ctr"/>
-                    <a:r>
-                      <a:rPr lang="ru-RU" sz="900" dirty="0">
-                        <a:latin typeface="Arial" panose="020B0604020202020204" pitchFamily="34" charset="0"/>
-                        <a:cs typeface="Arial" panose="020B0604020202020204" pitchFamily="34" charset="0"/>
-                      </a:rPr>
-                      <a:t>Финальный слот</a:t>
-                    </a:r>
-                  </a:p>
-                </p:txBody>
-              </p:sp>
-              <p:sp>
-                <p:nvSpPr>
-                  <p:cNvPr id="222" name="TextBox 221">
-                    <a:extLst>
-                      <a:ext uri="{FF2B5EF4-FFF2-40B4-BE49-F238E27FC236}">
-                        <a16:creationId xmlns:a16="http://schemas.microsoft.com/office/drawing/2014/main" id="{509DFBF7-C7D7-B0CD-3C70-FCCB7C70239A}"/>
-                      </a:ext>
-                    </a:extLst>
-                  </p:cNvPr>
-                  <p:cNvSpPr txBox="1">
-                    <a:spLocks noChangeAspect="1"/>
-                  </p:cNvSpPr>
-                  <p:nvPr/>
-                </p:nvSpPr>
-                <p:spPr>
-                  <a:xfrm>
-                    <a:off x="2625895" y="2763842"/>
-                    <a:ext cx="684891" cy="357790"/>
-                  </a:xfrm>
-                  <a:prstGeom prst="rect">
-                    <a:avLst/>
-                  </a:prstGeom>
-                  <a:noFill/>
-                </p:spPr>
-                <p:txBody>
-                  <a:bodyPr wrap="square" rtlCol="0">
-                    <a:spAutoFit/>
-                  </a:bodyPr>
-                  <a:lstStyle/>
-                  <a:p>
-                    <a:pPr algn="ctr"/>
-                    <a:r>
-                      <a:rPr lang="ru-RU" sz="900" dirty="0">
-                        <a:latin typeface="Arial" panose="020B0604020202020204" pitchFamily="34" charset="0"/>
-                        <a:cs typeface="Arial" panose="020B0604020202020204" pitchFamily="34" charset="0"/>
-                      </a:rPr>
-                      <a:t>Слот 0</a:t>
-                    </a:r>
-                  </a:p>
-                </p:txBody>
-              </p:sp>
-              <p:sp>
-                <p:nvSpPr>
-                  <p:cNvPr id="225" name="Овал 224">
-                    <a:extLst>
-                      <a:ext uri="{FF2B5EF4-FFF2-40B4-BE49-F238E27FC236}">
-                        <a16:creationId xmlns:a16="http://schemas.microsoft.com/office/drawing/2014/main" id="{830EE46E-3621-9FA6-E8BF-4A7B5E7BE768}"/>
-                      </a:ext>
-                    </a:extLst>
-                  </p:cNvPr>
-                  <p:cNvSpPr>
-                    <a:spLocks noChangeAspect="1"/>
-                  </p:cNvSpPr>
-                  <p:nvPr/>
-                </p:nvSpPr>
-                <p:spPr>
-                  <a:xfrm>
-                    <a:off x="1730762" y="6146754"/>
-                    <a:ext cx="199342" cy="199341"/>
-                  </a:xfrm>
-                  <a:prstGeom prst="ellipse">
-                    <a:avLst/>
-                  </a:prstGeom>
-                  <a:ln>
-                    <a:solidFill>
-                      <a:schemeClr val="accent6"/>
-                    </a:solidFill>
-                  </a:ln>
-                </p:spPr>
-                <p:style>
-                  <a:lnRef idx="3">
-                    <a:schemeClr val="lt1"/>
-                  </a:lnRef>
-                  <a:fillRef idx="1">
-                    <a:schemeClr val="accent6"/>
-                  </a:fillRef>
-                  <a:effectRef idx="1">
-                    <a:schemeClr val="accent6"/>
-                  </a:effectRef>
-                  <a:fontRef idx="minor">
-                    <a:schemeClr val="lt1"/>
-                  </a:fontRef>
-                </p:style>
-                <p:txBody>
-                  <a:bodyPr rtlCol="0" anchor="ctr"/>
-                  <a:lstStyle/>
-                  <a:p>
-                    <a:pPr algn="ctr"/>
-                    <a:endParaRPr lang="ru-RU"/>
-                  </a:p>
-                </p:txBody>
-              </p:sp>
-              <p:sp>
-                <p:nvSpPr>
-                  <p:cNvPr id="232" name="Овал 231">
-                    <a:extLst>
-                      <a:ext uri="{FF2B5EF4-FFF2-40B4-BE49-F238E27FC236}">
-                        <a16:creationId xmlns:a16="http://schemas.microsoft.com/office/drawing/2014/main" id="{3D55B43C-05DF-5E75-A179-6494DACC3EDC}"/>
-                      </a:ext>
-                    </a:extLst>
-                  </p:cNvPr>
-                  <p:cNvSpPr>
-                    <a:spLocks noChangeAspect="1"/>
-                  </p:cNvSpPr>
-                  <p:nvPr/>
-                </p:nvSpPr>
-                <p:spPr>
-                  <a:xfrm>
-                    <a:off x="3881960" y="6146756"/>
-                    <a:ext cx="199342" cy="199341"/>
-                  </a:xfrm>
-                  <a:prstGeom prst="ellipse">
-                    <a:avLst/>
-                  </a:prstGeom>
-                  <a:solidFill>
-                    <a:srgbClr val="FF0000"/>
-                  </a:solidFill>
-                  <a:ln>
-                    <a:solidFill>
-                      <a:srgbClr val="FF0000"/>
-                    </a:solidFill>
-                  </a:ln>
-                </p:spPr>
-                <p:style>
-                  <a:lnRef idx="3">
-                    <a:schemeClr val="lt1"/>
-                  </a:lnRef>
-                  <a:fillRef idx="1">
-                    <a:schemeClr val="accent6"/>
-                  </a:fillRef>
-                  <a:effectRef idx="1">
-                    <a:schemeClr val="accent6"/>
-                  </a:effectRef>
-                  <a:fontRef idx="minor">
-                    <a:schemeClr val="lt1"/>
-                  </a:fontRef>
-                </p:style>
-                <p:txBody>
-                  <a:bodyPr rtlCol="0" anchor="ctr"/>
-                  <a:lstStyle/>
-                  <a:p>
-                    <a:pPr algn="ctr"/>
-                    <a:endParaRPr lang="ru-RU"/>
-                  </a:p>
-                </p:txBody>
-              </p:sp>
-            </p:grpSp>
-            <p:sp>
-              <p:nvSpPr>
-                <p:cNvPr id="203" name="TextBox 202">
-                  <a:extLst>
-                    <a:ext uri="{FF2B5EF4-FFF2-40B4-BE49-F238E27FC236}">
-                      <a16:creationId xmlns:a16="http://schemas.microsoft.com/office/drawing/2014/main" id="{4422ECA1-BC9E-8246-A77E-021C27D68C52}"/>
-                    </a:ext>
-                  </a:extLst>
-                </p:cNvPr>
-                <p:cNvSpPr txBox="1"/>
-                <p:nvPr/>
-              </p:nvSpPr>
-              <p:spPr>
-                <a:xfrm>
-                  <a:off x="3916002" y="1396335"/>
-                  <a:ext cx="1877849" cy="405496"/>
-                </a:xfrm>
-                <a:prstGeom prst="rect">
-                  <a:avLst/>
-                </a:prstGeom>
-                <a:noFill/>
-              </p:spPr>
-              <p:txBody>
-                <a:bodyPr wrap="none" rtlCol="0">
-                  <a:spAutoFit/>
-                </a:bodyPr>
-                <a:lstStyle/>
-                <a:p>
-                  <a:r>
-                    <a:rPr lang="ru-RU" sz="1100" dirty="0">
-                      <a:latin typeface="Arial" panose="020B0604020202020204" pitchFamily="34" charset="0"/>
-                      <a:cs typeface="Arial" panose="020B0604020202020204" pitchFamily="34" charset="0"/>
-                    </a:rPr>
-                    <a:t>Блок подтверждения</a:t>
-                  </a:r>
-                </a:p>
-              </p:txBody>
-            </p:sp>
-          </p:grpSp>
-          <p:sp>
-            <p:nvSpPr>
-              <p:cNvPr id="210" name="Овал 209">
-                <a:extLst>
-                  <a:ext uri="{FF2B5EF4-FFF2-40B4-BE49-F238E27FC236}">
-                    <a16:creationId xmlns:a16="http://schemas.microsoft.com/office/drawing/2014/main" id="{58063199-5CA1-B3BB-A7D6-E994166ED6D9}"/>
-                  </a:ext>
-                </a:extLst>
-              </p:cNvPr>
-              <p:cNvSpPr/>
-              <p:nvPr/>
-            </p:nvSpPr>
-            <p:spPr>
-              <a:xfrm>
-                <a:off x="4203513" y="2777986"/>
-                <a:ext cx="45720" cy="45720"/>
-              </a:xfrm>
-              <a:prstGeom prst="ellipse">
-                <a:avLst/>
-              </a:prstGeom>
-            </p:spPr>
-            <p:style>
-              <a:lnRef idx="2">
-                <a:schemeClr val="dk1">
-                  <a:shade val="15000"/>
-                </a:schemeClr>
-              </a:lnRef>
-              <a:fillRef idx="1">
-                <a:schemeClr val="dk1"/>
-              </a:fillRef>
-              <a:effectRef idx="0">
-                <a:schemeClr val="dk1"/>
-              </a:effectRef>
-              <a:fontRef idx="minor">
-                <a:schemeClr val="lt1"/>
-              </a:fontRef>
-            </p:style>
-            <p:txBody>
-              <a:bodyPr rtlCol="0" anchor="ctr"/>
-              <a:lstStyle/>
-              <a:p>
-                <a:pPr algn="ctr"/>
-                <a:endParaRPr lang="ru-RU"/>
-              </a:p>
-            </p:txBody>
-          </p:sp>
-          <p:sp>
-            <p:nvSpPr>
-              <p:cNvPr id="212" name="Овал 211">
-                <a:extLst>
-                  <a:ext uri="{FF2B5EF4-FFF2-40B4-BE49-F238E27FC236}">
-                    <a16:creationId xmlns:a16="http://schemas.microsoft.com/office/drawing/2014/main" id="{AD00C0CE-06C2-4765-77F9-C27604B0A509}"/>
-                  </a:ext>
-                </a:extLst>
-              </p:cNvPr>
-              <p:cNvSpPr/>
-              <p:nvPr/>
-            </p:nvSpPr>
-            <p:spPr>
-              <a:xfrm>
-                <a:off x="4549800" y="2777071"/>
-                <a:ext cx="45720" cy="45720"/>
-              </a:xfrm>
-              <a:prstGeom prst="ellipse">
-                <a:avLst/>
-              </a:prstGeom>
-            </p:spPr>
-            <p:style>
-              <a:lnRef idx="2">
-                <a:schemeClr val="dk1">
-                  <a:shade val="15000"/>
-                </a:schemeClr>
-              </a:lnRef>
-              <a:fillRef idx="1">
-                <a:schemeClr val="dk1"/>
-              </a:fillRef>
-              <a:effectRef idx="0">
-                <a:schemeClr val="dk1"/>
-              </a:effectRef>
-              <a:fontRef idx="minor">
-                <a:schemeClr val="lt1"/>
-              </a:fontRef>
-            </p:style>
-            <p:txBody>
-              <a:bodyPr rtlCol="0" anchor="ctr"/>
-              <a:lstStyle/>
-              <a:p>
-                <a:pPr algn="ctr"/>
-                <a:endParaRPr lang="ru-RU"/>
-              </a:p>
-            </p:txBody>
-          </p:sp>
-          <p:sp>
-            <p:nvSpPr>
-              <p:cNvPr id="213" name="Овал 212">
-                <a:extLst>
-                  <a:ext uri="{FF2B5EF4-FFF2-40B4-BE49-F238E27FC236}">
-                    <a16:creationId xmlns:a16="http://schemas.microsoft.com/office/drawing/2014/main" id="{588EAEA8-CBF3-87B9-DFA2-BA0E586DA9FE}"/>
-                  </a:ext>
-                </a:extLst>
-              </p:cNvPr>
-              <p:cNvSpPr/>
-              <p:nvPr/>
-            </p:nvSpPr>
-            <p:spPr>
-              <a:xfrm>
-                <a:off x="4386129" y="2777986"/>
-                <a:ext cx="45720" cy="45720"/>
-              </a:xfrm>
-              <a:prstGeom prst="ellipse">
-                <a:avLst/>
-              </a:prstGeom>
-            </p:spPr>
-            <p:style>
-              <a:lnRef idx="2">
-                <a:schemeClr val="dk1">
-                  <a:shade val="15000"/>
-                </a:schemeClr>
-              </a:lnRef>
-              <a:fillRef idx="1">
-                <a:schemeClr val="dk1"/>
-              </a:fillRef>
-              <a:effectRef idx="0">
-                <a:schemeClr val="dk1"/>
-              </a:effectRef>
-              <a:fontRef idx="minor">
-                <a:schemeClr val="lt1"/>
-              </a:fontRef>
-            </p:style>
-            <p:txBody>
-              <a:bodyPr rtlCol="0" anchor="ctr"/>
-              <a:lstStyle/>
-              <a:p>
-                <a:pPr algn="ctr"/>
-                <a:endParaRPr lang="ru-RU"/>
-              </a:p>
-            </p:txBody>
-          </p:sp>
-        </p:grpSp>
-      </p:grpSp>
-      <p:sp>
-        <p:nvSpPr>
-          <p:cNvPr id="234" name="TextBox 233">
-            <a:extLst>
-              <a:ext uri="{FF2B5EF4-FFF2-40B4-BE49-F238E27FC236}">
-                <a16:creationId xmlns:a16="http://schemas.microsoft.com/office/drawing/2014/main" id="{76D630C6-288B-79B7-8D76-ECC50C1FB472}"/>
-              </a:ext>
-            </a:extLst>
-          </p:cNvPr>
-          <p:cNvSpPr txBox="1"/>
-          <p:nvPr/>
-        </p:nvSpPr>
-        <p:spPr>
-          <a:xfrm>
-            <a:off x="1426541" y="3826403"/>
-            <a:ext cx="1451038" cy="246221"/>
-          </a:xfrm>
-          <a:prstGeom prst="rect">
-            <a:avLst/>
-          </a:prstGeom>
-          <a:noFill/>
-        </p:spPr>
-        <p:txBody>
-          <a:bodyPr wrap="none" rtlCol="0">
-            <a:spAutoFit/>
-          </a:bodyPr>
-          <a:lstStyle/>
-          <a:p>
-            <a:r>
-              <a:rPr lang="ru-RU" sz="1000" dirty="0">
-                <a:latin typeface="Arial" panose="020B0604020202020204" pitchFamily="34" charset="0"/>
-                <a:cs typeface="Arial" panose="020B0604020202020204" pitchFamily="34" charset="0"/>
-              </a:rPr>
-              <a:t>- транзакция принята</a:t>
-            </a:r>
-          </a:p>
-        </p:txBody>
-      </p:sp>
-      <p:sp>
-        <p:nvSpPr>
-          <p:cNvPr id="236" name="TextBox 235">
-            <a:extLst>
-              <a:ext uri="{FF2B5EF4-FFF2-40B4-BE49-F238E27FC236}">
-                <a16:creationId xmlns:a16="http://schemas.microsoft.com/office/drawing/2014/main" id="{EB70E003-0B26-59D4-A84A-CF2E148B9B45}"/>
-              </a:ext>
-            </a:extLst>
-          </p:cNvPr>
-          <p:cNvSpPr txBox="1"/>
-          <p:nvPr/>
-        </p:nvSpPr>
-        <p:spPr>
-          <a:xfrm>
-            <a:off x="3258920" y="3829438"/>
-            <a:ext cx="1620957" cy="246221"/>
-          </a:xfrm>
-          <a:prstGeom prst="rect">
-            <a:avLst/>
-          </a:prstGeom>
-          <a:noFill/>
-        </p:spPr>
-        <p:txBody>
-          <a:bodyPr wrap="none" rtlCol="0">
-            <a:spAutoFit/>
-          </a:bodyPr>
-          <a:lstStyle/>
-          <a:p>
-            <a:r>
-              <a:rPr lang="ru-RU" sz="1000" dirty="0">
-                <a:latin typeface="Arial" panose="020B0604020202020204" pitchFamily="34" charset="0"/>
-                <a:cs typeface="Arial" panose="020B0604020202020204" pitchFamily="34" charset="0"/>
-              </a:rPr>
-              <a:t>- транзакция отвергнута</a:t>
-            </a:r>
-          </a:p>
-        </p:txBody>
-      </p:sp>
-      <p:sp>
-        <p:nvSpPr>
-          <p:cNvPr id="237" name="TextBox 236">
-            <a:extLst>
-              <a:ext uri="{FF2B5EF4-FFF2-40B4-BE49-F238E27FC236}">
-                <a16:creationId xmlns:a16="http://schemas.microsoft.com/office/drawing/2014/main" id="{45CCF563-430D-04E0-25FB-5E65E45863B1}"/>
-              </a:ext>
-            </a:extLst>
-          </p:cNvPr>
-          <p:cNvSpPr txBox="1"/>
-          <p:nvPr/>
-        </p:nvSpPr>
-        <p:spPr>
-          <a:xfrm>
-            <a:off x="823272" y="1055328"/>
-            <a:ext cx="461986" cy="246221"/>
-          </a:xfrm>
-          <a:prstGeom prst="rect">
-            <a:avLst/>
-          </a:prstGeom>
-          <a:noFill/>
-        </p:spPr>
-        <p:txBody>
-          <a:bodyPr wrap="none" rtlCol="0">
-            <a:spAutoFit/>
-          </a:bodyPr>
-          <a:lstStyle/>
-          <a:p>
-            <a:r>
-              <a:rPr lang="en-US" sz="1000" dirty="0">
-                <a:latin typeface="Arial" panose="020B0604020202020204" pitchFamily="34" charset="0"/>
-                <a:cs typeface="Arial" panose="020B0604020202020204" pitchFamily="34" charset="0"/>
-              </a:rPr>
-              <a:t>DAG</a:t>
-            </a:r>
-            <a:endParaRPr lang="ru-RU" sz="1000" dirty="0">
-              <a:latin typeface="Arial" panose="020B0604020202020204" pitchFamily="34" charset="0"/>
-              <a:cs typeface="Arial" panose="020B0604020202020204" pitchFamily="34" charset="0"/>
-            </a:endParaRPr>
-          </a:p>
-        </p:txBody>
-      </p:sp>
-    </p:spTree>
-    <p:extLst>
-      <p:ext uri="{BB962C8B-B14F-4D97-AF65-F5344CB8AC3E}">
-        <p14:creationId xmlns:p14="http://schemas.microsoft.com/office/powerpoint/2010/main" val="3805061164"/>
-      </p:ext>
-    </p:extLst>
-  </p:cSld>
-  <p:clrMapOvr>
-    <a:masterClrMapping/>
-  </p:clrMapOvr>
-</p:sld>
-</file>
-
-<file path=ppt/slides/slide14.xml><?xml version="1.0" encoding="utf-8"?>
-<p:sld xmlns:a="http://schemas.openxmlformats.org/drawingml/2006/main" xmlns:r="http://schemas.openxmlformats.org/officeDocument/2006/relationships" xmlns:p="http://schemas.openxmlformats.org/presentationml/2006/main">
-  <p:cSld>
-    <p:spTree>
-      <p:nvGrpSpPr>
-        <p:cNvPr id="1" name=""/>
-        <p:cNvGrpSpPr/>
-        <p:nvPr/>
-      </p:nvGrpSpPr>
-      <p:grpSpPr>
-        <a:xfrm>
-          <a:off x="0" y="0"/>
-          <a:ext cx="0" cy="0"/>
-          <a:chOff x="0" y="0"/>
-          <a:chExt cx="0" cy="0"/>
-        </a:xfrm>
-      </p:grpSpPr>
-      <p:sp>
-        <p:nvSpPr>
-          <p:cNvPr id="4" name="TextBox 3">
-            <a:extLst>
-              <a:ext uri="{FF2B5EF4-FFF2-40B4-BE49-F238E27FC236}">
-                <a16:creationId xmlns:a16="http://schemas.microsoft.com/office/drawing/2014/main" id="{AB30D540-672D-9A70-A4F1-550AF1A5890A}"/>
-              </a:ext>
-            </a:extLst>
-          </p:cNvPr>
-          <p:cNvSpPr txBox="1"/>
-          <p:nvPr/>
-        </p:nvSpPr>
-        <p:spPr>
-          <a:xfrm>
-            <a:off x="1005504" y="423190"/>
-            <a:ext cx="6096000" cy="369332"/>
-          </a:xfrm>
-          <a:prstGeom prst="rect">
-            <a:avLst/>
-          </a:prstGeom>
-          <a:noFill/>
-        </p:spPr>
-        <p:txBody>
-          <a:bodyPr wrap="square">
-            <a:spAutoFit/>
-          </a:bodyPr>
-          <a:lstStyle/>
-          <a:p>
-            <a:r>
-              <a:rPr lang="ru-RU" sz="1800" b="1" dirty="0">
-                <a:solidFill>
-                  <a:srgbClr val="000000"/>
-                </a:solidFill>
-                <a:latin typeface="Arial"/>
-                <a:cs typeface="Arial"/>
-              </a:rPr>
-              <a:t>Архитектура эмулятора модели </a:t>
-            </a:r>
-            <a:r>
-              <a:rPr lang="en-US" sz="1800" b="1" dirty="0">
-                <a:solidFill>
-                  <a:srgbClr val="000000"/>
-                </a:solidFill>
-                <a:latin typeface="Arial"/>
-                <a:cs typeface="Arial"/>
-              </a:rPr>
-              <a:t>DAG-</a:t>
-            </a:r>
-            <a:r>
-              <a:rPr lang="ru-RU" sz="1800" b="1" dirty="0">
-                <a:solidFill>
-                  <a:srgbClr val="000000"/>
-                </a:solidFill>
-                <a:latin typeface="Arial"/>
-                <a:cs typeface="Arial"/>
-              </a:rPr>
-              <a:t>реестра</a:t>
-            </a:r>
-            <a:endParaRPr lang="ru-RU" sz="1800" dirty="0"/>
-          </a:p>
-        </p:txBody>
-      </p:sp>
-      <p:grpSp>
-        <p:nvGrpSpPr>
-          <p:cNvPr id="63" name="Группа 62">
-            <a:extLst>
-              <a:ext uri="{FF2B5EF4-FFF2-40B4-BE49-F238E27FC236}">
-                <a16:creationId xmlns:a16="http://schemas.microsoft.com/office/drawing/2014/main" id="{ADB90DAA-C08C-0C51-AEE1-CD3A5B495B9A}"/>
-              </a:ext>
-            </a:extLst>
-          </p:cNvPr>
-          <p:cNvGrpSpPr/>
-          <p:nvPr/>
-        </p:nvGrpSpPr>
-        <p:grpSpPr>
-          <a:xfrm>
-            <a:off x="1479331" y="1055753"/>
-            <a:ext cx="8507869" cy="4859452"/>
-            <a:chOff x="1447526" y="1127315"/>
-            <a:chExt cx="8507869" cy="4859452"/>
-          </a:xfrm>
-        </p:grpSpPr>
-        <p:grpSp>
-          <p:nvGrpSpPr>
-            <p:cNvPr id="14" name="Группа 13">
-              <a:extLst>
-                <a:ext uri="{FF2B5EF4-FFF2-40B4-BE49-F238E27FC236}">
-                  <a16:creationId xmlns:a16="http://schemas.microsoft.com/office/drawing/2014/main" id="{95A91599-A6E3-82B3-4692-B94D858526F3}"/>
-                </a:ext>
-              </a:extLst>
-            </p:cNvPr>
-            <p:cNvGrpSpPr/>
-            <p:nvPr/>
-          </p:nvGrpSpPr>
-          <p:grpSpPr>
-            <a:xfrm>
-              <a:off x="4405615" y="2838642"/>
-              <a:ext cx="2499798" cy="1376534"/>
-              <a:chOff x="4464823" y="2052466"/>
-              <a:chExt cx="2499798" cy="1376534"/>
-            </a:xfrm>
-          </p:grpSpPr>
-          <p:sp>
-            <p:nvSpPr>
-              <p:cNvPr id="5" name="Прямоугольник: скругленные углы 4">
-                <a:extLst>
-                  <a:ext uri="{FF2B5EF4-FFF2-40B4-BE49-F238E27FC236}">
-                    <a16:creationId xmlns:a16="http://schemas.microsoft.com/office/drawing/2014/main" id="{A85958C7-EAA5-A579-C502-9B4826F61D70}"/>
-                  </a:ext>
-                </a:extLst>
-              </p:cNvPr>
-              <p:cNvSpPr/>
-              <p:nvPr/>
-            </p:nvSpPr>
-            <p:spPr>
-              <a:xfrm>
-                <a:off x="4464823" y="2052466"/>
-                <a:ext cx="2499798" cy="1376534"/>
-              </a:xfrm>
-              <a:prstGeom prst="roundRect">
-                <a:avLst/>
-              </a:prstGeom>
-            </p:spPr>
-            <p:style>
-              <a:lnRef idx="1">
-                <a:schemeClr val="accent5"/>
-              </a:lnRef>
-              <a:fillRef idx="2">
-                <a:schemeClr val="accent5"/>
-              </a:fillRef>
-              <a:effectRef idx="1">
-                <a:schemeClr val="accent5"/>
-              </a:effectRef>
-              <a:fontRef idx="minor">
-                <a:schemeClr val="dk1"/>
-              </a:fontRef>
-            </p:style>
-            <p:txBody>
-              <a:bodyPr rtlCol="0" anchor="ctr"/>
-              <a:lstStyle/>
-              <a:p>
-                <a:pPr algn="ctr"/>
-                <a:endParaRPr lang="ru-RU" dirty="0"/>
-              </a:p>
-            </p:txBody>
-          </p:sp>
-          <p:grpSp>
-            <p:nvGrpSpPr>
-              <p:cNvPr id="13" name="Группа 12">
-                <a:extLst>
-                  <a:ext uri="{FF2B5EF4-FFF2-40B4-BE49-F238E27FC236}">
-                    <a16:creationId xmlns:a16="http://schemas.microsoft.com/office/drawing/2014/main" id="{6C09FFAC-FC01-6F4B-504C-B8B5529D6D2C}"/>
-                  </a:ext>
-                </a:extLst>
-              </p:cNvPr>
-              <p:cNvGrpSpPr/>
-              <p:nvPr/>
-            </p:nvGrpSpPr>
-            <p:grpSpPr>
-              <a:xfrm>
-                <a:off x="4529238" y="2052466"/>
-                <a:ext cx="2370968" cy="1256596"/>
-                <a:chOff x="4529238" y="2052466"/>
-                <a:chExt cx="2370968" cy="1256596"/>
-              </a:xfrm>
-            </p:grpSpPr>
-            <p:sp>
-              <p:nvSpPr>
-                <p:cNvPr id="6" name="TextBox 5">
-                  <a:extLst>
-                    <a:ext uri="{FF2B5EF4-FFF2-40B4-BE49-F238E27FC236}">
-                      <a16:creationId xmlns:a16="http://schemas.microsoft.com/office/drawing/2014/main" id="{E7721455-F2F9-B1C6-DC43-62515DF14E50}"/>
-                    </a:ext>
-                  </a:extLst>
-                </p:cNvPr>
-                <p:cNvSpPr txBox="1"/>
-                <p:nvPr/>
-              </p:nvSpPr>
-              <p:spPr>
-                <a:xfrm>
-                  <a:off x="5070314" y="2052466"/>
-                  <a:ext cx="1353897" cy="307777"/>
-                </a:xfrm>
-                <a:prstGeom prst="rect">
-                  <a:avLst/>
-                </a:prstGeom>
-                <a:noFill/>
-              </p:spPr>
-              <p:txBody>
-                <a:bodyPr wrap="none" rtlCol="0">
-                  <a:spAutoFit/>
-                </a:bodyPr>
-                <a:lstStyle/>
-                <a:p>
-                  <a:r>
-                    <a:rPr lang="ru-RU" sz="1400" b="1" dirty="0">
-                      <a:latin typeface="Arial" panose="020B0604020202020204" pitchFamily="34" charset="0"/>
-                      <a:cs typeface="Arial" panose="020B0604020202020204" pitchFamily="34" charset="0"/>
-                    </a:rPr>
-                    <a:t>Модуль ядра</a:t>
-                  </a:r>
-                </a:p>
-              </p:txBody>
-            </p:sp>
-            <p:grpSp>
-              <p:nvGrpSpPr>
-                <p:cNvPr id="12" name="Группа 11">
-                  <a:extLst>
-                    <a:ext uri="{FF2B5EF4-FFF2-40B4-BE49-F238E27FC236}">
-                      <a16:creationId xmlns:a16="http://schemas.microsoft.com/office/drawing/2014/main" id="{26684A7A-89B4-0C98-109B-BCD77D69EA1E}"/>
-                    </a:ext>
-                  </a:extLst>
-                </p:cNvPr>
-                <p:cNvGrpSpPr/>
-                <p:nvPr/>
-              </p:nvGrpSpPr>
-              <p:grpSpPr>
-                <a:xfrm>
-                  <a:off x="4529238" y="2360243"/>
-                  <a:ext cx="2370968" cy="948819"/>
-                  <a:chOff x="4529238" y="2360243"/>
-                  <a:chExt cx="2370968" cy="948819"/>
-                </a:xfrm>
-              </p:grpSpPr>
-              <p:sp>
-                <p:nvSpPr>
-                  <p:cNvPr id="7" name="Прямоугольник: скругленные углы 6">
-                    <a:extLst>
-                      <a:ext uri="{FF2B5EF4-FFF2-40B4-BE49-F238E27FC236}">
-                        <a16:creationId xmlns:a16="http://schemas.microsoft.com/office/drawing/2014/main" id="{0C26C769-7AF8-0B92-734E-113380DDC17D}"/>
-                      </a:ext>
-                    </a:extLst>
-                  </p:cNvPr>
-                  <p:cNvSpPr/>
-                  <p:nvPr/>
-                </p:nvSpPr>
-                <p:spPr>
-                  <a:xfrm>
-                    <a:off x="4529238" y="2412870"/>
-                    <a:ext cx="1111753" cy="388127"/>
-                  </a:xfrm>
-                  <a:prstGeom prst="roundRect">
-                    <a:avLst/>
-                  </a:prstGeom>
-                </p:spPr>
-                <p:style>
-                  <a:lnRef idx="2">
-                    <a:schemeClr val="accent6"/>
-                  </a:lnRef>
-                  <a:fillRef idx="1">
-                    <a:schemeClr val="lt1"/>
-                  </a:fillRef>
-                  <a:effectRef idx="0">
-                    <a:schemeClr val="accent6"/>
-                  </a:effectRef>
-                  <a:fontRef idx="minor">
-                    <a:schemeClr val="dk1"/>
-                  </a:fontRef>
-                </p:style>
-                <p:txBody>
-                  <a:bodyPr rtlCol="0" anchor="ctr"/>
-                  <a:lstStyle/>
-                  <a:p>
-                    <a:pPr algn="ctr"/>
-                    <a:r>
-                      <a:rPr lang="en-US" sz="1000" dirty="0">
-                        <a:latin typeface="Arial" panose="020B0604020202020204" pitchFamily="34" charset="0"/>
-                        <a:cs typeface="Arial" panose="020B0604020202020204" pitchFamily="34" charset="0"/>
-                      </a:rPr>
-                      <a:t>DAG-</a:t>
-                    </a:r>
-                    <a:r>
-                      <a:rPr lang="ru-RU" sz="1000" dirty="0">
-                        <a:latin typeface="Arial" panose="020B0604020202020204" pitchFamily="34" charset="0"/>
-                        <a:cs typeface="Arial" panose="020B0604020202020204" pitchFamily="34" charset="0"/>
-                      </a:rPr>
-                      <a:t>граф</a:t>
-                    </a:r>
-                  </a:p>
-                </p:txBody>
-              </p:sp>
-              <p:grpSp>
-                <p:nvGrpSpPr>
-                  <p:cNvPr id="11" name="Группа 10">
-                    <a:extLst>
-                      <a:ext uri="{FF2B5EF4-FFF2-40B4-BE49-F238E27FC236}">
-                        <a16:creationId xmlns:a16="http://schemas.microsoft.com/office/drawing/2014/main" id="{C87F54B7-14F6-1A5A-B12A-E248E02664B4}"/>
-                      </a:ext>
-                    </a:extLst>
-                  </p:cNvPr>
-                  <p:cNvGrpSpPr/>
-                  <p:nvPr/>
-                </p:nvGrpSpPr>
-                <p:grpSpPr>
-                  <a:xfrm>
-                    <a:off x="5120613" y="2360243"/>
-                    <a:ext cx="1779593" cy="948819"/>
-                    <a:chOff x="5120613" y="2360243"/>
-                    <a:chExt cx="1779593" cy="948819"/>
-                  </a:xfrm>
-                </p:grpSpPr>
-                <p:sp>
-                  <p:nvSpPr>
-                    <p:cNvPr id="8" name="Прямоугольник: скругленные углы 7">
-                      <a:extLst>
-                        <a:ext uri="{FF2B5EF4-FFF2-40B4-BE49-F238E27FC236}">
-                          <a16:creationId xmlns:a16="http://schemas.microsoft.com/office/drawing/2014/main" id="{307500E1-98DC-0745-D0A0-8D400F8BD671}"/>
-                        </a:ext>
-                      </a:extLst>
-                    </p:cNvPr>
-                    <p:cNvSpPr/>
-                    <p:nvPr/>
-                  </p:nvSpPr>
-                  <p:spPr>
-                    <a:xfrm>
-                      <a:off x="5763173" y="2360243"/>
-                      <a:ext cx="1137033" cy="498553"/>
-                    </a:xfrm>
-                    <a:prstGeom prst="roundRect">
-                      <a:avLst/>
-                    </a:prstGeom>
-                  </p:spPr>
-                  <p:style>
-                    <a:lnRef idx="2">
-                      <a:schemeClr val="accent6"/>
-                    </a:lnRef>
-                    <a:fillRef idx="1">
-                      <a:schemeClr val="lt1"/>
-                    </a:fillRef>
-                    <a:effectRef idx="0">
-                      <a:schemeClr val="accent6"/>
-                    </a:effectRef>
-                    <a:fontRef idx="minor">
-                      <a:schemeClr val="dk1"/>
-                    </a:fontRef>
-                  </p:style>
-                  <p:txBody>
-                    <a:bodyPr rtlCol="0" anchor="ctr"/>
-                    <a:lstStyle/>
-                    <a:p>
-                      <a:pPr algn="ctr"/>
-                      <a:r>
-                        <a:rPr lang="ru-RU" sz="1000" dirty="0">
-                          <a:latin typeface="Arial" panose="020B0604020202020204" pitchFamily="34" charset="0"/>
-                          <a:cs typeface="Arial" panose="020B0604020202020204" pitchFamily="34" charset="0"/>
-                        </a:rPr>
-                        <a:t>Частота создания транзакций</a:t>
-                      </a:r>
-                    </a:p>
-                  </p:txBody>
-                </p:sp>
-                <p:sp>
-                  <p:nvSpPr>
-                    <p:cNvPr id="10" name="Прямоугольник: скругленные углы 9">
-                      <a:extLst>
-                        <a:ext uri="{FF2B5EF4-FFF2-40B4-BE49-F238E27FC236}">
-                          <a16:creationId xmlns:a16="http://schemas.microsoft.com/office/drawing/2014/main" id="{395F1D26-338A-B33C-5EA1-0FE3D6D37060}"/>
-                        </a:ext>
-                      </a:extLst>
-                    </p:cNvPr>
-                    <p:cNvSpPr/>
-                    <p:nvPr/>
-                  </p:nvSpPr>
-                  <p:spPr>
-                    <a:xfrm>
-                      <a:off x="5120613" y="2920935"/>
-                      <a:ext cx="1111753" cy="388127"/>
-                    </a:xfrm>
-                    <a:prstGeom prst="roundRect">
-                      <a:avLst/>
-                    </a:prstGeom>
-                  </p:spPr>
-                  <p:style>
-                    <a:lnRef idx="2">
-                      <a:schemeClr val="accent6"/>
-                    </a:lnRef>
-                    <a:fillRef idx="1">
-                      <a:schemeClr val="lt1"/>
-                    </a:fillRef>
-                    <a:effectRef idx="0">
-                      <a:schemeClr val="accent6"/>
-                    </a:effectRef>
-                    <a:fontRef idx="minor">
-                      <a:schemeClr val="dk1"/>
-                    </a:fontRef>
-                  </p:style>
-                  <p:txBody>
-                    <a:bodyPr rtlCol="0" anchor="ctr"/>
-                    <a:lstStyle/>
-                    <a:p>
-                      <a:pPr algn="ctr"/>
-                      <a:r>
-                        <a:rPr lang="ru-RU" sz="1000" dirty="0">
-                          <a:latin typeface="Arial" panose="020B0604020202020204" pitchFamily="34" charset="0"/>
-                          <a:cs typeface="Arial" panose="020B0604020202020204" pitchFamily="34" charset="0"/>
-                        </a:rPr>
-                        <a:t>Длительность слота</a:t>
-                      </a:r>
-                    </a:p>
-                  </p:txBody>
-                </p:sp>
-              </p:grpSp>
-            </p:grpSp>
-          </p:grpSp>
-        </p:grpSp>
-        <p:grpSp>
-          <p:nvGrpSpPr>
-            <p:cNvPr id="15" name="Группа 14">
-              <a:extLst>
-                <a:ext uri="{FF2B5EF4-FFF2-40B4-BE49-F238E27FC236}">
-                  <a16:creationId xmlns:a16="http://schemas.microsoft.com/office/drawing/2014/main" id="{77BF1500-B152-451E-D8E8-BAA9E63C1010}"/>
-                </a:ext>
-              </a:extLst>
-            </p:cNvPr>
-            <p:cNvGrpSpPr/>
-            <p:nvPr/>
-          </p:nvGrpSpPr>
-          <p:grpSpPr>
-            <a:xfrm>
-              <a:off x="4438155" y="1127315"/>
-              <a:ext cx="2499798" cy="1376534"/>
-              <a:chOff x="4464823" y="2052466"/>
-              <a:chExt cx="2499798" cy="1376534"/>
-            </a:xfrm>
-          </p:grpSpPr>
-          <p:sp>
-            <p:nvSpPr>
-              <p:cNvPr id="16" name="Прямоугольник: скругленные углы 15">
-                <a:extLst>
-                  <a:ext uri="{FF2B5EF4-FFF2-40B4-BE49-F238E27FC236}">
-                    <a16:creationId xmlns:a16="http://schemas.microsoft.com/office/drawing/2014/main" id="{637AEBC2-812D-51D3-26B1-2ADBD1847FA6}"/>
-                  </a:ext>
-                </a:extLst>
-              </p:cNvPr>
-              <p:cNvSpPr/>
-              <p:nvPr/>
-            </p:nvSpPr>
-            <p:spPr>
-              <a:xfrm>
-                <a:off x="4464823" y="2052466"/>
-                <a:ext cx="2499798" cy="1376534"/>
-              </a:xfrm>
-              <a:prstGeom prst="roundRect">
-                <a:avLst/>
-              </a:prstGeom>
-            </p:spPr>
-            <p:style>
-              <a:lnRef idx="1">
-                <a:schemeClr val="accent5"/>
-              </a:lnRef>
-              <a:fillRef idx="2">
-                <a:schemeClr val="accent5"/>
-              </a:fillRef>
-              <a:effectRef idx="1">
-                <a:schemeClr val="accent5"/>
-              </a:effectRef>
-              <a:fontRef idx="minor">
-                <a:schemeClr val="dk1"/>
-              </a:fontRef>
-            </p:style>
-            <p:txBody>
-              <a:bodyPr rtlCol="0" anchor="ctr"/>
-              <a:lstStyle/>
-              <a:p>
-                <a:pPr algn="ctr"/>
-                <a:endParaRPr lang="ru-RU" dirty="0"/>
-              </a:p>
-            </p:txBody>
-          </p:sp>
-          <p:grpSp>
-            <p:nvGrpSpPr>
-              <p:cNvPr id="17" name="Группа 16">
-                <a:extLst>
-                  <a:ext uri="{FF2B5EF4-FFF2-40B4-BE49-F238E27FC236}">
-                    <a16:creationId xmlns:a16="http://schemas.microsoft.com/office/drawing/2014/main" id="{A3446B14-4227-D656-9421-05F30B4F6A55}"/>
-                  </a:ext>
-                </a:extLst>
-              </p:cNvPr>
-              <p:cNvGrpSpPr/>
-              <p:nvPr/>
-            </p:nvGrpSpPr>
-            <p:grpSpPr>
-              <a:xfrm>
-                <a:off x="4529238" y="2078780"/>
-                <a:ext cx="2322184" cy="1269752"/>
-                <a:chOff x="4529238" y="2078780"/>
-                <a:chExt cx="2322184" cy="1269752"/>
-              </a:xfrm>
-            </p:grpSpPr>
-            <p:sp>
-              <p:nvSpPr>
-                <p:cNvPr id="18" name="TextBox 17">
-                  <a:extLst>
-                    <a:ext uri="{FF2B5EF4-FFF2-40B4-BE49-F238E27FC236}">
-                      <a16:creationId xmlns:a16="http://schemas.microsoft.com/office/drawing/2014/main" id="{D0F42EE1-C870-062C-825C-7CC313A77D6B}"/>
-                    </a:ext>
-                  </a:extLst>
-                </p:cNvPr>
-                <p:cNvSpPr txBox="1"/>
-                <p:nvPr/>
-              </p:nvSpPr>
-              <p:spPr>
-                <a:xfrm>
-                  <a:off x="4860257" y="2078780"/>
-                  <a:ext cx="1708929" cy="307777"/>
-                </a:xfrm>
-                <a:prstGeom prst="rect">
-                  <a:avLst/>
-                </a:prstGeom>
-                <a:noFill/>
-              </p:spPr>
-              <p:txBody>
-                <a:bodyPr wrap="none" rtlCol="0">
-                  <a:spAutoFit/>
-                </a:bodyPr>
-                <a:lstStyle/>
-                <a:p>
-                  <a:r>
-                    <a:rPr lang="ru-RU" sz="1400" b="1" dirty="0">
-                      <a:latin typeface="Arial" panose="020B0604020202020204" pitchFamily="34" charset="0"/>
-                      <a:cs typeface="Arial" panose="020B0604020202020204" pitchFamily="34" charset="0"/>
-                    </a:rPr>
-                    <a:t>Модуль </a:t>
-                  </a:r>
-                  <a:r>
-                    <a:rPr lang="en-US" sz="1400" b="1" dirty="0">
-                      <a:latin typeface="Arial" panose="020B0604020202020204" pitchFamily="34" charset="0"/>
-                      <a:cs typeface="Arial" panose="020B0604020202020204" pitchFamily="34" charset="0"/>
-                    </a:rPr>
-                    <a:t>P2P </a:t>
-                  </a:r>
-                  <a:r>
-                    <a:rPr lang="ru-RU" sz="1400" b="1" dirty="0">
-                      <a:latin typeface="Arial" panose="020B0604020202020204" pitchFamily="34" charset="0"/>
-                      <a:cs typeface="Arial" panose="020B0604020202020204" pitchFamily="34" charset="0"/>
-                    </a:rPr>
-                    <a:t>сети</a:t>
-                  </a:r>
-                </a:p>
-              </p:txBody>
-            </p:sp>
-            <p:grpSp>
-              <p:nvGrpSpPr>
-                <p:cNvPr id="19" name="Группа 18">
-                  <a:extLst>
-                    <a:ext uri="{FF2B5EF4-FFF2-40B4-BE49-F238E27FC236}">
-                      <a16:creationId xmlns:a16="http://schemas.microsoft.com/office/drawing/2014/main" id="{88D743FC-B9B9-8537-1002-4B66403E8A7C}"/>
-                    </a:ext>
-                  </a:extLst>
-                </p:cNvPr>
-                <p:cNvGrpSpPr/>
-                <p:nvPr/>
-              </p:nvGrpSpPr>
-              <p:grpSpPr>
-                <a:xfrm>
-                  <a:off x="4529238" y="2412870"/>
-                  <a:ext cx="2322184" cy="935662"/>
-                  <a:chOff x="4529238" y="2412870"/>
-                  <a:chExt cx="2322184" cy="935662"/>
-                </a:xfrm>
-              </p:grpSpPr>
-              <p:sp>
-                <p:nvSpPr>
-                  <p:cNvPr id="20" name="Прямоугольник: скругленные углы 19">
-                    <a:extLst>
-                      <a:ext uri="{FF2B5EF4-FFF2-40B4-BE49-F238E27FC236}">
-                        <a16:creationId xmlns:a16="http://schemas.microsoft.com/office/drawing/2014/main" id="{5CF23C40-58B2-3130-4687-90D2221A3E15}"/>
-                      </a:ext>
-                    </a:extLst>
-                  </p:cNvPr>
-                  <p:cNvSpPr/>
-                  <p:nvPr/>
-                </p:nvSpPr>
-                <p:spPr>
-                  <a:xfrm>
-                    <a:off x="4529238" y="2412870"/>
-                    <a:ext cx="1111753" cy="388127"/>
-                  </a:xfrm>
-                  <a:prstGeom prst="roundRect">
-                    <a:avLst/>
-                  </a:prstGeom>
-                </p:spPr>
-                <p:style>
-                  <a:lnRef idx="2">
-                    <a:schemeClr val="accent6"/>
-                  </a:lnRef>
-                  <a:fillRef idx="1">
-                    <a:schemeClr val="lt1"/>
-                  </a:fillRef>
-                  <a:effectRef idx="0">
-                    <a:schemeClr val="accent6"/>
-                  </a:effectRef>
-                  <a:fontRef idx="minor">
-                    <a:schemeClr val="dk1"/>
-                  </a:fontRef>
-                </p:style>
-                <p:txBody>
-                  <a:bodyPr rtlCol="0" anchor="ctr"/>
-                  <a:lstStyle/>
-                  <a:p>
-                    <a:pPr algn="ctr"/>
-                    <a:r>
-                      <a:rPr lang="ru-RU" sz="1000" dirty="0">
-                        <a:latin typeface="Arial" panose="020B0604020202020204" pitchFamily="34" charset="0"/>
-                        <a:cs typeface="Arial" panose="020B0604020202020204" pitchFamily="34" charset="0"/>
-                      </a:rPr>
-                      <a:t>Число узлов</a:t>
-                    </a:r>
-                  </a:p>
-                </p:txBody>
-              </p:sp>
-              <p:grpSp>
-                <p:nvGrpSpPr>
-                  <p:cNvPr id="21" name="Группа 20">
-                    <a:extLst>
-                      <a:ext uri="{FF2B5EF4-FFF2-40B4-BE49-F238E27FC236}">
-                        <a16:creationId xmlns:a16="http://schemas.microsoft.com/office/drawing/2014/main" id="{5E0D7EB2-C9A6-9A11-8759-6CF5D8CE765D}"/>
-                      </a:ext>
-                    </a:extLst>
-                  </p:cNvPr>
-                  <p:cNvGrpSpPr/>
-                  <p:nvPr/>
-                </p:nvGrpSpPr>
-                <p:grpSpPr>
-                  <a:xfrm>
-                    <a:off x="5049616" y="2412870"/>
-                    <a:ext cx="1801806" cy="935662"/>
-                    <a:chOff x="5049616" y="2412870"/>
-                    <a:chExt cx="1801806" cy="935662"/>
-                  </a:xfrm>
-                </p:grpSpPr>
-                <p:sp>
-                  <p:nvSpPr>
-                    <p:cNvPr id="22" name="Прямоугольник: скругленные углы 21">
-                      <a:extLst>
-                        <a:ext uri="{FF2B5EF4-FFF2-40B4-BE49-F238E27FC236}">
-                          <a16:creationId xmlns:a16="http://schemas.microsoft.com/office/drawing/2014/main" id="{D1591D6E-4C8D-EC0F-ACAD-9A0F104EBCBD}"/>
-                        </a:ext>
-                      </a:extLst>
-                    </p:cNvPr>
-                    <p:cNvSpPr/>
-                    <p:nvPr/>
-                  </p:nvSpPr>
-                  <p:spPr>
-                    <a:xfrm>
-                      <a:off x="5789007" y="2412870"/>
-                      <a:ext cx="1062415" cy="388127"/>
-                    </a:xfrm>
-                    <a:prstGeom prst="roundRect">
-                      <a:avLst/>
-                    </a:prstGeom>
-                  </p:spPr>
-                  <p:style>
-                    <a:lnRef idx="2">
-                      <a:schemeClr val="accent6"/>
-                    </a:lnRef>
-                    <a:fillRef idx="1">
-                      <a:schemeClr val="lt1"/>
-                    </a:fillRef>
-                    <a:effectRef idx="0">
-                      <a:schemeClr val="accent6"/>
-                    </a:effectRef>
-                    <a:fontRef idx="minor">
-                      <a:schemeClr val="dk1"/>
-                    </a:fontRef>
-                  </p:style>
-                  <p:txBody>
-                    <a:bodyPr rtlCol="0" anchor="ctr"/>
-                    <a:lstStyle/>
-                    <a:p>
-                      <a:pPr algn="ctr"/>
-                      <a:r>
-                        <a:rPr lang="ru-RU" sz="1000" dirty="0">
-                          <a:latin typeface="Arial" panose="020B0604020202020204" pitchFamily="34" charset="0"/>
-                          <a:cs typeface="Arial" panose="020B0604020202020204" pitchFamily="34" charset="0"/>
-                        </a:rPr>
-                        <a:t>Сетевые задержки </a:t>
-                      </a:r>
-                    </a:p>
-                  </p:txBody>
-                </p:sp>
-                <p:sp>
-                  <p:nvSpPr>
-                    <p:cNvPr id="23" name="Прямоугольник: скругленные углы 22">
-                      <a:extLst>
-                        <a:ext uri="{FF2B5EF4-FFF2-40B4-BE49-F238E27FC236}">
-                          <a16:creationId xmlns:a16="http://schemas.microsoft.com/office/drawing/2014/main" id="{90F882C7-7115-8B1E-233A-296287BB9EAB}"/>
-                        </a:ext>
-                      </a:extLst>
-                    </p:cNvPr>
-                    <p:cNvSpPr/>
-                    <p:nvPr/>
-                  </p:nvSpPr>
-                  <p:spPr>
-                    <a:xfrm>
-                      <a:off x="5049616" y="2907778"/>
-                      <a:ext cx="1182749" cy="440754"/>
-                    </a:xfrm>
-                    <a:prstGeom prst="roundRect">
-                      <a:avLst/>
-                    </a:prstGeom>
-                  </p:spPr>
-                  <p:style>
-                    <a:lnRef idx="2">
-                      <a:schemeClr val="accent6"/>
-                    </a:lnRef>
-                    <a:fillRef idx="1">
-                      <a:schemeClr val="lt1"/>
-                    </a:fillRef>
-                    <a:effectRef idx="0">
-                      <a:schemeClr val="accent6"/>
-                    </a:effectRef>
-                    <a:fontRef idx="minor">
-                      <a:schemeClr val="dk1"/>
-                    </a:fontRef>
-                  </p:style>
-                  <p:txBody>
-                    <a:bodyPr rtlCol="0" anchor="ctr"/>
-                    <a:lstStyle/>
-                    <a:p>
-                      <a:pPr algn="ctr"/>
-                      <a:r>
-                        <a:rPr lang="ru-RU" sz="1000" dirty="0">
-                          <a:latin typeface="Arial" panose="020B0604020202020204" pitchFamily="34" charset="0"/>
-                          <a:cs typeface="Arial" panose="020B0604020202020204" pitchFamily="34" charset="0"/>
-                        </a:rPr>
-                        <a:t>Пропускная способность канала</a:t>
-                      </a:r>
-                    </a:p>
-                  </p:txBody>
-                </p:sp>
-              </p:grpSp>
-            </p:grpSp>
-          </p:grpSp>
-        </p:grpSp>
-        <p:grpSp>
-          <p:nvGrpSpPr>
-            <p:cNvPr id="24" name="Группа 23">
-              <a:extLst>
-                <a:ext uri="{FF2B5EF4-FFF2-40B4-BE49-F238E27FC236}">
-                  <a16:creationId xmlns:a16="http://schemas.microsoft.com/office/drawing/2014/main" id="{EB8C358F-BAE9-AFAD-9D8D-0591E817995D}"/>
-                </a:ext>
-              </a:extLst>
-            </p:cNvPr>
-            <p:cNvGrpSpPr/>
-            <p:nvPr/>
-          </p:nvGrpSpPr>
-          <p:grpSpPr>
-            <a:xfrm>
-              <a:off x="1447526" y="2838642"/>
-              <a:ext cx="2499798" cy="1376534"/>
-              <a:chOff x="4464823" y="2052466"/>
-              <a:chExt cx="2499798" cy="1376534"/>
-            </a:xfrm>
-          </p:grpSpPr>
-          <p:sp>
-            <p:nvSpPr>
-              <p:cNvPr id="25" name="Прямоугольник: скругленные углы 24">
-                <a:extLst>
-                  <a:ext uri="{FF2B5EF4-FFF2-40B4-BE49-F238E27FC236}">
-                    <a16:creationId xmlns:a16="http://schemas.microsoft.com/office/drawing/2014/main" id="{F0FCAFCC-BAE9-DD81-15E5-385EEFC8441A}"/>
-                  </a:ext>
-                </a:extLst>
-              </p:cNvPr>
-              <p:cNvSpPr/>
-              <p:nvPr/>
-            </p:nvSpPr>
-            <p:spPr>
-              <a:xfrm>
-                <a:off x="4464823" y="2052466"/>
-                <a:ext cx="2499798" cy="1376534"/>
-              </a:xfrm>
-              <a:prstGeom prst="roundRect">
-                <a:avLst/>
-              </a:prstGeom>
-            </p:spPr>
-            <p:style>
-              <a:lnRef idx="1">
-                <a:schemeClr val="accent5"/>
-              </a:lnRef>
-              <a:fillRef idx="2">
-                <a:schemeClr val="accent5"/>
-              </a:fillRef>
-              <a:effectRef idx="1">
-                <a:schemeClr val="accent5"/>
-              </a:effectRef>
-              <a:fontRef idx="minor">
-                <a:schemeClr val="dk1"/>
-              </a:fontRef>
-            </p:style>
-            <p:txBody>
-              <a:bodyPr rtlCol="0" anchor="ctr"/>
-              <a:lstStyle/>
-              <a:p>
-                <a:pPr algn="ctr"/>
-                <a:endParaRPr lang="ru-RU" dirty="0"/>
-              </a:p>
-            </p:txBody>
-          </p:sp>
-          <p:grpSp>
-            <p:nvGrpSpPr>
-              <p:cNvPr id="26" name="Группа 25">
-                <a:extLst>
-                  <a:ext uri="{FF2B5EF4-FFF2-40B4-BE49-F238E27FC236}">
-                    <a16:creationId xmlns:a16="http://schemas.microsoft.com/office/drawing/2014/main" id="{DF311E24-54B4-EF93-C7E6-D74D66EFDB92}"/>
-                  </a:ext>
-                </a:extLst>
-              </p:cNvPr>
-              <p:cNvGrpSpPr/>
-              <p:nvPr/>
-            </p:nvGrpSpPr>
-            <p:grpSpPr>
-              <a:xfrm>
-                <a:off x="4969850" y="2061804"/>
-                <a:ext cx="1382931" cy="1336596"/>
-                <a:chOff x="4969850" y="2061804"/>
-                <a:chExt cx="1382931" cy="1336596"/>
-              </a:xfrm>
-            </p:grpSpPr>
-            <p:sp>
-              <p:nvSpPr>
-                <p:cNvPr id="27" name="TextBox 26">
-                  <a:extLst>
-                    <a:ext uri="{FF2B5EF4-FFF2-40B4-BE49-F238E27FC236}">
-                      <a16:creationId xmlns:a16="http://schemas.microsoft.com/office/drawing/2014/main" id="{90A835C4-EFCC-160C-4463-8D1E43E16123}"/>
-                    </a:ext>
-                  </a:extLst>
-                </p:cNvPr>
-                <p:cNvSpPr txBox="1"/>
-                <p:nvPr/>
-              </p:nvSpPr>
-              <p:spPr>
-                <a:xfrm>
-                  <a:off x="5048578" y="2061804"/>
-                  <a:ext cx="1304203" cy="307777"/>
-                </a:xfrm>
-                <a:prstGeom prst="rect">
-                  <a:avLst/>
-                </a:prstGeom>
-                <a:noFill/>
-              </p:spPr>
-              <p:txBody>
-                <a:bodyPr wrap="none" rtlCol="0">
-                  <a:spAutoFit/>
-                </a:bodyPr>
-                <a:lstStyle/>
-                <a:p>
-                  <a:r>
-                    <a:rPr lang="ru-RU" sz="1400" b="1" dirty="0">
-                      <a:latin typeface="Arial" panose="020B0604020202020204" pitchFamily="34" charset="0"/>
-                      <a:cs typeface="Arial" panose="020B0604020202020204" pitchFamily="34" charset="0"/>
-                    </a:rPr>
-                    <a:t>Модуль атак</a:t>
-                  </a:r>
-                </a:p>
-              </p:txBody>
-            </p:sp>
-            <p:grpSp>
-              <p:nvGrpSpPr>
-                <p:cNvPr id="28" name="Группа 27">
-                  <a:extLst>
-                    <a:ext uri="{FF2B5EF4-FFF2-40B4-BE49-F238E27FC236}">
-                      <a16:creationId xmlns:a16="http://schemas.microsoft.com/office/drawing/2014/main" id="{921CAB2B-6E48-0C4D-3C24-3D77F303F865}"/>
-                    </a:ext>
-                  </a:extLst>
-                </p:cNvPr>
-                <p:cNvGrpSpPr/>
-                <p:nvPr/>
-              </p:nvGrpSpPr>
-              <p:grpSpPr>
-                <a:xfrm>
-                  <a:off x="4969850" y="2386556"/>
-                  <a:ext cx="1342279" cy="1011844"/>
-                  <a:chOff x="4969850" y="2386556"/>
-                  <a:chExt cx="1342279" cy="1011844"/>
-                </a:xfrm>
-              </p:grpSpPr>
-              <p:sp>
-                <p:nvSpPr>
-                  <p:cNvPr id="29" name="Прямоугольник: скругленные углы 28">
-                    <a:extLst>
-                      <a:ext uri="{FF2B5EF4-FFF2-40B4-BE49-F238E27FC236}">
-                        <a16:creationId xmlns:a16="http://schemas.microsoft.com/office/drawing/2014/main" id="{65E744A9-A6C2-5D95-65E0-BE10A2030A1A}"/>
-                      </a:ext>
-                    </a:extLst>
-                  </p:cNvPr>
-                  <p:cNvSpPr/>
-                  <p:nvPr/>
-                </p:nvSpPr>
-                <p:spPr>
-                  <a:xfrm>
-                    <a:off x="4969850" y="2386556"/>
-                    <a:ext cx="1342279" cy="440754"/>
-                  </a:xfrm>
-                  <a:prstGeom prst="roundRect">
-                    <a:avLst/>
-                  </a:prstGeom>
-                </p:spPr>
-                <p:style>
-                  <a:lnRef idx="2">
-                    <a:schemeClr val="accent6"/>
-                  </a:lnRef>
-                  <a:fillRef idx="1">
-                    <a:schemeClr val="lt1"/>
-                  </a:fillRef>
-                  <a:effectRef idx="0">
-                    <a:schemeClr val="accent6"/>
-                  </a:effectRef>
-                  <a:fontRef idx="minor">
-                    <a:schemeClr val="dk1"/>
-                  </a:fontRef>
-                </p:style>
-                <p:txBody>
-                  <a:bodyPr rtlCol="0" anchor="ctr"/>
-                  <a:lstStyle/>
-                  <a:p>
-                    <a:pPr algn="ctr"/>
-                    <a:r>
-                      <a:rPr lang="ru-RU" sz="1000" dirty="0">
-                        <a:latin typeface="Arial" panose="020B0604020202020204" pitchFamily="34" charset="0"/>
-                        <a:cs typeface="Arial" panose="020B0604020202020204" pitchFamily="34" charset="0"/>
-                      </a:rPr>
-                      <a:t>Число злоумышленников</a:t>
-                    </a:r>
-                  </a:p>
-                </p:txBody>
-              </p:sp>
-              <p:sp>
-                <p:nvSpPr>
-                  <p:cNvPr id="32" name="Прямоугольник: скругленные углы 31">
-                    <a:extLst>
-                      <a:ext uri="{FF2B5EF4-FFF2-40B4-BE49-F238E27FC236}">
-                        <a16:creationId xmlns:a16="http://schemas.microsoft.com/office/drawing/2014/main" id="{AB974295-3E6F-05B3-AB94-BC08FE2185AA}"/>
-                      </a:ext>
-                    </a:extLst>
-                  </p:cNvPr>
-                  <p:cNvSpPr/>
-                  <p:nvPr/>
-                </p:nvSpPr>
-                <p:spPr>
-                  <a:xfrm>
-                    <a:off x="5009732" y="2907778"/>
-                    <a:ext cx="1262513" cy="490622"/>
-                  </a:xfrm>
-                  <a:prstGeom prst="roundRect">
-                    <a:avLst/>
-                  </a:prstGeom>
-                </p:spPr>
-                <p:style>
-                  <a:lnRef idx="2">
-                    <a:schemeClr val="accent6"/>
-                  </a:lnRef>
-                  <a:fillRef idx="1">
-                    <a:schemeClr val="lt1"/>
-                  </a:fillRef>
-                  <a:effectRef idx="0">
-                    <a:schemeClr val="accent6"/>
-                  </a:effectRef>
-                  <a:fontRef idx="minor">
-                    <a:schemeClr val="dk1"/>
-                  </a:fontRef>
-                </p:style>
-                <p:txBody>
-                  <a:bodyPr rtlCol="0" anchor="ctr"/>
-                  <a:lstStyle/>
-                  <a:p>
-                    <a:pPr algn="ctr"/>
-                    <a:r>
-                      <a:rPr lang="ru-RU" sz="1000" dirty="0">
-                        <a:latin typeface="Arial" panose="020B0604020202020204" pitchFamily="34" charset="0"/>
-                        <a:cs typeface="Arial" panose="020B0604020202020204" pitchFamily="34" charset="0"/>
-                      </a:rPr>
-                      <a:t>Количество конфликтов за слот</a:t>
-                    </a:r>
-                  </a:p>
-                </p:txBody>
-              </p:sp>
-            </p:grpSp>
-          </p:grpSp>
-        </p:grpSp>
-        <p:grpSp>
-          <p:nvGrpSpPr>
-            <p:cNvPr id="33" name="Группа 32">
-              <a:extLst>
-                <a:ext uri="{FF2B5EF4-FFF2-40B4-BE49-F238E27FC236}">
-                  <a16:creationId xmlns:a16="http://schemas.microsoft.com/office/drawing/2014/main" id="{5422DAA9-A9B7-8638-CBB1-134AC8A063E6}"/>
-                </a:ext>
-              </a:extLst>
-            </p:cNvPr>
-            <p:cNvGrpSpPr/>
-            <p:nvPr/>
-          </p:nvGrpSpPr>
-          <p:grpSpPr>
-            <a:xfrm>
-              <a:off x="7455597" y="2806898"/>
-              <a:ext cx="2499798" cy="1408278"/>
-              <a:chOff x="4464823" y="2020722"/>
-              <a:chExt cx="2499798" cy="1408278"/>
-            </a:xfrm>
-          </p:grpSpPr>
-          <p:sp>
-            <p:nvSpPr>
-              <p:cNvPr id="34" name="Прямоугольник: скругленные углы 33">
-                <a:extLst>
-                  <a:ext uri="{FF2B5EF4-FFF2-40B4-BE49-F238E27FC236}">
-                    <a16:creationId xmlns:a16="http://schemas.microsoft.com/office/drawing/2014/main" id="{DB0AFAA3-641A-56B0-AA4E-CEC21B080D69}"/>
-                  </a:ext>
-                </a:extLst>
-              </p:cNvPr>
-              <p:cNvSpPr/>
-              <p:nvPr/>
-            </p:nvSpPr>
-            <p:spPr>
-              <a:xfrm>
-                <a:off x="4464823" y="2052466"/>
-                <a:ext cx="2499798" cy="1376534"/>
-              </a:xfrm>
-              <a:prstGeom prst="roundRect">
-                <a:avLst/>
-              </a:prstGeom>
-            </p:spPr>
-            <p:style>
-              <a:lnRef idx="1">
-                <a:schemeClr val="accent5"/>
-              </a:lnRef>
-              <a:fillRef idx="2">
-                <a:schemeClr val="accent5"/>
-              </a:fillRef>
-              <a:effectRef idx="1">
-                <a:schemeClr val="accent5"/>
-              </a:effectRef>
-              <a:fontRef idx="minor">
-                <a:schemeClr val="dk1"/>
-              </a:fontRef>
-            </p:style>
-            <p:txBody>
-              <a:bodyPr rtlCol="0" anchor="ctr"/>
-              <a:lstStyle/>
-              <a:p>
-                <a:pPr algn="ctr"/>
-                <a:endParaRPr lang="ru-RU" dirty="0"/>
-              </a:p>
-            </p:txBody>
-          </p:sp>
-          <p:grpSp>
-            <p:nvGrpSpPr>
-              <p:cNvPr id="35" name="Группа 34">
-                <a:extLst>
-                  <a:ext uri="{FF2B5EF4-FFF2-40B4-BE49-F238E27FC236}">
-                    <a16:creationId xmlns:a16="http://schemas.microsoft.com/office/drawing/2014/main" id="{EF412356-E191-5E00-78D1-3F0158EC2AD4}"/>
-                  </a:ext>
-                </a:extLst>
-              </p:cNvPr>
-              <p:cNvGrpSpPr/>
-              <p:nvPr/>
-            </p:nvGrpSpPr>
-            <p:grpSpPr>
-              <a:xfrm>
-                <a:off x="4529238" y="2020722"/>
-                <a:ext cx="2371521" cy="1369927"/>
-                <a:chOff x="4529238" y="2020722"/>
-                <a:chExt cx="2371521" cy="1369927"/>
-              </a:xfrm>
-            </p:grpSpPr>
-            <p:sp>
-              <p:nvSpPr>
-                <p:cNvPr id="36" name="TextBox 35">
-                  <a:extLst>
-                    <a:ext uri="{FF2B5EF4-FFF2-40B4-BE49-F238E27FC236}">
-                      <a16:creationId xmlns:a16="http://schemas.microsoft.com/office/drawing/2014/main" id="{9A9F783B-E194-C60D-85F1-53B26C4539DB}"/>
-                    </a:ext>
-                  </a:extLst>
-                </p:cNvPr>
-                <p:cNvSpPr txBox="1"/>
-                <p:nvPr/>
-              </p:nvSpPr>
-              <p:spPr>
-                <a:xfrm>
-                  <a:off x="4746764" y="2020722"/>
-                  <a:ext cx="1935915" cy="307777"/>
-                </a:xfrm>
-                <a:prstGeom prst="rect">
-                  <a:avLst/>
-                </a:prstGeom>
-                <a:noFill/>
-              </p:spPr>
-              <p:txBody>
-                <a:bodyPr wrap="none" rtlCol="0">
-                  <a:spAutoFit/>
-                </a:bodyPr>
-                <a:lstStyle/>
-                <a:p>
-                  <a:r>
-                    <a:rPr lang="ru-RU" sz="1400" b="1" dirty="0">
-                      <a:latin typeface="Arial" panose="020B0604020202020204" pitchFamily="34" charset="0"/>
-                      <a:cs typeface="Arial" panose="020B0604020202020204" pitchFamily="34" charset="0"/>
-                    </a:rPr>
-                    <a:t>Модуль консенсуса</a:t>
-                  </a:r>
-                </a:p>
-              </p:txBody>
-            </p:sp>
-            <p:grpSp>
-              <p:nvGrpSpPr>
-                <p:cNvPr id="37" name="Группа 36">
-                  <a:extLst>
-                    <a:ext uri="{FF2B5EF4-FFF2-40B4-BE49-F238E27FC236}">
-                      <a16:creationId xmlns:a16="http://schemas.microsoft.com/office/drawing/2014/main" id="{53531092-764C-2CF4-695D-6CA44BDDA2AA}"/>
-                    </a:ext>
-                  </a:extLst>
-                </p:cNvPr>
-                <p:cNvGrpSpPr/>
-                <p:nvPr/>
-              </p:nvGrpSpPr>
-              <p:grpSpPr>
-                <a:xfrm>
-                  <a:off x="4529238" y="2360243"/>
-                  <a:ext cx="2371521" cy="1030406"/>
-                  <a:chOff x="4529238" y="2360243"/>
-                  <a:chExt cx="2371521" cy="1030406"/>
-                </a:xfrm>
-              </p:grpSpPr>
-              <p:sp>
-                <p:nvSpPr>
-                  <p:cNvPr id="38" name="Прямоугольник: скругленные углы 37">
-                    <a:extLst>
-                      <a:ext uri="{FF2B5EF4-FFF2-40B4-BE49-F238E27FC236}">
-                        <a16:creationId xmlns:a16="http://schemas.microsoft.com/office/drawing/2014/main" id="{AA7DCE9A-AEB2-4B17-D74B-C35A3415DC83}"/>
-                      </a:ext>
-                    </a:extLst>
-                  </p:cNvPr>
-                  <p:cNvSpPr/>
-                  <p:nvPr/>
-                </p:nvSpPr>
-                <p:spPr>
-                  <a:xfrm>
-                    <a:off x="4529238" y="2360243"/>
-                    <a:ext cx="1195906" cy="497204"/>
-                  </a:xfrm>
-                  <a:prstGeom prst="roundRect">
-                    <a:avLst/>
-                  </a:prstGeom>
-                </p:spPr>
-                <p:style>
-                  <a:lnRef idx="2">
-                    <a:schemeClr val="accent6"/>
-                  </a:lnRef>
-                  <a:fillRef idx="1">
-                    <a:schemeClr val="lt1"/>
-                  </a:fillRef>
-                  <a:effectRef idx="0">
-                    <a:schemeClr val="accent6"/>
-                  </a:effectRef>
-                  <a:fontRef idx="minor">
-                    <a:schemeClr val="dk1"/>
-                  </a:fontRef>
-                </p:style>
-                <p:txBody>
-                  <a:bodyPr rtlCol="0" anchor="ctr"/>
-                  <a:lstStyle/>
-                  <a:p>
-                    <a:pPr algn="ctr"/>
-                    <a:r>
-                      <a:rPr lang="ru-RU" sz="1000" dirty="0">
-                        <a:latin typeface="Arial" panose="020B0604020202020204" pitchFamily="34" charset="0"/>
-                        <a:cs typeface="Arial" panose="020B0604020202020204" pitchFamily="34" charset="0"/>
-                      </a:rPr>
-                      <a:t>Количество валидаторов</a:t>
-                    </a:r>
-                  </a:p>
-                </p:txBody>
-              </p:sp>
-              <p:grpSp>
-                <p:nvGrpSpPr>
-                  <p:cNvPr id="39" name="Группа 38">
-                    <a:extLst>
-                      <a:ext uri="{FF2B5EF4-FFF2-40B4-BE49-F238E27FC236}">
-                        <a16:creationId xmlns:a16="http://schemas.microsoft.com/office/drawing/2014/main" id="{67E7AC84-C32C-0C6E-00D0-4D280214C0F8}"/>
-                      </a:ext>
-                    </a:extLst>
-                  </p:cNvPr>
-                  <p:cNvGrpSpPr/>
-                  <p:nvPr/>
-                </p:nvGrpSpPr>
-                <p:grpSpPr>
-                  <a:xfrm>
-                    <a:off x="4981162" y="2360243"/>
-                    <a:ext cx="1919597" cy="1030406"/>
-                    <a:chOff x="4981162" y="2360243"/>
-                    <a:chExt cx="1919597" cy="1030406"/>
-                  </a:xfrm>
-                </p:grpSpPr>
-                <p:sp>
-                  <p:nvSpPr>
-                    <p:cNvPr id="40" name="Прямоугольник: скругленные углы 39">
-                      <a:extLst>
-                        <a:ext uri="{FF2B5EF4-FFF2-40B4-BE49-F238E27FC236}">
-                          <a16:creationId xmlns:a16="http://schemas.microsoft.com/office/drawing/2014/main" id="{3F8A0CC1-9E89-1F62-4751-9CF04398923B}"/>
-                        </a:ext>
-                      </a:extLst>
-                    </p:cNvPr>
-                    <p:cNvSpPr/>
-                    <p:nvPr/>
-                  </p:nvSpPr>
-                  <p:spPr>
-                    <a:xfrm>
-                      <a:off x="5789006" y="2360243"/>
-                      <a:ext cx="1111753" cy="497204"/>
-                    </a:xfrm>
-                    <a:prstGeom prst="roundRect">
-                      <a:avLst/>
-                    </a:prstGeom>
-                  </p:spPr>
-                  <p:style>
-                    <a:lnRef idx="2">
-                      <a:schemeClr val="accent6"/>
-                    </a:lnRef>
-                    <a:fillRef idx="1">
-                      <a:schemeClr val="lt1"/>
-                    </a:fillRef>
-                    <a:effectRef idx="0">
-                      <a:schemeClr val="accent6"/>
-                    </a:effectRef>
-                    <a:fontRef idx="minor">
-                      <a:schemeClr val="dk1"/>
-                    </a:fontRef>
-                  </p:style>
-                  <p:txBody>
-                    <a:bodyPr rtlCol="0" anchor="ctr"/>
-                    <a:lstStyle/>
-                    <a:p>
-                      <a:pPr algn="ctr"/>
-                      <a:r>
-                        <a:rPr lang="ru-RU" sz="1000" dirty="0">
-                          <a:latin typeface="Arial" panose="020B0604020202020204" pitchFamily="34" charset="0"/>
-                          <a:cs typeface="Arial" panose="020B0604020202020204" pitchFamily="34" charset="0"/>
-                        </a:rPr>
-                        <a:t>Количество слотов для финализации </a:t>
-                      </a:r>
-                    </a:p>
-                  </p:txBody>
-                </p:sp>
-                <p:sp>
-                  <p:nvSpPr>
-                    <p:cNvPr id="41" name="Прямоугольник: скругленные углы 40">
-                      <a:extLst>
-                        <a:ext uri="{FF2B5EF4-FFF2-40B4-BE49-F238E27FC236}">
-                          <a16:creationId xmlns:a16="http://schemas.microsoft.com/office/drawing/2014/main" id="{14A532CC-9155-DBFB-A3BF-F676CF7357A6}"/>
-                        </a:ext>
-                      </a:extLst>
-                    </p:cNvPr>
-                    <p:cNvSpPr/>
-                    <p:nvPr/>
-                  </p:nvSpPr>
-                  <p:spPr>
-                    <a:xfrm>
-                      <a:off x="4981162" y="2907190"/>
-                      <a:ext cx="1615688" cy="483459"/>
-                    </a:xfrm>
-                    <a:prstGeom prst="roundRect">
-                      <a:avLst/>
-                    </a:prstGeom>
-                  </p:spPr>
-                  <p:style>
-                    <a:lnRef idx="2">
-                      <a:schemeClr val="accent6"/>
-                    </a:lnRef>
-                    <a:fillRef idx="1">
-                      <a:schemeClr val="lt1"/>
-                    </a:fillRef>
-                    <a:effectRef idx="0">
-                      <a:schemeClr val="accent6"/>
-                    </a:effectRef>
-                    <a:fontRef idx="minor">
-                      <a:schemeClr val="dk1"/>
-                    </a:fontRef>
-                  </p:style>
-                  <p:txBody>
-                    <a:bodyPr rtlCol="0" anchor="ctr"/>
-                    <a:lstStyle/>
-                    <a:p>
-                      <a:pPr algn="ctr"/>
-                      <a:r>
-                        <a:rPr lang="ru-RU" sz="1000" dirty="0">
-                          <a:latin typeface="Arial" panose="020B0604020202020204" pitchFamily="34" charset="0"/>
-                          <a:cs typeface="Arial" panose="020B0604020202020204" pitchFamily="34" charset="0"/>
-                        </a:rPr>
-                        <a:t>Набор параметров для валидаторных блоков</a:t>
-                      </a:r>
-                    </a:p>
-                  </p:txBody>
-                </p:sp>
-              </p:grpSp>
-            </p:grpSp>
-          </p:grpSp>
-        </p:grpSp>
-        <p:cxnSp>
-          <p:nvCxnSpPr>
-            <p:cNvPr id="45" name="Прямая со стрелкой 44">
-              <a:extLst>
-                <a:ext uri="{FF2B5EF4-FFF2-40B4-BE49-F238E27FC236}">
-                  <a16:creationId xmlns:a16="http://schemas.microsoft.com/office/drawing/2014/main" id="{00E76FC0-9E80-1F7F-7A4E-67A6F5453560}"/>
-                </a:ext>
-              </a:extLst>
-            </p:cNvPr>
-            <p:cNvCxnSpPr>
-              <a:stCxn id="25" idx="3"/>
-              <a:endCxn id="5" idx="1"/>
-            </p:cNvCxnSpPr>
-            <p:nvPr/>
-          </p:nvCxnSpPr>
-          <p:spPr>
-            <a:xfrm>
-              <a:off x="3947324" y="3526909"/>
-              <a:ext cx="458291" cy="0"/>
-            </a:xfrm>
-            <a:prstGeom prst="straightConnector1">
-              <a:avLst/>
-            </a:prstGeom>
-            <a:ln>
-              <a:headEnd type="triangle"/>
-              <a:tailEnd type="triangle"/>
-            </a:ln>
-          </p:spPr>
-          <p:style>
-            <a:lnRef idx="1">
-              <a:schemeClr val="accent1"/>
-            </a:lnRef>
-            <a:fillRef idx="0">
-              <a:schemeClr val="accent1"/>
-            </a:fillRef>
-            <a:effectRef idx="0">
-              <a:schemeClr val="accent1"/>
-            </a:effectRef>
-            <a:fontRef idx="minor">
-              <a:schemeClr val="tx1"/>
-            </a:fontRef>
-          </p:style>
-        </p:cxnSp>
-        <p:cxnSp>
-          <p:nvCxnSpPr>
-            <p:cNvPr id="47" name="Прямая со стрелкой 46">
-              <a:extLst>
-                <a:ext uri="{FF2B5EF4-FFF2-40B4-BE49-F238E27FC236}">
-                  <a16:creationId xmlns:a16="http://schemas.microsoft.com/office/drawing/2014/main" id="{64D1DAD8-61DE-75E5-34F0-89332CD71137}"/>
-                </a:ext>
-              </a:extLst>
-            </p:cNvPr>
-            <p:cNvCxnSpPr>
-              <a:cxnSpLocks/>
-              <a:stCxn id="6" idx="0"/>
-              <a:endCxn id="16" idx="2"/>
-            </p:cNvCxnSpPr>
-            <p:nvPr/>
-          </p:nvCxnSpPr>
-          <p:spPr>
-            <a:xfrm flipH="1" flipV="1">
-              <a:off x="5688054" y="2503849"/>
-              <a:ext cx="1" cy="334793"/>
-            </a:xfrm>
-            <a:prstGeom prst="straightConnector1">
-              <a:avLst/>
-            </a:prstGeom>
-            <a:ln>
-              <a:headEnd type="triangle"/>
-              <a:tailEnd type="triangle"/>
-            </a:ln>
-          </p:spPr>
-          <p:style>
-            <a:lnRef idx="1">
-              <a:schemeClr val="accent1"/>
-            </a:lnRef>
-            <a:fillRef idx="0">
-              <a:schemeClr val="accent1"/>
-            </a:fillRef>
-            <a:effectRef idx="0">
-              <a:schemeClr val="accent1"/>
-            </a:effectRef>
-            <a:fontRef idx="minor">
-              <a:schemeClr val="tx1"/>
-            </a:fontRef>
-          </p:style>
-        </p:cxnSp>
-        <p:cxnSp>
-          <p:nvCxnSpPr>
-            <p:cNvPr id="51" name="Прямая со стрелкой 50">
-              <a:extLst>
-                <a:ext uri="{FF2B5EF4-FFF2-40B4-BE49-F238E27FC236}">
-                  <a16:creationId xmlns:a16="http://schemas.microsoft.com/office/drawing/2014/main" id="{2676D7C3-E8D3-B75E-58B4-BB4F91F38944}"/>
-                </a:ext>
-              </a:extLst>
-            </p:cNvPr>
-            <p:cNvCxnSpPr>
-              <a:stCxn id="5" idx="3"/>
-              <a:endCxn id="34" idx="1"/>
-            </p:cNvCxnSpPr>
-            <p:nvPr/>
-          </p:nvCxnSpPr>
-          <p:spPr>
-            <a:xfrm>
-              <a:off x="6905413" y="3526909"/>
-              <a:ext cx="550184" cy="0"/>
-            </a:xfrm>
-            <a:prstGeom prst="straightConnector1">
-              <a:avLst/>
-            </a:prstGeom>
-            <a:ln>
-              <a:headEnd type="triangle"/>
-              <a:tailEnd type="triangle"/>
-            </a:ln>
-          </p:spPr>
-          <p:style>
-            <a:lnRef idx="1">
-              <a:schemeClr val="accent1"/>
-            </a:lnRef>
-            <a:fillRef idx="0">
-              <a:schemeClr val="accent1"/>
-            </a:fillRef>
-            <a:effectRef idx="0">
-              <a:schemeClr val="accent1"/>
-            </a:effectRef>
-            <a:fontRef idx="minor">
-              <a:schemeClr val="tx1"/>
-            </a:fontRef>
-          </p:style>
-        </p:cxnSp>
-        <p:grpSp>
-          <p:nvGrpSpPr>
-            <p:cNvPr id="52" name="Группа 51">
-              <a:extLst>
-                <a:ext uri="{FF2B5EF4-FFF2-40B4-BE49-F238E27FC236}">
-                  <a16:creationId xmlns:a16="http://schemas.microsoft.com/office/drawing/2014/main" id="{DDDBB41C-D78A-6C1C-83C2-1C542C4EE437}"/>
-                </a:ext>
-              </a:extLst>
-            </p:cNvPr>
-            <p:cNvGrpSpPr/>
-            <p:nvPr/>
-          </p:nvGrpSpPr>
-          <p:grpSpPr>
-            <a:xfrm>
-              <a:off x="4405615" y="4610233"/>
-              <a:ext cx="2499798" cy="1376534"/>
-              <a:chOff x="4464823" y="2007178"/>
-              <a:chExt cx="2499798" cy="1376534"/>
-            </a:xfrm>
-          </p:grpSpPr>
-          <p:sp>
-            <p:nvSpPr>
-              <p:cNvPr id="53" name="Прямоугольник: скругленные углы 52">
-                <a:extLst>
-                  <a:ext uri="{FF2B5EF4-FFF2-40B4-BE49-F238E27FC236}">
-                    <a16:creationId xmlns:a16="http://schemas.microsoft.com/office/drawing/2014/main" id="{410806A1-B63B-8731-106C-EA1BDC0CE2B5}"/>
-                  </a:ext>
-                </a:extLst>
-              </p:cNvPr>
-              <p:cNvSpPr/>
-              <p:nvPr/>
-            </p:nvSpPr>
-            <p:spPr>
-              <a:xfrm>
-                <a:off x="4464823" y="2007178"/>
-                <a:ext cx="2499798" cy="1376534"/>
-              </a:xfrm>
-              <a:prstGeom prst="roundRect">
-                <a:avLst/>
-              </a:prstGeom>
-            </p:spPr>
-            <p:style>
-              <a:lnRef idx="1">
-                <a:schemeClr val="accent5"/>
-              </a:lnRef>
-              <a:fillRef idx="2">
-                <a:schemeClr val="accent5"/>
-              </a:fillRef>
-              <a:effectRef idx="1">
-                <a:schemeClr val="accent5"/>
-              </a:effectRef>
-              <a:fontRef idx="minor">
-                <a:schemeClr val="dk1"/>
-              </a:fontRef>
-            </p:style>
-            <p:txBody>
-              <a:bodyPr rtlCol="0" anchor="ctr"/>
-              <a:lstStyle/>
-              <a:p>
-                <a:pPr algn="ctr"/>
-                <a:endParaRPr lang="ru-RU" dirty="0"/>
-              </a:p>
-            </p:txBody>
-          </p:sp>
-          <p:grpSp>
-            <p:nvGrpSpPr>
-              <p:cNvPr id="54" name="Группа 53">
-                <a:extLst>
-                  <a:ext uri="{FF2B5EF4-FFF2-40B4-BE49-F238E27FC236}">
-                    <a16:creationId xmlns:a16="http://schemas.microsoft.com/office/drawing/2014/main" id="{8697927A-DAE6-B162-5441-8D81722554D2}"/>
-                  </a:ext>
-                </a:extLst>
-              </p:cNvPr>
-              <p:cNvGrpSpPr/>
-              <p:nvPr/>
-            </p:nvGrpSpPr>
-            <p:grpSpPr>
-              <a:xfrm>
-                <a:off x="4561778" y="2064212"/>
-                <a:ext cx="2300268" cy="889738"/>
-                <a:chOff x="4561778" y="2064212"/>
-                <a:chExt cx="2300268" cy="889738"/>
-              </a:xfrm>
-            </p:grpSpPr>
-            <p:sp>
-              <p:nvSpPr>
-                <p:cNvPr id="55" name="TextBox 54">
-                  <a:extLst>
-                    <a:ext uri="{FF2B5EF4-FFF2-40B4-BE49-F238E27FC236}">
-                      <a16:creationId xmlns:a16="http://schemas.microsoft.com/office/drawing/2014/main" id="{7A9A3C1C-1B4C-1805-893B-4AAD11CDE998}"/>
-                    </a:ext>
-                  </a:extLst>
-                </p:cNvPr>
-                <p:cNvSpPr txBox="1"/>
-                <p:nvPr/>
-              </p:nvSpPr>
-              <p:spPr>
-                <a:xfrm>
-                  <a:off x="4937231" y="2064212"/>
-                  <a:ext cx="1620059" cy="307777"/>
-                </a:xfrm>
-                <a:prstGeom prst="rect">
-                  <a:avLst/>
-                </a:prstGeom>
-                <a:noFill/>
-              </p:spPr>
-              <p:txBody>
-                <a:bodyPr wrap="none" rtlCol="0">
-                  <a:spAutoFit/>
-                </a:bodyPr>
-                <a:lstStyle/>
-                <a:p>
-                  <a:r>
-                    <a:rPr lang="ru-RU" sz="1400" b="1" dirty="0">
-                      <a:latin typeface="Arial" panose="020B0604020202020204" pitchFamily="34" charset="0"/>
-                      <a:cs typeface="Arial" panose="020B0604020202020204" pitchFamily="34" charset="0"/>
-                    </a:rPr>
-                    <a:t>Модуль вывода</a:t>
-                  </a:r>
-                </a:p>
-              </p:txBody>
-            </p:sp>
-            <p:grpSp>
-              <p:nvGrpSpPr>
-                <p:cNvPr id="56" name="Группа 55">
-                  <a:extLst>
-                    <a:ext uri="{FF2B5EF4-FFF2-40B4-BE49-F238E27FC236}">
-                      <a16:creationId xmlns:a16="http://schemas.microsoft.com/office/drawing/2014/main" id="{339EA82B-5139-168E-6103-CAC051F7736F}"/>
-                    </a:ext>
-                  </a:extLst>
-                </p:cNvPr>
-                <p:cNvGrpSpPr/>
-                <p:nvPr/>
-              </p:nvGrpSpPr>
-              <p:grpSpPr>
-                <a:xfrm>
-                  <a:off x="4561778" y="2565822"/>
-                  <a:ext cx="2300268" cy="388128"/>
-                  <a:chOff x="4561778" y="2565822"/>
-                  <a:chExt cx="2300268" cy="388128"/>
-                </a:xfrm>
-              </p:grpSpPr>
-              <p:sp>
-                <p:nvSpPr>
-                  <p:cNvPr id="57" name="Прямоугольник: скругленные углы 56">
-                    <a:extLst>
-                      <a:ext uri="{FF2B5EF4-FFF2-40B4-BE49-F238E27FC236}">
-                        <a16:creationId xmlns:a16="http://schemas.microsoft.com/office/drawing/2014/main" id="{8BF4045D-A8C5-3C82-E51A-7F9E685E6E51}"/>
-                      </a:ext>
-                    </a:extLst>
-                  </p:cNvPr>
-                  <p:cNvSpPr/>
-                  <p:nvPr/>
-                </p:nvSpPr>
-                <p:spPr>
-                  <a:xfrm>
-                    <a:off x="4561778" y="2565823"/>
-                    <a:ext cx="1111753" cy="388127"/>
-                  </a:xfrm>
-                  <a:prstGeom prst="roundRect">
-                    <a:avLst/>
-                  </a:prstGeom>
-                </p:spPr>
-                <p:style>
-                  <a:lnRef idx="2">
-                    <a:schemeClr val="accent6"/>
-                  </a:lnRef>
-                  <a:fillRef idx="1">
-                    <a:schemeClr val="lt1"/>
-                  </a:fillRef>
-                  <a:effectRef idx="0">
-                    <a:schemeClr val="accent6"/>
-                  </a:effectRef>
-                  <a:fontRef idx="minor">
-                    <a:schemeClr val="dk1"/>
-                  </a:fontRef>
-                </p:style>
-                <p:txBody>
-                  <a:bodyPr rtlCol="0" anchor="ctr"/>
-                  <a:lstStyle/>
-                  <a:p>
-                    <a:pPr algn="ctr"/>
-                    <a:r>
-                      <a:rPr lang="ru-RU" sz="1000" dirty="0">
-                        <a:latin typeface="Arial" panose="020B0604020202020204" pitchFamily="34" charset="0"/>
-                        <a:cs typeface="Arial" panose="020B0604020202020204" pitchFamily="34" charset="0"/>
-                      </a:rPr>
-                      <a:t>Визуализация</a:t>
-                    </a:r>
-                    <a:r>
-                      <a:rPr lang="en-US" sz="1000" dirty="0">
-                        <a:latin typeface="Arial" panose="020B0604020202020204" pitchFamily="34" charset="0"/>
-                        <a:cs typeface="Arial" panose="020B0604020202020204" pitchFamily="34" charset="0"/>
-                      </a:rPr>
-                      <a:t>DAG</a:t>
-                    </a:r>
-                    <a:endParaRPr lang="ru-RU" sz="1000" dirty="0">
-                      <a:latin typeface="Arial" panose="020B0604020202020204" pitchFamily="34" charset="0"/>
-                      <a:cs typeface="Arial" panose="020B0604020202020204" pitchFamily="34" charset="0"/>
-                    </a:endParaRPr>
-                  </a:p>
-                </p:txBody>
-              </p:sp>
-              <p:sp>
-                <p:nvSpPr>
-                  <p:cNvPr id="59" name="Прямоугольник: скругленные углы 58">
-                    <a:extLst>
-                      <a:ext uri="{FF2B5EF4-FFF2-40B4-BE49-F238E27FC236}">
-                        <a16:creationId xmlns:a16="http://schemas.microsoft.com/office/drawing/2014/main" id="{91313D08-A131-729E-AFA6-84CC29545DD3}"/>
-                      </a:ext>
-                    </a:extLst>
-                  </p:cNvPr>
-                  <p:cNvSpPr/>
-                  <p:nvPr/>
-                </p:nvSpPr>
-                <p:spPr>
-                  <a:xfrm>
-                    <a:off x="5799631" y="2565822"/>
-                    <a:ext cx="1062415" cy="388127"/>
-                  </a:xfrm>
-                  <a:prstGeom prst="roundRect">
-                    <a:avLst/>
-                  </a:prstGeom>
-                </p:spPr>
-                <p:style>
-                  <a:lnRef idx="2">
-                    <a:schemeClr val="accent6"/>
-                  </a:lnRef>
-                  <a:fillRef idx="1">
-                    <a:schemeClr val="lt1"/>
-                  </a:fillRef>
-                  <a:effectRef idx="0">
-                    <a:schemeClr val="accent6"/>
-                  </a:effectRef>
-                  <a:fontRef idx="minor">
-                    <a:schemeClr val="dk1"/>
-                  </a:fontRef>
-                </p:style>
-                <p:txBody>
-                  <a:bodyPr rtlCol="0" anchor="ctr"/>
-                  <a:lstStyle/>
-                  <a:p>
-                    <a:pPr algn="ctr"/>
-                    <a:r>
-                      <a:rPr lang="ru-RU" sz="1000" dirty="0">
-                        <a:latin typeface="Arial" panose="020B0604020202020204" pitchFamily="34" charset="0"/>
-                        <a:cs typeface="Arial" panose="020B0604020202020204" pitchFamily="34" charset="0"/>
-                      </a:rPr>
-                      <a:t>Графики</a:t>
-                    </a:r>
-                  </a:p>
-                </p:txBody>
-              </p:sp>
-            </p:grpSp>
-          </p:grpSp>
-        </p:grpSp>
-        <p:cxnSp>
-          <p:nvCxnSpPr>
-            <p:cNvPr id="62" name="Прямая со стрелкой 61">
-              <a:extLst>
-                <a:ext uri="{FF2B5EF4-FFF2-40B4-BE49-F238E27FC236}">
-                  <a16:creationId xmlns:a16="http://schemas.microsoft.com/office/drawing/2014/main" id="{DDDBC5E4-625A-B29C-7274-6AB740730A5C}"/>
-                </a:ext>
-              </a:extLst>
-            </p:cNvPr>
-            <p:cNvCxnSpPr>
-              <a:stCxn id="5" idx="2"/>
-              <a:endCxn id="53" idx="0"/>
-            </p:cNvCxnSpPr>
-            <p:nvPr/>
-          </p:nvCxnSpPr>
-          <p:spPr>
-            <a:xfrm>
-              <a:off x="5655514" y="4215176"/>
-              <a:ext cx="0" cy="395057"/>
-            </a:xfrm>
-            <a:prstGeom prst="straightConnector1">
-              <a:avLst/>
-            </a:prstGeom>
-            <a:ln>
-              <a:headEnd type="triangle"/>
-              <a:tailEnd type="triangle"/>
-            </a:ln>
-          </p:spPr>
-          <p:style>
-            <a:lnRef idx="1">
-              <a:schemeClr val="accent1"/>
-            </a:lnRef>
-            <a:fillRef idx="0">
-              <a:schemeClr val="accent1"/>
-            </a:fillRef>
-            <a:effectRef idx="0">
-              <a:schemeClr val="accent1"/>
-            </a:effectRef>
-            <a:fontRef idx="minor">
-              <a:schemeClr val="tx1"/>
-            </a:fontRef>
-          </p:style>
-        </p:cxnSp>
-      </p:grpSp>
-    </p:spTree>
-    <p:extLst>
-      <p:ext uri="{BB962C8B-B14F-4D97-AF65-F5344CB8AC3E}">
-        <p14:creationId xmlns:p14="http://schemas.microsoft.com/office/powerpoint/2010/main" val="256568697"/>
-      </p:ext>
-    </p:extLst>
-  </p:cSld>
-  <p:clrMapOvr>
-    <a:masterClrMapping/>
-  </p:clrMapOvr>
-</p:sld>
-</file>
-
-<file path=ppt/slides/slide15.xml><?xml version="1.0" encoding="utf-8"?>
-<p:sld xmlns:a="http://schemas.openxmlformats.org/drawingml/2006/main" xmlns:r="http://schemas.openxmlformats.org/officeDocument/2006/relationships" xmlns:p="http://schemas.openxmlformats.org/presentationml/2006/main">
-  <p:cSld>
-    <p:spTree>
-      <p:nvGrpSpPr>
-        <p:cNvPr id="1" name="">
-          <a:extLst>
-            <a:ext uri="{FF2B5EF4-FFF2-40B4-BE49-F238E27FC236}">
-              <a16:creationId xmlns:a16="http://schemas.microsoft.com/office/drawing/2014/main" id="{4F55CB8A-48BA-0469-4FFD-A1D9ADDE4651}"/>
-            </a:ext>
-          </a:extLst>
-        </p:cNvPr>
-        <p:cNvGrpSpPr/>
-        <p:nvPr/>
-      </p:nvGrpSpPr>
-      <p:grpSpPr>
-        <a:xfrm>
-          <a:off x="0" y="0"/>
-          <a:ext cx="0" cy="0"/>
-          <a:chOff x="0" y="0"/>
-          <a:chExt cx="0" cy="0"/>
-        </a:xfrm>
-      </p:grpSpPr>
-      <p:pic>
-        <p:nvPicPr>
-          <p:cNvPr id="81" name="Рисунок 80">
-            <a:extLst>
-              <a:ext uri="{FF2B5EF4-FFF2-40B4-BE49-F238E27FC236}">
-                <a16:creationId xmlns:a16="http://schemas.microsoft.com/office/drawing/2014/main" id="{D38E9BD8-7B88-24EA-A338-5347E2ED5570}"/>
-              </a:ext>
-            </a:extLst>
-          </p:cNvPr>
-          <p:cNvPicPr>
-            <a:picLocks noChangeAspect="1"/>
-          </p:cNvPicPr>
-          <p:nvPr/>
-        </p:nvPicPr>
-        <p:blipFill>
-          <a:blip r:embed="rId3"/>
-          <a:stretch>
-            <a:fillRect/>
-          </a:stretch>
-        </p:blipFill>
-        <p:spPr>
-          <a:xfrm>
-            <a:off x="2508550" y="507623"/>
-            <a:ext cx="6536790" cy="3605760"/>
-          </a:xfrm>
-          <a:prstGeom prst="rect">
-            <a:avLst/>
-          </a:prstGeom>
-        </p:spPr>
-      </p:pic>
-      <p:sp>
-        <p:nvSpPr>
-          <p:cNvPr id="4" name="TextBox 3">
-            <a:extLst>
-              <a:ext uri="{FF2B5EF4-FFF2-40B4-BE49-F238E27FC236}">
-                <a16:creationId xmlns:a16="http://schemas.microsoft.com/office/drawing/2014/main" id="{42F44561-1F1D-959A-180F-5CA9CFFC10FA}"/>
-              </a:ext>
-            </a:extLst>
-          </p:cNvPr>
-          <p:cNvSpPr txBox="1"/>
-          <p:nvPr/>
-        </p:nvSpPr>
-        <p:spPr>
-          <a:xfrm>
-            <a:off x="2949340" y="109994"/>
-            <a:ext cx="6096000" cy="369332"/>
-          </a:xfrm>
-          <a:prstGeom prst="rect">
-            <a:avLst/>
-          </a:prstGeom>
-          <a:noFill/>
-        </p:spPr>
-        <p:txBody>
-          <a:bodyPr wrap="square">
-            <a:spAutoFit/>
-          </a:bodyPr>
-          <a:lstStyle/>
-          <a:p>
-            <a:r>
-              <a:rPr lang="ru-RU" sz="1800" b="1" dirty="0">
-                <a:solidFill>
-                  <a:srgbClr val="000000"/>
-                </a:solidFill>
-                <a:latin typeface="Arial"/>
-                <a:cs typeface="Arial"/>
-              </a:rPr>
-              <a:t>Архитектура эмулятора модели </a:t>
-            </a:r>
-            <a:r>
-              <a:rPr lang="en-US" sz="1800" b="1" dirty="0">
-                <a:solidFill>
-                  <a:srgbClr val="000000"/>
-                </a:solidFill>
-                <a:latin typeface="Arial"/>
-                <a:cs typeface="Arial"/>
-              </a:rPr>
-              <a:t>DAG-</a:t>
-            </a:r>
-            <a:r>
-              <a:rPr lang="ru-RU" sz="1800" b="1" dirty="0">
-                <a:solidFill>
-                  <a:srgbClr val="000000"/>
-                </a:solidFill>
-                <a:latin typeface="Arial"/>
-                <a:cs typeface="Arial"/>
-              </a:rPr>
-              <a:t>реестра</a:t>
-            </a:r>
-            <a:endParaRPr lang="ru-RU" sz="1800" dirty="0"/>
-          </a:p>
-        </p:txBody>
-      </p:sp>
-      <p:pic>
-        <p:nvPicPr>
-          <p:cNvPr id="30" name="Рисунок 29">
-            <a:extLst>
-              <a:ext uri="{FF2B5EF4-FFF2-40B4-BE49-F238E27FC236}">
-                <a16:creationId xmlns:a16="http://schemas.microsoft.com/office/drawing/2014/main" id="{527D2DEB-1609-6416-1D11-A22FB8A40C4E}"/>
-              </a:ext>
-            </a:extLst>
-          </p:cNvPr>
-          <p:cNvPicPr>
-            <a:picLocks noChangeAspect="1"/>
-          </p:cNvPicPr>
-          <p:nvPr/>
-        </p:nvPicPr>
-        <p:blipFill>
-          <a:blip r:embed="rId4"/>
-          <a:stretch>
-            <a:fillRect/>
-          </a:stretch>
-        </p:blipFill>
-        <p:spPr>
-          <a:xfrm>
-            <a:off x="263136" y="4310612"/>
-            <a:ext cx="3246516" cy="2387334"/>
-          </a:xfrm>
-          <a:prstGeom prst="rect">
-            <a:avLst/>
-          </a:prstGeom>
-          <a:ln>
-            <a:solidFill>
-              <a:schemeClr val="tx1"/>
-            </a:solidFill>
-          </a:ln>
-        </p:spPr>
-      </p:pic>
-      <p:pic>
-        <p:nvPicPr>
-          <p:cNvPr id="43" name="Рисунок 42">
-            <a:extLst>
-              <a:ext uri="{FF2B5EF4-FFF2-40B4-BE49-F238E27FC236}">
-                <a16:creationId xmlns:a16="http://schemas.microsoft.com/office/drawing/2014/main" id="{D65B2084-6497-131B-5104-47A792F88B25}"/>
-              </a:ext>
-            </a:extLst>
-          </p:cNvPr>
-          <p:cNvPicPr>
-            <a:picLocks noChangeAspect="1"/>
-          </p:cNvPicPr>
-          <p:nvPr/>
-        </p:nvPicPr>
-        <p:blipFill>
-          <a:blip r:embed="rId5"/>
-          <a:stretch>
-            <a:fillRect/>
-          </a:stretch>
-        </p:blipFill>
-        <p:spPr>
-          <a:xfrm>
-            <a:off x="8051232" y="4362432"/>
-            <a:ext cx="3877632" cy="2165046"/>
-          </a:xfrm>
-          <a:prstGeom prst="rect">
-            <a:avLst/>
-          </a:prstGeom>
-          <a:ln>
-            <a:solidFill>
-              <a:schemeClr val="tx1"/>
-            </a:solidFill>
-          </a:ln>
-        </p:spPr>
-      </p:pic>
-      <p:cxnSp>
-        <p:nvCxnSpPr>
-          <p:cNvPr id="60" name="Соединитель: уступ 59">
-            <a:extLst>
-              <a:ext uri="{FF2B5EF4-FFF2-40B4-BE49-F238E27FC236}">
-                <a16:creationId xmlns:a16="http://schemas.microsoft.com/office/drawing/2014/main" id="{854E6B0A-EFF8-7BC9-D901-2DA23614C1A4}"/>
-              </a:ext>
-            </a:extLst>
-          </p:cNvPr>
-          <p:cNvCxnSpPr>
-            <a:cxnSpLocks/>
-            <a:endCxn id="30" idx="0"/>
-          </p:cNvCxnSpPr>
-          <p:nvPr/>
-        </p:nvCxnSpPr>
-        <p:spPr>
-          <a:xfrm rot="10800000" flipV="1">
-            <a:off x="1886395" y="3429000"/>
-            <a:ext cx="2860535" cy="881612"/>
-          </a:xfrm>
-          <a:prstGeom prst="bentConnector2">
-            <a:avLst/>
-          </a:prstGeom>
-          <a:ln>
-            <a:solidFill>
-              <a:schemeClr val="tx1"/>
-            </a:solidFill>
-            <a:prstDash val="lgDash"/>
-            <a:tailEnd type="triangle"/>
-          </a:ln>
-        </p:spPr>
-        <p:style>
-          <a:lnRef idx="1">
-            <a:schemeClr val="accent1"/>
-          </a:lnRef>
-          <a:fillRef idx="0">
-            <a:schemeClr val="accent1"/>
-          </a:fillRef>
-          <a:effectRef idx="0">
-            <a:schemeClr val="accent1"/>
-          </a:effectRef>
-          <a:fontRef idx="minor">
-            <a:schemeClr val="tx1"/>
-          </a:fontRef>
-        </p:style>
-      </p:cxnSp>
-      <p:cxnSp>
-        <p:nvCxnSpPr>
-          <p:cNvPr id="69" name="Прямая со стрелкой 68">
-            <a:extLst>
-              <a:ext uri="{FF2B5EF4-FFF2-40B4-BE49-F238E27FC236}">
-                <a16:creationId xmlns:a16="http://schemas.microsoft.com/office/drawing/2014/main" id="{59351A4A-BC9B-19E6-2378-0D7BD495CE58}"/>
-              </a:ext>
-            </a:extLst>
-          </p:cNvPr>
-          <p:cNvCxnSpPr>
-            <a:cxnSpLocks/>
-          </p:cNvCxnSpPr>
-          <p:nvPr/>
-        </p:nvCxnSpPr>
-        <p:spPr>
-          <a:xfrm>
-            <a:off x="5682442" y="3864334"/>
-            <a:ext cx="0" cy="498098"/>
-          </a:xfrm>
-          <a:prstGeom prst="straightConnector1">
-            <a:avLst/>
-          </a:prstGeom>
-          <a:ln>
-            <a:solidFill>
-              <a:schemeClr val="tx1"/>
-            </a:solidFill>
-            <a:prstDash val="lgDash"/>
-            <a:tailEnd type="triangle"/>
-          </a:ln>
-        </p:spPr>
-        <p:style>
-          <a:lnRef idx="1">
-            <a:schemeClr val="accent1"/>
-          </a:lnRef>
-          <a:fillRef idx="0">
-            <a:schemeClr val="accent1"/>
-          </a:fillRef>
-          <a:effectRef idx="0">
-            <a:schemeClr val="accent1"/>
-          </a:effectRef>
-          <a:fontRef idx="minor">
-            <a:schemeClr val="tx1"/>
-          </a:fontRef>
-        </p:style>
-      </p:cxnSp>
-      <p:cxnSp>
-        <p:nvCxnSpPr>
-          <p:cNvPr id="72" name="Соединитель: уступ 71">
-            <a:extLst>
-              <a:ext uri="{FF2B5EF4-FFF2-40B4-BE49-F238E27FC236}">
-                <a16:creationId xmlns:a16="http://schemas.microsoft.com/office/drawing/2014/main" id="{0CA6FADD-6DC4-28AD-C6F3-188BCA704525}"/>
-              </a:ext>
-            </a:extLst>
-          </p:cNvPr>
-          <p:cNvCxnSpPr>
-            <a:cxnSpLocks/>
-            <a:endCxn id="43" idx="0"/>
-          </p:cNvCxnSpPr>
-          <p:nvPr/>
-        </p:nvCxnSpPr>
-        <p:spPr>
-          <a:xfrm>
-            <a:off x="6509559" y="3429000"/>
-            <a:ext cx="3480489" cy="933432"/>
-          </a:xfrm>
-          <a:prstGeom prst="bentConnector2">
-            <a:avLst/>
-          </a:prstGeom>
-          <a:ln>
-            <a:solidFill>
-              <a:schemeClr val="tx1"/>
-            </a:solidFill>
-            <a:prstDash val="lgDash"/>
-            <a:tailEnd type="triangle"/>
-          </a:ln>
-        </p:spPr>
-        <p:style>
-          <a:lnRef idx="1">
-            <a:schemeClr val="accent1"/>
-          </a:lnRef>
-          <a:fillRef idx="0">
-            <a:schemeClr val="accent1"/>
-          </a:fillRef>
-          <a:effectRef idx="0">
-            <a:schemeClr val="accent1"/>
-          </a:effectRef>
-          <a:fontRef idx="minor">
-            <a:schemeClr val="tx1"/>
-          </a:fontRef>
-        </p:style>
-      </p:cxnSp>
-      <p:pic>
-        <p:nvPicPr>
-          <p:cNvPr id="74" name="Рисунок 73">
-            <a:extLst>
-              <a:ext uri="{FF2B5EF4-FFF2-40B4-BE49-F238E27FC236}">
-                <a16:creationId xmlns:a16="http://schemas.microsoft.com/office/drawing/2014/main" id="{C76E76CD-4C95-FADD-552D-B22476DB177E}"/>
-              </a:ext>
-            </a:extLst>
-          </p:cNvPr>
-          <p:cNvPicPr>
-            <a:picLocks noChangeAspect="1"/>
-          </p:cNvPicPr>
-          <p:nvPr/>
-        </p:nvPicPr>
-        <p:blipFill>
-          <a:blip r:embed="rId6"/>
-          <a:stretch>
-            <a:fillRect/>
-          </a:stretch>
-        </p:blipFill>
-        <p:spPr>
-          <a:xfrm>
-            <a:off x="3893827" y="4367207"/>
-            <a:ext cx="3773230" cy="2274144"/>
-          </a:xfrm>
-          <a:prstGeom prst="rect">
-            <a:avLst/>
-          </a:prstGeom>
-          <a:ln>
-            <a:solidFill>
-              <a:schemeClr val="tx1"/>
-            </a:solidFill>
-          </a:ln>
-        </p:spPr>
-      </p:pic>
-    </p:spTree>
-    <p:extLst>
-      <p:ext uri="{BB962C8B-B14F-4D97-AF65-F5344CB8AC3E}">
-        <p14:creationId xmlns:p14="http://schemas.microsoft.com/office/powerpoint/2010/main" val="2661387939"/>
       </p:ext>
     </p:extLst>
   </p:cSld>
